--- a/presentations/veloxcon2026-gluten-microsoft/VeloxCon2026_Gluten_Microsoft.pptx
+++ b/presentations/veloxcon2026-gluten-microsoft/VeloxCon2026_Gluten_Microsoft.pptx
@@ -7,26 +7,26 @@
   <p:sldIdLst>
     <p:sldId id="256" r:id="rId7"/>
     <p:sldId id="257" r:id="rId8"/>
-    <p:sldId id="258" r:id="rId9"/>
-    <p:sldId id="259" r:id="rId10"/>
-    <p:sldId id="260" r:id="rId11"/>
-    <p:sldId id="261" r:id="rId12"/>
-    <p:sldId id="262" r:id="rId13"/>
-    <p:sldId id="263" r:id="rId14"/>
-    <p:sldId id="264" r:id="rId15"/>
-    <p:sldId id="265" r:id="rId16"/>
-    <p:sldId id="266" r:id="rId17"/>
-    <p:sldId id="267" r:id="rId18"/>
-    <p:sldId id="268" r:id="rId19"/>
-    <p:sldId id="269" r:id="rId20"/>
-    <p:sldId id="270" r:id="rId21"/>
-    <p:sldId id="271" r:id="rId22"/>
-    <p:sldId id="272" r:id="rId23"/>
-    <p:sldId id="273" r:id="rId24"/>
-    <p:sldId id="274" r:id="rId25"/>
-    <p:sldId id="275" r:id="rId26"/>
-    <p:sldId id="276" r:id="rId27"/>
-    <p:sldId id="277" r:id="rId28"/>
+    <p:sldId id="258" r:id="rId10"/>
+    <p:sldId id="259" r:id="rId11"/>
+    <p:sldId id="260" r:id="rId12"/>
+    <p:sldId id="261" r:id="rId13"/>
+    <p:sldId id="262" r:id="rId14"/>
+    <p:sldId id="263" r:id="rId15"/>
+    <p:sldId id="264" r:id="rId16"/>
+    <p:sldId id="265" r:id="rId17"/>
+    <p:sldId id="266" r:id="rId18"/>
+    <p:sldId id="267" r:id="rId19"/>
+    <p:sldId id="268" r:id="rId20"/>
+    <p:sldId id="269" r:id="rId21"/>
+    <p:sldId id="270" r:id="rId22"/>
+    <p:sldId id="271" r:id="rId23"/>
+    <p:sldId id="272" r:id="rId24"/>
+    <p:sldId id="273" r:id="rId25"/>
+    <p:sldId id="274" r:id="rId26"/>
+    <p:sldId id="275" r:id="rId27"/>
+    <p:sldId id="276" r:id="rId28"/>
+    <p:sldId id="277" r:id="rId29"/>
   </p:sldIdLst>
   <p:sldSz cx="12191695" cy="6858000" type="screen4x3"/>
   <p:notesSz cx="6858000" cy="9144000"/>
@@ -126,6 +126,1266 @@
     </a:lvl9pPr>
   </p:defaultTextStyle>
 </p:presentation>
+</file>
+
+<file path=ppt/notesMasters/notesMaster1.xml><?xml version="1.0" encoding="utf-8"?>
+<p:notesMaster xmlns:a="http://schemas.openxmlformats.org/drawingml/2006/main" xmlns:p="http://schemas.openxmlformats.org/presentationml/2006/main" xmlns:r="http://schemas.openxmlformats.org/officeDocument/2006/relationships">
+  <p:cSld>
+    <p:bg>
+      <p:bgRef idx="1001">
+        <a:schemeClr val="bg1"/>
+      </p:bgRef>
+    </p:bg>
+    <p:spTree>
+      <p:nvGrpSpPr>
+        <p:cNvPr id="1" name=""/>
+        <p:cNvGrpSpPr/>
+        <p:nvPr/>
+      </p:nvGrpSpPr>
+      <p:grpSpPr>
+        <a:xfrm>
+          <a:off x="0" y="0"/>
+          <a:ext cx="0" cy="0"/>
+          <a:chOff x="0" y="0"/>
+          <a:chExt cx="0" cy="0"/>
+        </a:xfrm>
+      </p:grpSpPr>
+      <p:sp>
+        <p:nvSpPr>
+          <p:cNvPr id="2" name="Header Placeholder 1"/>
+          <p:cNvSpPr>
+            <a:spLocks noGrp="1"/>
+          </p:cNvSpPr>
+          <p:nvPr>
+            <p:ph type="hdr" sz="quarter"/>
+          </p:nvPr>
+        </p:nvSpPr>
+        <p:spPr>
+          <a:xfrm>
+            <a:off x="0" y="0"/>
+            <a:ext cx="2971800" cy="457200"/>
+          </a:xfrm>
+          <a:prstGeom prst="rect">
+            <a:avLst/>
+          </a:prstGeom>
+        </p:spPr>
+        <p:txBody>
+          <a:bodyPr vert="horz" lIns="91440" tIns="45720" rIns="91440" bIns="45720" rtlCol="0"/>
+          <a:lstStyle>
+            <a:lvl1pPr algn="l">
+              <a:defRPr sz="1200"/>
+            </a:lvl1pPr>
+          </a:lstStyle>
+          <a:p>
+            <a:endParaRPr lang="en-US"/>
+          </a:p>
+        </p:txBody>
+      </p:sp>
+      <p:sp>
+        <p:nvSpPr>
+          <p:cNvPr id="3" name="Date Placeholder 2"/>
+          <p:cNvSpPr>
+            <a:spLocks noGrp="1"/>
+          </p:cNvSpPr>
+          <p:nvPr>
+            <p:ph type="dt" idx="1"/>
+          </p:nvPr>
+        </p:nvSpPr>
+        <p:spPr>
+          <a:xfrm>
+            <a:off x="3884613" y="0"/>
+            <a:ext cx="2971800" cy="457200"/>
+          </a:xfrm>
+          <a:prstGeom prst="rect">
+            <a:avLst/>
+          </a:prstGeom>
+        </p:spPr>
+        <p:txBody>
+          <a:bodyPr vert="horz" lIns="91440" tIns="45720" rIns="91440" bIns="45720" rtlCol="0"/>
+          <a:lstStyle>
+            <a:lvl1pPr algn="r">
+              <a:defRPr sz="1200"/>
+            </a:lvl1pPr>
+          </a:lstStyle>
+          <a:p>
+            <a:fld id="{0F89C1C7-3DCD-1040-A9CF-14679D8B5DDD}" type="datetimeFigureOut">
+              <a:rPr lang="en-US" smtClean="0"/>
+              <a:t>10/17/16</a:t>
+            </a:fld>
+            <a:endParaRPr lang="en-US"/>
+          </a:p>
+        </p:txBody>
+      </p:sp>
+      <p:sp>
+        <p:nvSpPr>
+          <p:cNvPr id="4" name="Slide Image Placeholder 3"/>
+          <p:cNvSpPr>
+            <a:spLocks noGrp="1" noRot="1" noChangeAspect="1"/>
+          </p:cNvSpPr>
+          <p:nvPr>
+            <p:ph type="sldImg" idx="2"/>
+          </p:nvPr>
+        </p:nvSpPr>
+        <p:spPr>
+          <a:xfrm>
+            <a:off x="1143000" y="685800"/>
+            <a:ext cx="4572000" cy="3429000"/>
+          </a:xfrm>
+          <a:prstGeom prst="rect">
+            <a:avLst/>
+          </a:prstGeom>
+          <a:noFill/>
+          <a:ln w="12700">
+            <a:solidFill>
+              <a:prstClr val="black"/>
+            </a:solidFill>
+          </a:ln>
+        </p:spPr>
+        <p:txBody>
+          <a:bodyPr vert="horz" lIns="91440" tIns="45720" rIns="91440" bIns="45720" rtlCol="0" anchor="ctr"/>
+          <a:lstStyle/>
+          <a:p>
+            <a:endParaRPr lang="en-US"/>
+          </a:p>
+        </p:txBody>
+      </p:sp>
+      <p:sp>
+        <p:nvSpPr>
+          <p:cNvPr id="5" name="Notes Placeholder 4"/>
+          <p:cNvSpPr>
+            <a:spLocks noGrp="1"/>
+          </p:cNvSpPr>
+          <p:nvPr>
+            <p:ph type="body" sz="quarter" idx="3"/>
+          </p:nvPr>
+        </p:nvSpPr>
+        <p:spPr>
+          <a:xfrm>
+            <a:off x="685800" y="4343400"/>
+            <a:ext cx="5486400" cy="4114800"/>
+          </a:xfrm>
+          <a:prstGeom prst="rect">
+            <a:avLst/>
+          </a:prstGeom>
+        </p:spPr>
+        <p:txBody>
+          <a:bodyPr vert="horz" lIns="91440" tIns="45720" rIns="91440" bIns="45720" rtlCol="0"/>
+          <a:lstStyle/>
+          <a:p>
+            <a:pPr lvl="0"/>
+            <a:r>
+              <a:rPr lang="en-US" smtClean="0"/>
+              <a:t>Click to edit Master text styles</a:t>
+            </a:r>
+          </a:p>
+          <a:p>
+            <a:pPr lvl="1"/>
+            <a:r>
+              <a:rPr lang="en-US" smtClean="0"/>
+              <a:t>Second level</a:t>
+            </a:r>
+          </a:p>
+          <a:p>
+            <a:pPr lvl="2"/>
+            <a:r>
+              <a:rPr lang="en-US" smtClean="0"/>
+              <a:t>Third level</a:t>
+            </a:r>
+          </a:p>
+          <a:p>
+            <a:pPr lvl="3"/>
+            <a:r>
+              <a:rPr lang="en-US" smtClean="0"/>
+              <a:t>Fourth level</a:t>
+            </a:r>
+          </a:p>
+          <a:p>
+            <a:pPr lvl="4"/>
+            <a:r>
+              <a:rPr lang="en-US" smtClean="0"/>
+              <a:t>Fifth level</a:t>
+            </a:r>
+            <a:endParaRPr lang="en-US"/>
+          </a:p>
+        </p:txBody>
+      </p:sp>
+      <p:sp>
+        <p:nvSpPr>
+          <p:cNvPr id="6" name="Footer Placeholder 5"/>
+          <p:cNvSpPr>
+            <a:spLocks noGrp="1"/>
+          </p:cNvSpPr>
+          <p:nvPr>
+            <p:ph type="ftr" sz="quarter" idx="4"/>
+          </p:nvPr>
+        </p:nvSpPr>
+        <p:spPr>
+          <a:xfrm>
+            <a:off x="0" y="8685213"/>
+            <a:ext cx="2971800" cy="457200"/>
+          </a:xfrm>
+          <a:prstGeom prst="rect">
+            <a:avLst/>
+          </a:prstGeom>
+        </p:spPr>
+        <p:txBody>
+          <a:bodyPr vert="horz" lIns="91440" tIns="45720" rIns="91440" bIns="45720" rtlCol="0" anchor="b"/>
+          <a:lstStyle>
+            <a:lvl1pPr algn="l">
+              <a:defRPr sz="1200"/>
+            </a:lvl1pPr>
+          </a:lstStyle>
+          <a:p>
+            <a:endParaRPr lang="en-US"/>
+          </a:p>
+        </p:txBody>
+      </p:sp>
+      <p:sp>
+        <p:nvSpPr>
+          <p:cNvPr id="7" name="Slide Number Placeholder 6"/>
+          <p:cNvSpPr>
+            <a:spLocks noGrp="1"/>
+          </p:cNvSpPr>
+          <p:nvPr>
+            <p:ph type="sldNum" sz="quarter" idx="5"/>
+          </p:nvPr>
+        </p:nvSpPr>
+        <p:spPr>
+          <a:xfrm>
+            <a:off x="3884613" y="8685213"/>
+            <a:ext cx="2971800" cy="457200"/>
+          </a:xfrm>
+          <a:prstGeom prst="rect">
+            <a:avLst/>
+          </a:prstGeom>
+        </p:spPr>
+        <p:txBody>
+          <a:bodyPr vert="horz" lIns="91440" tIns="45720" rIns="91440" bIns="45720" rtlCol="0" anchor="b"/>
+          <a:lstStyle>
+            <a:lvl1pPr algn="r">
+              <a:defRPr sz="1200"/>
+            </a:lvl1pPr>
+          </a:lstStyle>
+          <a:p>
+            <a:fld id="{BB5E49A5-4136-284D-997B-48E1D791AD67}" type="slidenum">
+              <a:rPr lang="en-US" smtClean="0"/>
+              <a:t>‹#›</a:t>
+            </a:fld>
+            <a:endParaRPr lang="en-US"/>
+          </a:p>
+        </p:txBody>
+      </p:sp>
+    </p:spTree>
+    <p:extLst>
+      <p:ext uri="{BB962C8B-B14F-4D97-AF65-F5344CB8AC3E}">
+        <p14:creationId xmlns:p14="http://schemas.microsoft.com/office/powerpoint/2010/main" val="2623252185"/>
+      </p:ext>
+    </p:extLst>
+  </p:cSld>
+  <p:clrMap bg1="lt1" tx1="dk1" bg2="lt2" tx2="dk2" accent1="accent1" accent2="accent2" accent3="accent3" accent4="accent4" accent5="accent5" accent6="accent6" hlink="hlink" folHlink="folHlink"/>
+  <p:notesStyle>
+    <a:lvl1pPr marL="0" algn="l" defTabSz="457200" rtl="0" eaLnBrk="1" latinLnBrk="0" hangingPunct="1">
+      <a:defRPr sz="1200" kern="1200">
+        <a:solidFill>
+          <a:schemeClr val="tx1"/>
+        </a:solidFill>
+        <a:latin typeface="+mn-lt"/>
+        <a:ea typeface="+mn-ea"/>
+        <a:cs typeface="+mn-cs"/>
+      </a:defRPr>
+    </a:lvl1pPr>
+    <a:lvl2pPr marL="457200" algn="l" defTabSz="457200" rtl="0" eaLnBrk="1" latinLnBrk="0" hangingPunct="1">
+      <a:defRPr sz="1200" kern="1200">
+        <a:solidFill>
+          <a:schemeClr val="tx1"/>
+        </a:solidFill>
+        <a:latin typeface="+mn-lt"/>
+        <a:ea typeface="+mn-ea"/>
+        <a:cs typeface="+mn-cs"/>
+      </a:defRPr>
+    </a:lvl2pPr>
+    <a:lvl3pPr marL="914400" algn="l" defTabSz="457200" rtl="0" eaLnBrk="1" latinLnBrk="0" hangingPunct="1">
+      <a:defRPr sz="1200" kern="1200">
+        <a:solidFill>
+          <a:schemeClr val="tx1"/>
+        </a:solidFill>
+        <a:latin typeface="+mn-lt"/>
+        <a:ea typeface="+mn-ea"/>
+        <a:cs typeface="+mn-cs"/>
+      </a:defRPr>
+    </a:lvl3pPr>
+    <a:lvl4pPr marL="1371600" algn="l" defTabSz="457200" rtl="0" eaLnBrk="1" latinLnBrk="0" hangingPunct="1">
+      <a:defRPr sz="1200" kern="1200">
+        <a:solidFill>
+          <a:schemeClr val="tx1"/>
+        </a:solidFill>
+        <a:latin typeface="+mn-lt"/>
+        <a:ea typeface="+mn-ea"/>
+        <a:cs typeface="+mn-cs"/>
+      </a:defRPr>
+    </a:lvl4pPr>
+    <a:lvl5pPr marL="1828800" algn="l" defTabSz="457200" rtl="0" eaLnBrk="1" latinLnBrk="0" hangingPunct="1">
+      <a:defRPr sz="1200" kern="1200">
+        <a:solidFill>
+          <a:schemeClr val="tx1"/>
+        </a:solidFill>
+        <a:latin typeface="+mn-lt"/>
+        <a:ea typeface="+mn-ea"/>
+        <a:cs typeface="+mn-cs"/>
+      </a:defRPr>
+    </a:lvl5pPr>
+    <a:lvl6pPr marL="2286000" algn="l" defTabSz="457200" rtl="0" eaLnBrk="1" latinLnBrk="0" hangingPunct="1">
+      <a:defRPr sz="1200" kern="1200">
+        <a:solidFill>
+          <a:schemeClr val="tx1"/>
+        </a:solidFill>
+        <a:latin typeface="+mn-lt"/>
+        <a:ea typeface="+mn-ea"/>
+        <a:cs typeface="+mn-cs"/>
+      </a:defRPr>
+    </a:lvl6pPr>
+    <a:lvl7pPr marL="2743200" algn="l" defTabSz="457200" rtl="0" eaLnBrk="1" latinLnBrk="0" hangingPunct="1">
+      <a:defRPr sz="1200" kern="1200">
+        <a:solidFill>
+          <a:schemeClr val="tx1"/>
+        </a:solidFill>
+        <a:latin typeface="+mn-lt"/>
+        <a:ea typeface="+mn-ea"/>
+        <a:cs typeface="+mn-cs"/>
+      </a:defRPr>
+    </a:lvl7pPr>
+    <a:lvl8pPr marL="3200400" algn="l" defTabSz="457200" rtl="0" eaLnBrk="1" latinLnBrk="0" hangingPunct="1">
+      <a:defRPr sz="1200" kern="1200">
+        <a:solidFill>
+          <a:schemeClr val="tx1"/>
+        </a:solidFill>
+        <a:latin typeface="+mn-lt"/>
+        <a:ea typeface="+mn-ea"/>
+        <a:cs typeface="+mn-cs"/>
+      </a:defRPr>
+    </a:lvl8pPr>
+    <a:lvl9pPr marL="3657600" algn="l" defTabSz="457200" rtl="0" eaLnBrk="1" latinLnBrk="0" hangingPunct="1">
+      <a:defRPr sz="1200" kern="1200">
+        <a:solidFill>
+          <a:schemeClr val="tx1"/>
+        </a:solidFill>
+        <a:latin typeface="+mn-lt"/>
+        <a:ea typeface="+mn-ea"/>
+        <a:cs typeface="+mn-cs"/>
+      </a:defRPr>
+    </a:lvl9pPr>
+  </p:notesStyle>
+</p:notesMaster>
+</file>
+
+<file path=ppt/notesSlides/notesSlide1.xml><?xml version="1.0" encoding="utf-8"?>
+<p:notes xmlns:a="http://schemas.openxmlformats.org/drawingml/2006/main" xmlns:p="http://schemas.openxmlformats.org/presentationml/2006/main" xmlns:r="http://schemas.openxmlformats.org/officeDocument/2006/relationships">
+  <p:cSld>
+    <p:spTree>
+      <p:nvGrpSpPr>
+        <p:cNvPr id="1" name=""/>
+        <p:cNvGrpSpPr/>
+        <p:nvPr/>
+      </p:nvGrpSpPr>
+      <p:grpSpPr>
+        <a:xfrm>
+          <a:off x="0" y="0"/>
+          <a:ext cx="0" cy="0"/>
+          <a:chOff x="0" y="0"/>
+          <a:chExt cx="0" cy="0"/>
+        </a:xfrm>
+      </p:grpSpPr>
+      <p:sp>
+        <p:nvSpPr>
+          <p:cNvPr id="2" name="Slide Image Placeholder 1"/>
+          <p:cNvSpPr>
+            <a:spLocks noGrp="1"/>
+          </p:cNvSpPr>
+          <p:nvPr>
+            <p:ph type="sldImg" idx="2"/>
+          </p:nvPr>
+        </p:nvSpPr>
+        <p:spPr/>
+      </p:sp>
+      <p:sp>
+        <p:nvSpPr>
+          <p:cNvPr id="3" name="Notes Placeholder 2"/>
+          <p:cNvSpPr>
+            <a:spLocks noGrp="1"/>
+          </p:cNvSpPr>
+          <p:nvPr>
+            <p:ph type="body" idx="3" sz="quarter"/>
+          </p:nvPr>
+        </p:nvSpPr>
+        <p:spPr/>
+        <p:txBody>
+          <a:bodyPr/>
+          <a:lstStyle/>
+          <a:p>
+            <a:r>
+              <a:t>We're telling the story of Apache Gluten's journey to TLP, centered on production lessons at Fabric scale. Yuan Zhou covers community growth later today; we focus on how real production users drive upstream innovation. By the end, you'll understand the architecture, the problems production exposed, and how you can get involved.</a:t>
+            </a:r>
+          </a:p>
+        </p:txBody>
+      </p:sp>
+      <p:sp>
+        <p:nvSpPr>
+          <p:cNvPr id="4" name="Slide Number Placeholder 3"/>
+          <p:cNvSpPr>
+            <a:spLocks noGrp="1"/>
+          </p:cNvSpPr>
+          <p:nvPr>
+            <p:ph type="sldNum" idx="5" sz="quarter"/>
+          </p:nvPr>
+        </p:nvSpPr>
+        <p:spPr/>
+      </p:sp>
+    </p:spTree>
+  </p:cSld>
+  <p:clrMapOvr>
+    <a:masterClrMapping/>
+  </p:clrMapOvr>
+</p:notes>
+</file>
+
+<file path=ppt/notesSlides/notesSlide10.xml><?xml version="1.0" encoding="utf-8"?>
+<p:notes xmlns:a="http://schemas.openxmlformats.org/drawingml/2006/main" xmlns:p="http://schemas.openxmlformats.org/presentationml/2006/main" xmlns:r="http://schemas.openxmlformats.org/officeDocument/2006/relationships">
+  <p:cSld>
+    <p:spTree>
+      <p:nvGrpSpPr>
+        <p:cNvPr id="1" name=""/>
+        <p:cNvGrpSpPr/>
+        <p:nvPr/>
+      </p:nvGrpSpPr>
+      <p:grpSpPr>
+        <a:xfrm>
+          <a:off x="0" y="0"/>
+          <a:ext cx="0" cy="0"/>
+          <a:chOff x="0" y="0"/>
+          <a:chExt cx="0" cy="0"/>
+        </a:xfrm>
+      </p:grpSpPr>
+      <p:sp>
+        <p:nvSpPr>
+          <p:cNvPr id="2" name="Slide Image Placeholder 1"/>
+          <p:cNvSpPr>
+            <a:spLocks noGrp="1"/>
+          </p:cNvSpPr>
+          <p:nvPr>
+            <p:ph type="sldImg" idx="2"/>
+          </p:nvPr>
+        </p:nvSpPr>
+        <p:spPr/>
+      </p:sp>
+      <p:sp>
+        <p:nvSpPr>
+          <p:cNvPr id="3" name="Notes Placeholder 2"/>
+          <p:cNvSpPr>
+            <a:spLocks noGrp="1"/>
+          </p:cNvSpPr>
+          <p:nvPr>
+            <p:ph type="body" idx="3" sz="quarter"/>
+          </p:nvPr>
+        </p:nvSpPr>
+        <p:spPr/>
+        <p:txBody>
+          <a:bodyPr/>
+          <a:lstStyle/>
+          <a:p>
+            <a:r>
+              <a:t>Fabric added three key observability tools. Spark Advisor shows which operators fall back to JVM and why — no need to manually parse explain() output. Gluten SQL tab in Spark UI shows native vs. JVM nodes side-by-side. Run Series compares before/after NEE performance. V-Order is Fabric's default columnar sort. Native Delta writes bypass Row serialization. These complete the production-readiness picture.</a:t>
+            </a:r>
+          </a:p>
+        </p:txBody>
+      </p:sp>
+      <p:sp>
+        <p:nvSpPr>
+          <p:cNvPr id="4" name="Slide Number Placeholder 3"/>
+          <p:cNvSpPr>
+            <a:spLocks noGrp="1"/>
+          </p:cNvSpPr>
+          <p:nvPr>
+            <p:ph type="sldNum" idx="5" sz="quarter"/>
+          </p:nvPr>
+        </p:nvSpPr>
+        <p:spPr/>
+      </p:sp>
+    </p:spTree>
+  </p:cSld>
+  <p:clrMapOvr>
+    <a:masterClrMapping/>
+  </p:clrMapOvr>
+</p:notes>
+</file>
+
+<file path=ppt/notesSlides/notesSlide11.xml><?xml version="1.0" encoding="utf-8"?>
+<p:notes xmlns:a="http://schemas.openxmlformats.org/drawingml/2006/main" xmlns:p="http://schemas.openxmlformats.org/presentationml/2006/main" xmlns:r="http://schemas.openxmlformats.org/officeDocument/2006/relationships">
+  <p:cSld>
+    <p:spTree>
+      <p:nvGrpSpPr>
+        <p:cNvPr id="1" name=""/>
+        <p:cNvGrpSpPr/>
+        <p:nvPr/>
+      </p:nvGrpSpPr>
+      <p:grpSpPr>
+        <a:xfrm>
+          <a:off x="0" y="0"/>
+          <a:ext cx="0" cy="0"/>
+          <a:chOff x="0" y="0"/>
+          <a:chExt cx="0" cy="0"/>
+        </a:xfrm>
+      </p:grpSpPr>
+      <p:sp>
+        <p:nvSpPr>
+          <p:cNvPr id="2" name="Slide Image Placeholder 1"/>
+          <p:cNvSpPr>
+            <a:spLocks noGrp="1"/>
+          </p:cNvSpPr>
+          <p:nvPr>
+            <p:ph type="sldImg" idx="2"/>
+          </p:nvPr>
+        </p:nvSpPr>
+        <p:spPr/>
+      </p:sp>
+      <p:sp>
+        <p:nvSpPr>
+          <p:cNvPr id="3" name="Notes Placeholder 2"/>
+          <p:cNvSpPr>
+            <a:spLocks noGrp="1"/>
+          </p:cNvSpPr>
+          <p:nvPr>
+            <p:ph type="body" idx="3" sz="quarter"/>
+          </p:nvPr>
+        </p:nvSpPr>
+        <p:spPr/>
+        <p:txBody>
+          <a:bodyPr/>
+          <a:lstStyle/>
+          <a:p>
+            <a:r>
+              <a:t>Intel and Kyligence created Gluten in 2022. Microsoft adopted it for Fabric NEE in 2024-25, started upstream contributions. Key lessons: Governance comes before code — ASF graduation required a diverse PMC. Memory was the hardest problem — 9-month collaboration. Our strategy was never to fork; it was to find problems at scale and upstream fixes.</a:t>
+            </a:r>
+          </a:p>
+        </p:txBody>
+      </p:sp>
+      <p:sp>
+        <p:nvSpPr>
+          <p:cNvPr id="4" name="Slide Number Placeholder 3"/>
+          <p:cNvSpPr>
+            <a:spLocks noGrp="1"/>
+          </p:cNvSpPr>
+          <p:nvPr>
+            <p:ph type="sldNum" idx="5" sz="quarter"/>
+          </p:nvPr>
+        </p:nvSpPr>
+        <p:spPr/>
+      </p:sp>
+    </p:spTree>
+  </p:cSld>
+  <p:clrMapOvr>
+    <a:masterClrMapping/>
+  </p:clrMapOvr>
+</p:notes>
+</file>
+
+<file path=ppt/notesSlides/notesSlide12.xml><?xml version="1.0" encoding="utf-8"?>
+<p:notes xmlns:a="http://schemas.openxmlformats.org/drawingml/2006/main" xmlns:p="http://schemas.openxmlformats.org/presentationml/2006/main" xmlns:r="http://schemas.openxmlformats.org/officeDocument/2006/relationships">
+  <p:cSld>
+    <p:spTree>
+      <p:nvGrpSpPr>
+        <p:cNvPr id="1" name=""/>
+        <p:cNvGrpSpPr/>
+        <p:nvPr/>
+      </p:nvGrpSpPr>
+      <p:grpSpPr>
+        <a:xfrm>
+          <a:off x="0" y="0"/>
+          <a:ext cx="0" cy="0"/>
+          <a:chOff x="0" y="0"/>
+          <a:chExt cx="0" cy="0"/>
+        </a:xfrm>
+      </p:grpSpPr>
+      <p:sp>
+        <p:nvSpPr>
+          <p:cNvPr id="2" name="Slide Image Placeholder 1"/>
+          <p:cNvSpPr>
+            <a:spLocks noGrp="1"/>
+          </p:cNvSpPr>
+          <p:nvPr>
+            <p:ph type="sldImg" idx="2"/>
+          </p:nvPr>
+        </p:nvSpPr>
+        <p:spPr/>
+      </p:sp>
+      <p:sp>
+        <p:nvSpPr>
+          <p:cNvPr id="3" name="Notes Placeholder 2"/>
+          <p:cNvSpPr>
+            <a:spLocks noGrp="1"/>
+          </p:cNvSpPr>
+          <p:nvPr>
+            <p:ph type="body" idx="3" sz="quarter"/>
+          </p:nvPr>
+        </p:nvSpPr>
+        <p:spPr/>
+        <p:txBody>
+          <a:bodyPr/>
+          <a:lstStyle/>
+          <a:p>
+            <a:r>
+              <a:t>Community roadmap: Q1 cleanup, Q2 multi-core and PySpark UDFs, Q3 Flink PoC and GPU exploration, Q4 Spark 4.0 GA. Microsoft's focus: Spark 4.x parity, ANSI mode, performance (dynamic filters, bloom-filter pushdown), and enterprise features (Structured Streaming, complex types). Every function we upstream benefits the entire community. If you're using Spark 4.0 or Structured Streaming, join us.</a:t>
+            </a:r>
+          </a:p>
+        </p:txBody>
+      </p:sp>
+      <p:sp>
+        <p:nvSpPr>
+          <p:cNvPr id="4" name="Slide Number Placeholder 3"/>
+          <p:cNvSpPr>
+            <a:spLocks noGrp="1"/>
+          </p:cNvSpPr>
+          <p:nvPr>
+            <p:ph type="sldNum" idx="5" sz="quarter"/>
+          </p:nvPr>
+        </p:nvSpPr>
+        <p:spPr/>
+      </p:sp>
+    </p:spTree>
+  </p:cSld>
+  <p:clrMapOvr>
+    <a:masterClrMapping/>
+  </p:clrMapOvr>
+</p:notes>
+</file>
+
+<file path=ppt/notesSlides/notesSlide13.xml><?xml version="1.0" encoding="utf-8"?>
+<p:notes xmlns:a="http://schemas.openxmlformats.org/drawingml/2006/main" xmlns:p="http://schemas.openxmlformats.org/presentationml/2006/main" xmlns:r="http://schemas.openxmlformats.org/officeDocument/2006/relationships">
+  <p:cSld>
+    <p:spTree>
+      <p:nvGrpSpPr>
+        <p:cNvPr id="1" name=""/>
+        <p:cNvGrpSpPr/>
+        <p:nvPr/>
+      </p:nvGrpSpPr>
+      <p:grpSpPr>
+        <a:xfrm>
+          <a:off x="0" y="0"/>
+          <a:ext cx="0" cy="0"/>
+          <a:chOff x="0" y="0"/>
+          <a:chExt cx="0" cy="0"/>
+        </a:xfrm>
+      </p:grpSpPr>
+      <p:sp>
+        <p:nvSpPr>
+          <p:cNvPr id="2" name="Slide Image Placeholder 1"/>
+          <p:cNvSpPr>
+            <a:spLocks noGrp="1"/>
+          </p:cNvSpPr>
+          <p:nvPr>
+            <p:ph type="sldImg" idx="2"/>
+          </p:nvPr>
+        </p:nvSpPr>
+        <p:spPr/>
+      </p:sp>
+      <p:sp>
+        <p:nvSpPr>
+          <p:cNvPr id="3" name="Notes Placeholder 2"/>
+          <p:cNvSpPr>
+            <a:spLocks noGrp="1"/>
+          </p:cNvSpPr>
+          <p:nvPr>
+            <p:ph type="body" idx="3" sz="quarter"/>
+          </p:nvPr>
+        </p:nvSpPr>
+        <p:spPr/>
+        <p:txBody>
+          <a:bodyPr/>
+          <a:lstStyle/>
+          <a:p>
+            <a:r>
+              <a:t>Four ways to contribute. Code: add a missing Spark function to Velox — approx_percentile, avg_if, etc. It unblocks execution for thousands of users. Testing: run Gluten on your workloads, file issues with explain() output. Docs: configuration guides, migration recipes. Integrate: new backends, Flink prototypes, storage connectors. We want your hardest edge cases in the open.</a:t>
+            </a:r>
+          </a:p>
+        </p:txBody>
+      </p:sp>
+      <p:sp>
+        <p:nvSpPr>
+          <p:cNvPr id="4" name="Slide Number Placeholder 3"/>
+          <p:cNvSpPr>
+            <a:spLocks noGrp="1"/>
+          </p:cNvSpPr>
+          <p:nvPr>
+            <p:ph type="sldNum" idx="5" sz="quarter"/>
+          </p:nvPr>
+        </p:nvSpPr>
+        <p:spPr/>
+      </p:sp>
+    </p:spTree>
+  </p:cSld>
+  <p:clrMapOvr>
+    <a:masterClrMapping/>
+  </p:clrMapOvr>
+</p:notes>
+</file>
+
+<file path=ppt/notesSlides/notesSlide2.xml><?xml version="1.0" encoding="utf-8"?>
+<p:notes xmlns:a="http://schemas.openxmlformats.org/drawingml/2006/main" xmlns:p="http://schemas.openxmlformats.org/presentationml/2006/main" xmlns:r="http://schemas.openxmlformats.org/officeDocument/2006/relationships">
+  <p:cSld>
+    <p:spTree>
+      <p:nvGrpSpPr>
+        <p:cNvPr id="1" name=""/>
+        <p:cNvGrpSpPr/>
+        <p:nvPr/>
+      </p:nvGrpSpPr>
+      <p:grpSpPr>
+        <a:xfrm>
+          <a:off x="0" y="0"/>
+          <a:ext cx="0" cy="0"/>
+          <a:chOff x="0" y="0"/>
+          <a:chExt cx="0" cy="0"/>
+        </a:xfrm>
+      </p:grpSpPr>
+      <p:sp>
+        <p:nvSpPr>
+          <p:cNvPr id="2" name="Slide Image Placeholder 1"/>
+          <p:cNvSpPr>
+            <a:spLocks noGrp="1"/>
+          </p:cNvSpPr>
+          <p:nvPr>
+            <p:ph type="sldImg" idx="2"/>
+          </p:nvPr>
+        </p:nvSpPr>
+        <p:spPr/>
+      </p:sp>
+      <p:sp>
+        <p:nvSpPr>
+          <p:cNvPr id="3" name="Notes Placeholder 2"/>
+          <p:cNvSpPr>
+            <a:spLocks noGrp="1"/>
+          </p:cNvSpPr>
+          <p:nvPr>
+            <p:ph type="body" idx="3" sz="quarter"/>
+          </p:nvPr>
+        </p:nvSpPr>
+        <p:spPr/>
+        <p:txBody>
+          <a:bodyPr/>
+          <a:lstStyle/>
+          <a:p>
+            <a:r>
+              <a:t>February 2026 is significant: Gluten became an ASF Top-Level Project. But here's what made graduation possible — production deployment at scale. Scale is the fastest feedback loop. At thousands of concurrent queries, we discover memory bugs, semantic gaps, and performance bottlenecks that synthetic benchmarks miss. We committed to upstream-first: every fix goes to Gluten and Velox first, and Fabric productizes on top of shared foundations. This is not a fork strategy — it's a partnership.</a:t>
+            </a:r>
+          </a:p>
+        </p:txBody>
+      </p:sp>
+      <p:sp>
+        <p:nvSpPr>
+          <p:cNvPr id="4" name="Slide Number Placeholder 3"/>
+          <p:cNvSpPr>
+            <a:spLocks noGrp="1"/>
+          </p:cNvSpPr>
+          <p:nvPr>
+            <p:ph type="sldNum" idx="5" sz="quarter"/>
+          </p:nvPr>
+        </p:nvSpPr>
+        <p:spPr/>
+      </p:sp>
+    </p:spTree>
+  </p:cSld>
+  <p:clrMapOvr>
+    <a:masterClrMapping/>
+  </p:clrMapOvr>
+</p:notes>
+</file>
+
+<file path=ppt/notesSlides/notesSlide3.xml><?xml version="1.0" encoding="utf-8"?>
+<p:notes xmlns:a="http://schemas.openxmlformats.org/drawingml/2006/main" xmlns:p="http://schemas.openxmlformats.org/presentationml/2006/main" xmlns:r="http://schemas.openxmlformats.org/officeDocument/2006/relationships">
+  <p:cSld>
+    <p:spTree>
+      <p:nvGrpSpPr>
+        <p:cNvPr id="1" name=""/>
+        <p:cNvGrpSpPr/>
+        <p:nvPr/>
+      </p:nvGrpSpPr>
+      <p:grpSpPr>
+        <a:xfrm>
+          <a:off x="0" y="0"/>
+          <a:ext cx="0" cy="0"/>
+          <a:chOff x="0" y="0"/>
+          <a:chExt cx="0" cy="0"/>
+        </a:xfrm>
+      </p:grpSpPr>
+      <p:sp>
+        <p:nvSpPr>
+          <p:cNvPr id="2" name="Slide Image Placeholder 1"/>
+          <p:cNvSpPr>
+            <a:spLocks noGrp="1"/>
+          </p:cNvSpPr>
+          <p:nvPr>
+            <p:ph type="sldImg" idx="2"/>
+          </p:nvPr>
+        </p:nvSpPr>
+        <p:spPr/>
+      </p:sp>
+      <p:sp>
+        <p:nvSpPr>
+          <p:cNvPr id="3" name="Notes Placeholder 2"/>
+          <p:cNvSpPr>
+            <a:spLocks noGrp="1"/>
+          </p:cNvSpPr>
+          <p:nvPr>
+            <p:ph type="body" idx="3" sz="quarter"/>
+          </p:nvPr>
+        </p:nvSpPr>
+        <p:spPr/>
+        <p:txBody>
+          <a:bodyPr/>
+          <a:lstStyle/>
+          <a:p>
+            <a:r>
+              <a:t>We had four paths. Gluten was already Meta-proven at exabyte scale, with modular backends and a growing multi-company community. The deciding factor: we could be a production user AND a contributor. The flywheel on this slide is not aspirational — it's what's actually happening. Fabric finds a bug, we upstream a fix, the entire community benefits.</a:t>
+            </a:r>
+          </a:p>
+        </p:txBody>
+      </p:sp>
+      <p:sp>
+        <p:nvSpPr>
+          <p:cNvPr id="4" name="Slide Number Placeholder 3"/>
+          <p:cNvSpPr>
+            <a:spLocks noGrp="1"/>
+          </p:cNvSpPr>
+          <p:nvPr>
+            <p:ph type="sldNum" idx="5" sz="quarter"/>
+          </p:nvPr>
+        </p:nvSpPr>
+        <p:spPr/>
+      </p:sp>
+    </p:spTree>
+  </p:cSld>
+  <p:clrMapOvr>
+    <a:masterClrMapping/>
+  </p:clrMapOvr>
+</p:notes>
+</file>
+
+<file path=ppt/notesSlides/notesSlide4.xml><?xml version="1.0" encoding="utf-8"?>
+<p:notes xmlns:a="http://schemas.openxmlformats.org/drawingml/2006/main" xmlns:p="http://schemas.openxmlformats.org/presentationml/2006/main" xmlns:r="http://schemas.openxmlformats.org/officeDocument/2006/relationships">
+  <p:cSld>
+    <p:spTree>
+      <p:nvGrpSpPr>
+        <p:cNvPr id="1" name=""/>
+        <p:cNvGrpSpPr/>
+        <p:nvPr/>
+      </p:nvGrpSpPr>
+      <p:grpSpPr>
+        <a:xfrm>
+          <a:off x="0" y="0"/>
+          <a:ext cx="0" cy="0"/>
+          <a:chOff x="0" y="0"/>
+          <a:chExt cx="0" cy="0"/>
+        </a:xfrm>
+      </p:grpSpPr>
+      <p:sp>
+        <p:nvSpPr>
+          <p:cNvPr id="2" name="Slide Image Placeholder 1"/>
+          <p:cNvSpPr>
+            <a:spLocks noGrp="1"/>
+          </p:cNvSpPr>
+          <p:nvPr>
+            <p:ph type="sldImg" idx="2"/>
+          </p:nvPr>
+        </p:nvSpPr>
+        <p:spPr/>
+      </p:sp>
+      <p:sp>
+        <p:nvSpPr>
+          <p:cNvPr id="3" name="Notes Placeholder 2"/>
+          <p:cNvSpPr>
+            <a:spLocks noGrp="1"/>
+          </p:cNvSpPr>
+          <p:nvPr>
+            <p:ph type="body" idx="3" sz="quarter"/>
+          </p:nvPr>
+        </p:nvSpPr>
+        <p:spPr/>
+        <p:txBody>
+          <a:bodyPr/>
+          <a:lstStyle/>
+          <a:p>
+            <a:r>
+              <a:t>Spark's Catalyst optimizer, CBO, AQE — all unchanged. Gluten intercepts the optimized plan, translates it to Substrait IR, and hands it to Velox via JNI. Velox runs vectorized C++ operators. The plan example shows a real fallback boundary: ColumnarToRowExec marks where Velox cannot handle an expression, so data goes back to JVM. Minimizing those transitions is the key optimization goal.</a:t>
+            </a:r>
+          </a:p>
+        </p:txBody>
+      </p:sp>
+      <p:sp>
+        <p:nvSpPr>
+          <p:cNvPr id="4" name="Slide Number Placeholder 3"/>
+          <p:cNvSpPr>
+            <a:spLocks noGrp="1"/>
+          </p:cNvSpPr>
+          <p:nvPr>
+            <p:ph type="sldNum" idx="5" sz="quarter"/>
+          </p:nvPr>
+        </p:nvSpPr>
+        <p:spPr/>
+      </p:sp>
+    </p:spTree>
+  </p:cSld>
+  <p:clrMapOvr>
+    <a:masterClrMapping/>
+  </p:clrMapOvr>
+</p:notes>
+</file>
+
+<file path=ppt/notesSlides/notesSlide5.xml><?xml version="1.0" encoding="utf-8"?>
+<p:notes xmlns:a="http://schemas.openxmlformats.org/drawingml/2006/main" xmlns:p="http://schemas.openxmlformats.org/presentationml/2006/main" xmlns:r="http://schemas.openxmlformats.org/officeDocument/2006/relationships">
+  <p:cSld>
+    <p:spTree>
+      <p:nvGrpSpPr>
+        <p:cNvPr id="1" name=""/>
+        <p:cNvGrpSpPr/>
+        <p:nvPr/>
+      </p:nvGrpSpPr>
+      <p:grpSpPr>
+        <a:xfrm>
+          <a:off x="0" y="0"/>
+          <a:ext cx="0" cy="0"/>
+          <a:chOff x="0" y="0"/>
+          <a:chExt cx="0" cy="0"/>
+        </a:xfrm>
+      </p:grpSpPr>
+      <p:sp>
+        <p:nvSpPr>
+          <p:cNvPr id="2" name="Slide Image Placeholder 1"/>
+          <p:cNvSpPr>
+            <a:spLocks noGrp="1"/>
+          </p:cNvSpPr>
+          <p:nvPr>
+            <p:ph type="sldImg" idx="2"/>
+          </p:nvPr>
+        </p:nvSpPr>
+        <p:spPr/>
+      </p:sp>
+      <p:sp>
+        <p:nvSpPr>
+          <p:cNvPr id="3" name="Notes Placeholder 2"/>
+          <p:cNvSpPr>
+            <a:spLocks noGrp="1"/>
+          </p:cNvSpPr>
+          <p:nvPr>
+            <p:ph type="body" idx="3" sz="quarter"/>
+          </p:nvPr>
+        </p:nvSpPr>
+        <p:spPr/>
+        <p:txBody>
+          <a:bodyPr/>
+          <a:lstStyle/>
+          <a:p>
+            <a:r>
+              <a:t>This is the story that illustrates why Gluten needed production feedback. January 2025: TPC-DS queries crashed with OOM despite available memory. The root cause was subtle: Velox's MmapAllocator and JVM GC competed independently for the same container memory. We spent 9 months building a cooperative memory arbitration protocol. The result: OOM incidents dropped 70% in Fabric production telemetry. This fix went upstream in Gluten 1.3.0 and now benefits every Gluten user.</a:t>
+            </a:r>
+          </a:p>
+        </p:txBody>
+      </p:sp>
+      <p:sp>
+        <p:nvSpPr>
+          <p:cNvPr id="4" name="Slide Number Placeholder 3"/>
+          <p:cNvSpPr>
+            <a:spLocks noGrp="1"/>
+          </p:cNvSpPr>
+          <p:nvPr>
+            <p:ph type="sldNum" idx="5" sz="quarter"/>
+          </p:nvPr>
+        </p:nvSpPr>
+        <p:spPr/>
+      </p:sp>
+    </p:spTree>
+  </p:cSld>
+  <p:clrMapOvr>
+    <a:masterClrMapping/>
+  </p:clrMapOvr>
+</p:notes>
+</file>
+
+<file path=ppt/notesSlides/notesSlide6.xml><?xml version="1.0" encoding="utf-8"?>
+<p:notes xmlns:a="http://schemas.openxmlformats.org/drawingml/2006/main" xmlns:p="http://schemas.openxmlformats.org/presentationml/2006/main" xmlns:r="http://schemas.openxmlformats.org/officeDocument/2006/relationships">
+  <p:cSld>
+    <p:spTree>
+      <p:nvGrpSpPr>
+        <p:cNvPr id="1" name=""/>
+        <p:cNvGrpSpPr/>
+        <p:nvPr/>
+      </p:nvGrpSpPr>
+      <p:grpSpPr>
+        <a:xfrm>
+          <a:off x="0" y="0"/>
+          <a:ext cx="0" cy="0"/>
+          <a:chOff x="0" y="0"/>
+          <a:chExt cx="0" cy="0"/>
+        </a:xfrm>
+      </p:grpSpPr>
+      <p:sp>
+        <p:nvSpPr>
+          <p:cNvPr id="2" name="Slide Image Placeholder 1"/>
+          <p:cNvSpPr>
+            <a:spLocks noGrp="1"/>
+          </p:cNvSpPr>
+          <p:nvPr>
+            <p:ph type="sldImg" idx="2"/>
+          </p:nvPr>
+        </p:nvSpPr>
+        <p:spPr/>
+      </p:sp>
+      <p:sp>
+        <p:nvSpPr>
+          <p:cNvPr id="3" name="Notes Placeholder 2"/>
+          <p:cNvSpPr>
+            <a:spLocks noGrp="1"/>
+          </p:cNvSpPr>
+          <p:nvPr>
+            <p:ph type="body" idx="3" sz="quarter"/>
+          </p:nvPr>
+        </p:nvSpPr>
+        <p:spPr/>
+        <p:txBody>
+          <a:bodyPr/>
+          <a:lstStyle/>
+          <a:p>
+            <a:r>
+              <a:t>Each row is a bug or gap discovered at Fabric scale. Null semantics: Velox's collect_set excluded nulls by default while Spark includes them — TPC-DS silently returned wrong results. Fallback storms: a single unsupported UDF could force the entire upstream subtree back to JVM — worse than not using Gluten at all. Security: native scans must honor RLS/CLS policies. Every row became an upstream PR within months.</a:t>
+            </a:r>
+          </a:p>
+        </p:txBody>
+      </p:sp>
+      <p:sp>
+        <p:nvSpPr>
+          <p:cNvPr id="4" name="Slide Number Placeholder 3"/>
+          <p:cNvSpPr>
+            <a:spLocks noGrp="1"/>
+          </p:cNvSpPr>
+          <p:nvPr>
+            <p:ph type="sldNum" idx="5" sz="quarter"/>
+          </p:nvPr>
+        </p:nvSpPr>
+        <p:spPr/>
+      </p:sp>
+    </p:spTree>
+  </p:cSld>
+  <p:clrMapOvr>
+    <a:masterClrMapping/>
+  </p:clrMapOvr>
+</p:notes>
+</file>
+
+<file path=ppt/notesSlides/notesSlide7.xml><?xml version="1.0" encoding="utf-8"?>
+<p:notes xmlns:a="http://schemas.openxmlformats.org/drawingml/2006/main" xmlns:p="http://schemas.openxmlformats.org/presentationml/2006/main" xmlns:r="http://schemas.openxmlformats.org/officeDocument/2006/relationships">
+  <p:cSld>
+    <p:spTree>
+      <p:nvGrpSpPr>
+        <p:cNvPr id="1" name=""/>
+        <p:cNvGrpSpPr/>
+        <p:nvPr/>
+      </p:nvGrpSpPr>
+      <p:grpSpPr>
+        <a:xfrm>
+          <a:off x="0" y="0"/>
+          <a:ext cx="0" cy="0"/>
+          <a:chOff x="0" y="0"/>
+          <a:chExt cx="0" cy="0"/>
+        </a:xfrm>
+      </p:grpSpPr>
+      <p:sp>
+        <p:nvSpPr>
+          <p:cNvPr id="2" name="Slide Image Placeholder 1"/>
+          <p:cNvSpPr>
+            <a:spLocks noGrp="1"/>
+          </p:cNvSpPr>
+          <p:nvPr>
+            <p:ph type="sldImg" idx="2"/>
+          </p:nvPr>
+        </p:nvSpPr>
+        <p:spPr/>
+      </p:sp>
+      <p:sp>
+        <p:nvSpPr>
+          <p:cNvPr id="3" name="Notes Placeholder 2"/>
+          <p:cNvSpPr>
+            <a:spLocks noGrp="1"/>
+          </p:cNvSpPr>
+          <p:nvPr>
+            <p:ph type="body" idx="3" sz="quarter"/>
+          </p:nvPr>
+        </p:nvSpPr>
+        <p:spPr/>
+        <p:txBody>
+          <a:bodyPr/>
+          <a:lstStyle/>
+          <a:p>
+            <a:r>
+              <a:t>These are the themes of Microsoft's upstream contributions. Semantic parity was critical: null handling, lambda indices, array functions — Velox and Spark had subtle differences that broke correctness. Fallback reduction: we invested in dynamic filter pushdown and logical plan propagation to keep data columnar. Performance: removed batch-size limits, fixed memory-estimation overflows, enabled Spark 4.x. The pattern: find it in production, upstream the fix, entire community benefits.</a:t>
+            </a:r>
+          </a:p>
+        </p:txBody>
+      </p:sp>
+      <p:sp>
+        <p:nvSpPr>
+          <p:cNvPr id="4" name="Slide Number Placeholder 3"/>
+          <p:cNvSpPr>
+            <a:spLocks noGrp="1"/>
+          </p:cNvSpPr>
+          <p:nvPr>
+            <p:ph type="sldNum" idx="5" sz="quarter"/>
+          </p:nvPr>
+        </p:nvSpPr>
+        <p:spPr/>
+      </p:sp>
+    </p:spTree>
+  </p:cSld>
+  <p:clrMapOvr>
+    <a:masterClrMapping/>
+  </p:clrMapOvr>
+</p:notes>
+</file>
+
+<file path=ppt/notesSlides/notesSlide8.xml><?xml version="1.0" encoding="utf-8"?>
+<p:notes xmlns:a="http://schemas.openxmlformats.org/drawingml/2006/main" xmlns:p="http://schemas.openxmlformats.org/presentationml/2006/main" xmlns:r="http://schemas.openxmlformats.org/officeDocument/2006/relationships">
+  <p:cSld>
+    <p:spTree>
+      <p:nvGrpSpPr>
+        <p:cNvPr id="1" name=""/>
+        <p:cNvGrpSpPr/>
+        <p:nvPr/>
+      </p:nvGrpSpPr>
+      <p:grpSpPr>
+        <a:xfrm>
+          <a:off x="0" y="0"/>
+          <a:ext cx="0" cy="0"/>
+          <a:chOff x="0" y="0"/>
+          <a:chExt cx="0" cy="0"/>
+        </a:xfrm>
+      </p:grpSpPr>
+      <p:sp>
+        <p:nvSpPr>
+          <p:cNvPr id="2" name="Slide Image Placeholder 1"/>
+          <p:cNvSpPr>
+            <a:spLocks noGrp="1"/>
+          </p:cNvSpPr>
+          <p:nvPr>
+            <p:ph type="sldImg" idx="2"/>
+          </p:nvPr>
+        </p:nvSpPr>
+        <p:spPr/>
+      </p:sp>
+      <p:sp>
+        <p:nvSpPr>
+          <p:cNvPr id="3" name="Notes Placeholder 2"/>
+          <p:cNvSpPr>
+            <a:spLocks noGrp="1"/>
+          </p:cNvSpPr>
+          <p:nvPr>
+            <p:ph type="body" idx="3" sz="quarter"/>
+          </p:nvPr>
+        </p:nvSpPr>
+        <p:spPr/>
+        <p:txBody>
+          <a:bodyPr/>
+          <a:lstStyle/>
+          <a:p>
+            <a:r>
+              <a:t>This is the product evidence. Fabric Runtime 1.3 is Spark 3.5 + Delta 3.2, with Gluten and Velox built in. NEE is best for CPU-bound queries: heavy joins, aggregations, ETL. Not every query benefits. The 4x is geometric mean on TPC-DS SF1000 — synthetic benchmark. Up to 6x on specific ETL queries. 83% is runtime reduction, not billing reduction. Critically: no extra cost for customers. Be explicit that gains depend on workload shape.</a:t>
+            </a:r>
+          </a:p>
+        </p:txBody>
+      </p:sp>
+      <p:sp>
+        <p:nvSpPr>
+          <p:cNvPr id="4" name="Slide Number Placeholder 3"/>
+          <p:cNvSpPr>
+            <a:spLocks noGrp="1"/>
+          </p:cNvSpPr>
+          <p:nvPr>
+            <p:ph type="sldNum" idx="5" sz="quarter"/>
+          </p:nvPr>
+        </p:nvSpPr>
+        <p:spPr/>
+      </p:sp>
+    </p:spTree>
+  </p:cSld>
+  <p:clrMapOvr>
+    <a:masterClrMapping/>
+  </p:clrMapOvr>
+</p:notes>
+</file>
+
+<file path=ppt/notesSlides/notesSlide9.xml><?xml version="1.0" encoding="utf-8"?>
+<p:notes xmlns:a="http://schemas.openxmlformats.org/drawingml/2006/main" xmlns:p="http://schemas.openxmlformats.org/presentationml/2006/main" xmlns:r="http://schemas.openxmlformats.org/officeDocument/2006/relationships">
+  <p:cSld>
+    <p:spTree>
+      <p:nvGrpSpPr>
+        <p:cNvPr id="1" name=""/>
+        <p:cNvGrpSpPr/>
+        <p:nvPr/>
+      </p:nvGrpSpPr>
+      <p:grpSpPr>
+        <a:xfrm>
+          <a:off x="0" y="0"/>
+          <a:ext cx="0" cy="0"/>
+          <a:chOff x="0" y="0"/>
+          <a:chExt cx="0" cy="0"/>
+        </a:xfrm>
+      </p:grpSpPr>
+      <p:sp>
+        <p:nvSpPr>
+          <p:cNvPr id="2" name="Slide Image Placeholder 1"/>
+          <p:cNvSpPr>
+            <a:spLocks noGrp="1"/>
+          </p:cNvSpPr>
+          <p:nvPr>
+            <p:ph type="sldImg" idx="2"/>
+          </p:nvPr>
+        </p:nvSpPr>
+        <p:spPr/>
+      </p:sp>
+      <p:sp>
+        <p:nvSpPr>
+          <p:cNvPr id="3" name="Notes Placeholder 2"/>
+          <p:cNvSpPr>
+            <a:spLocks noGrp="1"/>
+          </p:cNvSpPr>
+          <p:nvPr>
+            <p:ph type="body" idx="3" sz="quarter"/>
+          </p:nvPr>
+        </p:nvSpPr>
+        <p:spPr/>
+        <p:txBody>
+          <a:bodyPr/>
+          <a:lstStyle/>
+          <a:p>
+            <a:r>
+              <a:t>Fabric extends OSS Gluten with enterprise features. Row-level and column-level security: policies injected at the native scan layer so Velox never sees data it shouldn't. Python and Scala UDFs: Arrow-based columnar transfer avoids Row serialization. Memory management: the cooperative arbitration protocol we discussed earlier. Spill-to-disk with sorted partitions and async I/O. Hash probe optimization for cache locality. These are Fabric-specific hardening, not upstreamed — but built on top of OSS Gluten and Velox.</a:t>
+            </a:r>
+          </a:p>
+        </p:txBody>
+      </p:sp>
+      <p:sp>
+        <p:nvSpPr>
+          <p:cNvPr id="4" name="Slide Number Placeholder 3"/>
+          <p:cNvSpPr>
+            <a:spLocks noGrp="1"/>
+          </p:cNvSpPr>
+          <p:nvPr>
+            <p:ph type="sldNum" idx="5" sz="quarter"/>
+          </p:nvPr>
+        </p:nvSpPr>
+        <p:spPr/>
+      </p:sp>
+    </p:spTree>
+  </p:cSld>
+  <p:clrMapOvr>
+    <a:masterClrMapping/>
+  </p:clrMapOvr>
+</p:notes>
 </file>
 
 <file path=ppt/slideLayouts/slideLayout1.xml><?xml version="1.0" encoding="utf-8"?>
@@ -3355,6 +4615,9 @@
           <a:lstStyle/>
           <a:p>
             <a:pPr algn="l">
+              <a:spcAft>
+                <a:spcPts val="200"/>
+              </a:spcAft>
               <a:defRPr sz="2200" b="1">
                 <a:solidFill>
                   <a:srgbClr val="FFFFFF"/>
@@ -3391,6 +4654,9 @@
           <a:lstStyle/>
           <a:p>
             <a:pPr algn="ctr">
+              <a:spcAft>
+                <a:spcPts val="200"/>
+              </a:spcAft>
               <a:defRPr sz="4000" b="1">
                 <a:solidFill>
                   <a:srgbClr val="FFFFFF"/>
@@ -3431,6 +4697,9 @@
           <a:lstStyle/>
           <a:p>
             <a:pPr algn="ctr">
+              <a:spcAft>
+                <a:spcPts val="200"/>
+              </a:spcAft>
               <a:defRPr sz="2200" b="0">
                 <a:solidFill>
                   <a:srgbClr val="B4D6FA"/>
@@ -3467,6 +4736,9 @@
           <a:lstStyle/>
           <a:p>
             <a:pPr algn="ctr">
+              <a:spcAft>
+                <a:spcPts val="200"/>
+              </a:spcAft>
               <a:defRPr sz="1400" b="0">
                 <a:solidFill>
                   <a:srgbClr val="8EC8FF"/>
@@ -3475,7 +4747,7 @@
               </a:defRPr>
             </a:pPr>
             <a:r>
-              <a:t>Production lessons from Fabric NEE — and the upstream changes they drove in Gluten and Velox</a:t>
+              <a:t>Production lessons from Fabric NEE — and the upstream contributions they drove in Gluten and Velox</a:t>
             </a:r>
           </a:p>
         </p:txBody>
@@ -3503,6 +4775,9 @@
           <a:lstStyle/>
           <a:p>
             <a:pPr algn="ctr">
+              <a:spcAft>
+                <a:spcPts val="200"/>
+              </a:spcAft>
               <a:defRPr sz="1600" b="0">
                 <a:solidFill>
                   <a:srgbClr val="FFFFFF"/>
@@ -3511,7 +4786,7 @@
               </a:defRPr>
             </a:pPr>
             <a:r>
-              <a:t>William Chen  &amp;  Ajith Shetty  •  Microsoft  •  VeloxCon 2026</a:t>
+              <a:t>William Chen  &amp;  Ajith Shetty  |  Microsoft  |  VeloxCon 2026</a:t>
             </a:r>
           </a:p>
         </p:txBody>
@@ -3539,6 +4814,9 @@
           <a:lstStyle/>
           <a:p>
             <a:pPr algn="ctr">
+              <a:spcAft>
+                <a:spcPts val="200"/>
+              </a:spcAft>
               <a:defRPr sz="1200" b="0">
                 <a:solidFill>
                   <a:srgbClr val="8EC8FF"/>
@@ -3547,7 +4825,7 @@
               </a:defRPr>
             </a:pPr>
             <a:r>
-              <a:t>April 30, 2026  •  Meta HQ, Menlo Park</a:t>
+              <a:t>April 30, 2026  |  Meta HQ, Menlo Park</a:t>
             </a:r>
           </a:p>
         </p:txBody>
@@ -3593,6 +4871,9 @@
           <a:lstStyle/>
           <a:p>
             <a:pPr algn="l">
+              <a:spcAft>
+                <a:spcPts val="200"/>
+              </a:spcAft>
               <a:defRPr sz="3200" b="1">
                 <a:solidFill>
                   <a:srgbClr val="323130"/>
@@ -3659,7 +4940,7 @@
         </p:nvGraphicFramePr>
         <p:xfrm>
           <a:off x="731520" y="1097280"/>
-          <a:ext cx="10698480" cy="2194560"/>
+          <a:ext cx="10698480" cy="2304288"/>
         </p:xfrm>
         <a:graphic>
           <a:graphicData uri="http://schemas.openxmlformats.org/drawingml/2006/table">
@@ -3672,13 +4953,16 @@
                 <a:gridCol w="5029200"/>
                 <a:gridCol w="3657600"/>
               </a:tblGrid>
-              <a:tr h="365760">
+              <a:tr h="384048">
                 <a:tc>
                   <a:txBody>
-                    <a:bodyPr/>
+                    <a:bodyPr wrap="square"/>
                     <a:lstStyle/>
                     <a:p>
                       <a:pPr>
+                        <a:spcAft>
+                          <a:spcPts val="100"/>
+                        </a:spcAft>
                         <a:defRPr sz="1100" b="1">
                           <a:solidFill>
                             <a:srgbClr val="FFFFFF"/>
@@ -3691,7 +4975,7 @@
                       </a:r>
                     </a:p>
                   </a:txBody>
-                  <a:tcPr>
+                  <a:tcPr marL="101600" marR="101600" marT="50800" marB="50800">
                     <a:solidFill>
                       <a:srgbClr val="0078D4"/>
                     </a:solidFill>
@@ -3699,10 +4983,13 @@
                 </a:tc>
                 <a:tc>
                   <a:txBody>
-                    <a:bodyPr/>
+                    <a:bodyPr wrap="square"/>
                     <a:lstStyle/>
                     <a:p>
                       <a:pPr>
+                        <a:spcAft>
+                          <a:spcPts val="100"/>
+                        </a:spcAft>
                         <a:defRPr sz="1100" b="1">
                           <a:solidFill>
                             <a:srgbClr val="FFFFFF"/>
@@ -3715,7 +5002,7 @@
                       </a:r>
                     </a:p>
                   </a:txBody>
-                  <a:tcPr>
+                  <a:tcPr marL="101600" marR="101600" marT="50800" marB="50800">
                     <a:solidFill>
                       <a:srgbClr val="0078D4"/>
                     </a:solidFill>
@@ -3723,10 +5010,13 @@
                 </a:tc>
                 <a:tc>
                   <a:txBody>
-                    <a:bodyPr/>
+                    <a:bodyPr wrap="square"/>
                     <a:lstStyle/>
                     <a:p>
                       <a:pPr>
+                        <a:spcAft>
+                          <a:spcPts val="100"/>
+                        </a:spcAft>
                         <a:defRPr sz="1100" b="1">
                           <a:solidFill>
                             <a:srgbClr val="FFFFFF"/>
@@ -3739,20 +5029,23 @@
                       </a:r>
                     </a:p>
                   </a:txBody>
-                  <a:tcPr>
+                  <a:tcPr marL="101600" marR="101600" marT="50800" marB="50800">
                     <a:solidFill>
                       <a:srgbClr val="0078D4"/>
                     </a:solidFill>
                   </a:tcPr>
                 </a:tc>
               </a:tr>
-              <a:tr h="365760">
+              <a:tr h="384048">
                 <a:tc>
                   <a:txBody>
-                    <a:bodyPr/>
+                    <a:bodyPr wrap="square"/>
                     <a:lstStyle/>
                     <a:p>
                       <a:pPr>
+                        <a:spcAft>
+                          <a:spcPts val="100"/>
+                        </a:spcAft>
                         <a:defRPr sz="1100">
                           <a:solidFill>
                             <a:srgbClr val="323130"/>
@@ -3765,7 +5058,7 @@
                       </a:r>
                     </a:p>
                   </a:txBody>
-                  <a:tcPr>
+                  <a:tcPr marL="101600" marR="101600" marT="50800" marB="50800">
                     <a:solidFill>
                       <a:srgbClr val="FFFFFF"/>
                     </a:solidFill>
@@ -3773,10 +5066,13 @@
                 </a:tc>
                 <a:tc>
                   <a:txBody>
-                    <a:bodyPr/>
+                    <a:bodyPr wrap="square"/>
                     <a:lstStyle/>
                     <a:p>
                       <a:pPr>
+                        <a:spcAft>
+                          <a:spcPts val="100"/>
+                        </a:spcAft>
                         <a:defRPr sz="1100">
                           <a:solidFill>
                             <a:srgbClr val="323130"/>
@@ -3785,11 +5081,11 @@
                         </a:defRPr>
                       </a:pPr>
                       <a:r>
-                        <a:t>Spark's collect_set includes nulls by default; Velox excluded them → silent correctness bugs</a:t>
+                        <a:t>Velox's collect_set dropped nulls by default; Spark keeps them. TPC-DS queries silently returned wrong results.</a:t>
                       </a:r>
                     </a:p>
                   </a:txBody>
-                  <a:tcPr>
+                  <a:tcPr marL="101600" marR="101600" marT="50800" marB="50800">
                     <a:solidFill>
                       <a:srgbClr val="FFFFFF"/>
                     </a:solidFill>
@@ -3797,10 +5093,13 @@
                 </a:tc>
                 <a:tc>
                   <a:txBody>
-                    <a:bodyPr/>
+                    <a:bodyPr wrap="square"/>
                     <a:lstStyle/>
                     <a:p>
                       <a:pPr>
+                        <a:spcAft>
+                          <a:spcPts val="100"/>
+                        </a:spcAft>
                         <a:defRPr sz="1100">
                           <a:solidFill>
                             <a:srgbClr val="323130"/>
@@ -3813,20 +5112,23 @@
                       </a:r>
                     </a:p>
                   </a:txBody>
-                  <a:tcPr>
+                  <a:tcPr marL="101600" marR="101600" marT="50800" marB="50800">
                     <a:solidFill>
                       <a:srgbClr val="FFFFFF"/>
                     </a:solidFill>
                   </a:tcPr>
                 </a:tc>
               </a:tr>
-              <a:tr h="365760">
+              <a:tr h="384048">
                 <a:tc>
                   <a:txBody>
-                    <a:bodyPr/>
+                    <a:bodyPr wrap="square"/>
                     <a:lstStyle/>
                     <a:p>
                       <a:pPr>
+                        <a:spcAft>
+                          <a:spcPts val="100"/>
+                        </a:spcAft>
                         <a:defRPr sz="1100">
                           <a:solidFill>
                             <a:srgbClr val="323130"/>
@@ -3839,7 +5141,7 @@
                       </a:r>
                     </a:p>
                   </a:txBody>
-                  <a:tcPr>
+                  <a:tcPr marL="101600" marR="101600" marT="50800" marB="50800">
                     <a:solidFill>
                       <a:srgbClr val="FAF9F8"/>
                     </a:solidFill>
@@ -3847,10 +5149,13 @@
                 </a:tc>
                 <a:tc>
                   <a:txBody>
-                    <a:bodyPr/>
+                    <a:bodyPr wrap="square"/>
                     <a:lstStyle/>
                     <a:p>
                       <a:pPr>
+                        <a:spcAft>
+                          <a:spcPts val="100"/>
+                        </a:spcAft>
                         <a:defRPr sz="1100">
                           <a:solidFill>
                             <a:srgbClr val="323130"/>
@@ -3859,11 +5164,11 @@
                         </a:defRPr>
                       </a:pPr>
                       <a:r>
-                        <a:t>Single unsupported expression forces ColumnarToRow for entire upstream subtree → slower than pure JVM</a:t>
+                        <a:t>One unsupported function forced entire query back to JVM — serialization overhead made native path slower than pure Spark.</a:t>
                       </a:r>
                     </a:p>
                   </a:txBody>
-                  <a:tcPr>
+                  <a:tcPr marL="101600" marR="101600" marT="50800" marB="50800">
                     <a:solidFill>
                       <a:srgbClr val="FAF9F8"/>
                     </a:solidFill>
@@ -3871,10 +5176,13 @@
                 </a:tc>
                 <a:tc>
                   <a:txBody>
-                    <a:bodyPr/>
+                    <a:bodyPr wrap="square"/>
                     <a:lstStyle/>
                     <a:p>
                       <a:pPr>
+                        <a:spcAft>
+                          <a:spcPts val="100"/>
+                        </a:spcAft>
                         <a:defRPr sz="1100">
                           <a:solidFill>
                             <a:srgbClr val="323130"/>
@@ -3887,20 +5195,23 @@
                       </a:r>
                     </a:p>
                   </a:txBody>
-                  <a:tcPr>
+                  <a:tcPr marL="101600" marR="101600" marT="50800" marB="50800">
                     <a:solidFill>
                       <a:srgbClr val="FAF9F8"/>
                     </a:solidFill>
                   </a:tcPr>
                 </a:tc>
               </a:tr>
-              <a:tr h="365760">
+              <a:tr h="384048">
                 <a:tc>
                   <a:txBody>
-                    <a:bodyPr/>
+                    <a:bodyPr wrap="square"/>
                     <a:lstStyle/>
                     <a:p>
                       <a:pPr>
+                        <a:spcAft>
+                          <a:spcPts val="100"/>
+                        </a:spcAft>
                         <a:defRPr sz="1100">
                           <a:solidFill>
                             <a:srgbClr val="323130"/>
@@ -3913,7 +5224,7 @@
                       </a:r>
                     </a:p>
                   </a:txBody>
-                  <a:tcPr>
+                  <a:tcPr marL="101600" marR="101600" marT="50800" marB="50800">
                     <a:solidFill>
                       <a:srgbClr val="FFFFFF"/>
                     </a:solidFill>
@@ -3921,10 +5232,13 @@
                 </a:tc>
                 <a:tc>
                   <a:txBody>
-                    <a:bodyPr/>
+                    <a:bodyPr wrap="square"/>
                     <a:lstStyle/>
                     <a:p>
                       <a:pPr>
+                        <a:spcAft>
+                          <a:spcPts val="100"/>
+                        </a:spcAft>
                         <a:defRPr sz="1100">
                           <a:solidFill>
                             <a:srgbClr val="323130"/>
@@ -3933,11 +5247,11 @@
                         </a:defRPr>
                       </a:pPr>
                       <a:r>
-                        <a:t>Native scan paths must honor Row-Level &amp; Column-Level Security policies</a:t>
+                        <a:t>Native scan paths must honor Row-Level &amp; Column-Level Security policies.</a:t>
                       </a:r>
                     </a:p>
                   </a:txBody>
-                  <a:tcPr>
+                  <a:tcPr marL="101600" marR="101600" marT="50800" marB="50800">
                     <a:solidFill>
                       <a:srgbClr val="FFFFFF"/>
                     </a:solidFill>
@@ -3945,10 +5259,13 @@
                 </a:tc>
                 <a:tc>
                   <a:txBody>
-                    <a:bodyPr/>
+                    <a:bodyPr wrap="square"/>
                     <a:lstStyle/>
                     <a:p>
                       <a:pPr>
+                        <a:spcAft>
+                          <a:spcPts val="100"/>
+                        </a:spcAft>
                         <a:defRPr sz="1100">
                           <a:solidFill>
                             <a:srgbClr val="323130"/>
@@ -3961,20 +5278,23 @@
                       </a:r>
                     </a:p>
                   </a:txBody>
-                  <a:tcPr>
+                  <a:tcPr marL="101600" marR="101600" marT="50800" marB="50800">
                     <a:solidFill>
                       <a:srgbClr val="FFFFFF"/>
                     </a:solidFill>
                   </a:tcPr>
                 </a:tc>
               </a:tr>
-              <a:tr h="365760">
+              <a:tr h="384048">
                 <a:tc>
                   <a:txBody>
-                    <a:bodyPr/>
+                    <a:bodyPr wrap="square"/>
                     <a:lstStyle/>
                     <a:p>
                       <a:pPr>
+                        <a:spcAft>
+                          <a:spcPts val="100"/>
+                        </a:spcAft>
                         <a:defRPr sz="1100">
                           <a:solidFill>
                             <a:srgbClr val="323130"/>
@@ -3987,7 +5307,7 @@
                       </a:r>
                     </a:p>
                   </a:txBody>
-                  <a:tcPr>
+                  <a:tcPr marL="101600" marR="101600" marT="50800" marB="50800">
                     <a:solidFill>
                       <a:srgbClr val="FAF9F8"/>
                     </a:solidFill>
@@ -3995,10 +5315,13 @@
                 </a:tc>
                 <a:tc>
                   <a:txBody>
-                    <a:bodyPr/>
+                    <a:bodyPr wrap="square"/>
                     <a:lstStyle/>
                     <a:p>
                       <a:pPr>
+                        <a:spcAft>
+                          <a:spcPts val="100"/>
+                        </a:spcAft>
                         <a:defRPr sz="1100">
                           <a:solidFill>
                             <a:srgbClr val="323130"/>
@@ -4007,11 +5330,11 @@
                         </a:defRPr>
                       </a:pPr>
                       <a:r>
-                        <a:t>Native segfaults (SIGSEGV) → no JVM stack trace, opaque crash dumps</a:t>
+                        <a:t>Native segfaults (SIGSEGV) → no JVM stack trace, opaque crash dumps.</a:t>
                       </a:r>
                     </a:p>
                   </a:txBody>
-                  <a:tcPr>
+                  <a:tcPr marL="101600" marR="101600" marT="50800" marB="50800">
                     <a:solidFill>
                       <a:srgbClr val="FAF9F8"/>
                     </a:solidFill>
@@ -4019,10 +5342,13 @@
                 </a:tc>
                 <a:tc>
                   <a:txBody>
-                    <a:bodyPr/>
+                    <a:bodyPr wrap="square"/>
                     <a:lstStyle/>
                     <a:p>
                       <a:pPr>
+                        <a:spcAft>
+                          <a:spcPts val="100"/>
+                        </a:spcAft>
                         <a:defRPr sz="1100">
                           <a:solidFill>
                             <a:srgbClr val="323130"/>
@@ -4035,20 +5361,23 @@
                       </a:r>
                     </a:p>
                   </a:txBody>
-                  <a:tcPr>
+                  <a:tcPr marL="101600" marR="101600" marT="50800" marB="50800">
                     <a:solidFill>
                       <a:srgbClr val="FAF9F8"/>
                     </a:solidFill>
                   </a:tcPr>
                 </a:tc>
               </a:tr>
-              <a:tr h="365760">
+              <a:tr h="384048">
                 <a:tc>
                   <a:txBody>
-                    <a:bodyPr/>
+                    <a:bodyPr wrap="square"/>
                     <a:lstStyle/>
                     <a:p>
                       <a:pPr>
+                        <a:spcAft>
+                          <a:spcPts val="100"/>
+                        </a:spcAft>
                         <a:defRPr sz="1100">
                           <a:solidFill>
                             <a:srgbClr val="323130"/>
@@ -4061,7 +5390,7 @@
                       </a:r>
                     </a:p>
                   </a:txBody>
-                  <a:tcPr>
+                  <a:tcPr marL="101600" marR="101600" marT="50800" marB="50800">
                     <a:solidFill>
                       <a:srgbClr val="FFFFFF"/>
                     </a:solidFill>
@@ -4069,10 +5398,13 @@
                 </a:tc>
                 <a:tc>
                   <a:txBody>
-                    <a:bodyPr/>
+                    <a:bodyPr wrap="square"/>
                     <a:lstStyle/>
                     <a:p>
                       <a:pPr>
+                        <a:spcAft>
+                          <a:spcPts val="100"/>
+                        </a:spcAft>
                         <a:defRPr sz="1100">
                           <a:solidFill>
                             <a:srgbClr val="323130"/>
@@ -4081,11 +5413,11 @@
                         </a:defRPr>
                       </a:pPr>
                       <a:r>
-                        <a:t>Missing/incomplete metrics for native operators slowed production triage</a:t>
+                        <a:t>Missing/incomplete metrics for native operators slowed production triage.</a:t>
                       </a:r>
                     </a:p>
                   </a:txBody>
-                  <a:tcPr>
+                  <a:tcPr marL="101600" marR="101600" marT="50800" marB="50800">
                     <a:solidFill>
                       <a:srgbClr val="FFFFFF"/>
                     </a:solidFill>
@@ -4093,10 +5425,13 @@
                 </a:tc>
                 <a:tc>
                   <a:txBody>
-                    <a:bodyPr/>
+                    <a:bodyPr wrap="square"/>
                     <a:lstStyle/>
                     <a:p>
                       <a:pPr>
+                        <a:spcAft>
+                          <a:spcPts val="100"/>
+                        </a:spcAft>
                         <a:defRPr sz="1100">
                           <a:solidFill>
                             <a:srgbClr val="323130"/>
@@ -4109,7 +5444,7 @@
                       </a:r>
                     </a:p>
                   </a:txBody>
-                  <a:tcPr>
+                  <a:tcPr marL="101600" marR="101600" marT="50800" marB="50800">
                     <a:solidFill>
                       <a:srgbClr val="FFFFFF"/>
                     </a:solidFill>
@@ -4214,8 +5549,8 @@
         </p:nvSpPr>
         <p:spPr>
           <a:xfrm>
-            <a:off x="1005840" y="4846320"/>
-            <a:ext cx="10058400" cy="457200"/>
+            <a:off x="914400" y="4828032"/>
+            <a:ext cx="10241280" cy="502920"/>
           </a:xfrm>
           <a:prstGeom prst="rect">
             <a:avLst/>
@@ -4228,16 +5563,23 @@
           </a:bodyPr>
           <a:lstStyle/>
           <a:p>
-            <a:pPr algn="l">
-              <a:defRPr sz="1300" b="1">
+            <a:r>
+              <a:rPr sz="1300" b="1">
+                <a:solidFill>
+                  <a:srgbClr val="0078D4"/>
+                </a:solidFill>
+                <a:latin typeface="Segoe UI"/>
+              </a:rPr>
+              <a:t>Key insight: </a:t>
+            </a:r>
+            <a:r>
+              <a:rPr sz="1300">
                 <a:solidFill>
                   <a:srgbClr val="323130"/>
                 </a:solidFill>
                 <a:latin typeface="Segoe UI"/>
-              </a:defRPr>
-            </a:pPr>
-            <a:r>
-              <a:t>Every row above became an upstream PR or a Fabric-specific hardening. Production is the fastest test suite in open source.</a:t>
+              </a:rPr>
+              <a:t>Production complements rigorous testing with real-world edge cases at previously impossible scale. Every row above became an upstream PR or a Fabric-specific hardening.</a:t>
             </a:r>
           </a:p>
         </p:txBody>
@@ -4264,15 +5606,16 @@
           </a:bodyPr>
           <a:lstStyle/>
           <a:p>
-            <a:pPr algn="l">
+            <a:pPr>
               <a:defRPr sz="900">
                 <a:solidFill>
                   <a:srgbClr val="605E5C"/>
                 </a:solidFill>
+                <a:latin typeface="Segoe UI"/>
               </a:defRPr>
             </a:pPr>
             <a:r>
-              <a:t>VeloxCon 2026  •  April 30  •  Meta HQ, Menlo Park</a:t>
+              <a:t>VeloxCon 2026  |  April 30  |  Meta HQ, Menlo Park</a:t>
             </a:r>
           </a:p>
         </p:txBody>
@@ -4304,6 +5647,7 @@
                 <a:solidFill>
                   <a:srgbClr val="605E5C"/>
                 </a:solidFill>
+                <a:latin typeface="Segoe UI"/>
               </a:defRPr>
             </a:pPr>
             <a:r>
@@ -4404,6 +5748,9 @@
           <a:lstStyle/>
           <a:p>
             <a:pPr algn="l">
+              <a:spcAft>
+                <a:spcPts val="200"/>
+              </a:spcAft>
               <a:defRPr sz="4800" b="1">
                 <a:solidFill>
                   <a:srgbClr val="FFFFFF"/>
@@ -4440,6 +5787,9 @@
           <a:lstStyle/>
           <a:p>
             <a:pPr algn="l">
+              <a:spcAft>
+                <a:spcPts val="200"/>
+              </a:spcAft>
               <a:defRPr sz="3600" b="1">
                 <a:solidFill>
                   <a:srgbClr val="FFFFFF"/>
@@ -4476,6 +5826,9 @@
           <a:lstStyle/>
           <a:p>
             <a:pPr algn="l">
+              <a:spcAft>
+                <a:spcPts val="200"/>
+              </a:spcAft>
               <a:defRPr sz="1800" b="0">
                 <a:solidFill>
                   <a:srgbClr val="B4D6FA"/>
@@ -4484,7 +5837,7 @@
               </a:defRPr>
             </a:pPr>
             <a:r>
-              <a:t>Recent Microsoft contributions across Gluten, Velox, and Spark</a:t>
+              <a:t>Validate at scale, upstream fixes, ecosystem benefits</a:t>
             </a:r>
           </a:p>
         </p:txBody>
@@ -4516,6 +5869,7 @@
                 <a:solidFill>
                   <a:srgbClr val="B4D6FA"/>
                 </a:solidFill>
+                <a:latin typeface="Segoe UI"/>
               </a:defRPr>
             </a:pPr>
             <a:r>
@@ -4565,6 +5919,9 @@
           <a:lstStyle/>
           <a:p>
             <a:pPr algn="l">
+              <a:spcAft>
+                <a:spcPts val="200"/>
+              </a:spcAft>
               <a:defRPr sz="3200" b="1">
                 <a:solidFill>
                   <a:srgbClr val="323130"/>
@@ -4573,7 +5930,7 @@
               </a:defRPr>
             </a:pPr>
             <a:r>
-              <a:t>Contribution Themes: Discovery → Upstream → Ship</a:t>
+              <a:t>Contribution Themes: Validate → Upstream → Ecosystem Benefits</a:t>
             </a:r>
           </a:p>
         </p:txBody>
@@ -4644,6 +6001,9 @@
           <a:lstStyle/>
           <a:p>
             <a:pPr algn="l">
+              <a:spcAft>
+                <a:spcPts val="200"/>
+              </a:spcAft>
               <a:defRPr sz="1200" b="0">
                 <a:solidFill>
                   <a:srgbClr val="323130"/>
@@ -4652,7 +6012,7 @@
               </a:defRPr>
             </a:pPr>
             <a:r>
-              <a:t>Microsoft contributes across Apache Spark, Apache Gluten (PMC seat), and Velox (development partner) alongside Meta, Intel, Kyligence, and other community members.</a:t>
+              <a:t>Microsoft contributes to Apache Spark, Apache Gluten, and Velox in collaboration with Meta, Intel, Kyligence, and the broader community.</a:t>
             </a:r>
           </a:p>
         </p:txBody>
@@ -4667,7 +6027,7 @@
         </p:nvGraphicFramePr>
         <p:xfrm>
           <a:off x="731520" y="1463040"/>
-          <a:ext cx="10698480" cy="2560320"/>
+          <a:ext cx="10698480" cy="2688336"/>
         </p:xfrm>
         <a:graphic>
           <a:graphicData uri="http://schemas.openxmlformats.org/drawingml/2006/table">
@@ -4676,17 +6036,20 @@
                 <a:tableStyleId>{5C22544A-7EE6-4342-B048-85BDC9FD1C3A}</a:tableStyleId>
               </a:tblPr>
               <a:tblGrid>
-                <a:gridCol w="2011680"/>
+                <a:gridCol w="1828800"/>
                 <a:gridCol w="3657600"/>
-                <a:gridCol w="5029200"/>
+                <a:gridCol w="5212080"/>
               </a:tblGrid>
-              <a:tr h="365760">
+              <a:tr h="384048">
                 <a:tc>
                   <a:txBody>
-                    <a:bodyPr/>
+                    <a:bodyPr wrap="square"/>
                     <a:lstStyle/>
                     <a:p>
                       <a:pPr>
+                        <a:spcAft>
+                          <a:spcPts val="100"/>
+                        </a:spcAft>
                         <a:defRPr sz="1000" b="1">
                           <a:solidFill>
                             <a:srgbClr val="FFFFFF"/>
@@ -4699,7 +6062,7 @@
                       </a:r>
                     </a:p>
                   </a:txBody>
-                  <a:tcPr>
+                  <a:tcPr marL="101600" marR="101600" marT="50800" marB="50800">
                     <a:solidFill>
                       <a:srgbClr val="0078D4"/>
                     </a:solidFill>
@@ -4707,10 +6070,13 @@
                 </a:tc>
                 <a:tc>
                   <a:txBody>
-                    <a:bodyPr/>
+                    <a:bodyPr wrap="square"/>
                     <a:lstStyle/>
                     <a:p>
                       <a:pPr>
+                        <a:spcAft>
+                          <a:spcPts val="100"/>
+                        </a:spcAft>
                         <a:defRPr sz="1000" b="1">
                           <a:solidFill>
                             <a:srgbClr val="FFFFFF"/>
@@ -4723,7 +6089,7 @@
                       </a:r>
                     </a:p>
                   </a:txBody>
-                  <a:tcPr>
+                  <a:tcPr marL="101600" marR="101600" marT="50800" marB="50800">
                     <a:solidFill>
                       <a:srgbClr val="0078D4"/>
                     </a:solidFill>
@@ -4731,10 +6097,13 @@
                 </a:tc>
                 <a:tc>
                   <a:txBody>
-                    <a:bodyPr/>
+                    <a:bodyPr wrap="square"/>
                     <a:lstStyle/>
                     <a:p>
                       <a:pPr>
+                        <a:spcAft>
+                          <a:spcPts val="100"/>
+                        </a:spcAft>
                         <a:defRPr sz="1000" b="1">
                           <a:solidFill>
                             <a:srgbClr val="FFFFFF"/>
@@ -4747,20 +6116,23 @@
                       </a:r>
                     </a:p>
                   </a:txBody>
-                  <a:tcPr>
+                  <a:tcPr marL="101600" marR="101600" marT="50800" marB="50800">
                     <a:solidFill>
                       <a:srgbClr val="0078D4"/>
                     </a:solidFill>
                   </a:tcPr>
                 </a:tc>
               </a:tr>
-              <a:tr h="365760">
+              <a:tr h="384048">
                 <a:tc>
                   <a:txBody>
-                    <a:bodyPr/>
+                    <a:bodyPr wrap="square"/>
                     <a:lstStyle/>
                     <a:p>
                       <a:pPr>
+                        <a:spcAft>
+                          <a:spcPts val="100"/>
+                        </a:spcAft>
                         <a:defRPr sz="1000">
                           <a:solidFill>
                             <a:srgbClr val="323130"/>
@@ -4769,11 +6141,11 @@
                         </a:defRPr>
                       </a:pPr>
                       <a:r>
-                        <a:t>🎯 Semantic Parity</a:t>
+                        <a:t>Semantic Parity</a:t>
                       </a:r>
                     </a:p>
                   </a:txBody>
-                  <a:tcPr>
+                  <a:tcPr marL="101600" marR="101600" marT="50800" marB="50800">
                     <a:solidFill>
                       <a:srgbClr val="FFFFFF"/>
                     </a:solidFill>
@@ -4781,10 +6153,13 @@
                 </a:tc>
                 <a:tc>
                   <a:txBody>
-                    <a:bodyPr/>
+                    <a:bodyPr wrap="square"/>
                     <a:lstStyle/>
                     <a:p>
                       <a:pPr>
+                        <a:spcAft>
+                          <a:spcPts val="100"/>
+                        </a:spcAft>
                         <a:defRPr sz="1000">
                           <a:solidFill>
                             <a:srgbClr val="323130"/>
@@ -4797,7 +6172,7 @@
                       </a:r>
                     </a:p>
                   </a:txBody>
-                  <a:tcPr>
+                  <a:tcPr marL="101600" marR="101600" marT="50800" marB="50800">
                     <a:solidFill>
                       <a:srgbClr val="FFFFFF"/>
                     </a:solidFill>
@@ -4805,10 +6180,13 @@
                 </a:tc>
                 <a:tc>
                   <a:txBody>
-                    <a:bodyPr/>
+                    <a:bodyPr wrap="square"/>
                     <a:lstStyle/>
                     <a:p>
                       <a:pPr>
+                        <a:spcAft>
+                          <a:spcPts val="100"/>
+                        </a:spcAft>
                         <a:defRPr sz="1000">
                           <a:solidFill>
                             <a:srgbClr val="323130"/>
@@ -4822,6 +6200,9 @@
                     </a:p>
                     <a:p>
                       <a:pPr>
+                        <a:spcAft>
+                          <a:spcPts val="100"/>
+                        </a:spcAft>
                         <a:defRPr sz="1000">
                           <a:solidFill>
                             <a:srgbClr val="323130"/>
@@ -4835,6 +6216,9 @@
                     </a:p>
                     <a:p>
                       <a:pPr>
+                        <a:spcAft>
+                          <a:spcPts val="100"/>
+                        </a:spcAft>
                         <a:defRPr sz="1000">
                           <a:solidFill>
                             <a:srgbClr val="323130"/>
@@ -4843,24 +6227,27 @@
                         </a:defRPr>
                       </a:pPr>
                       <a:r>
-                        <a:t>Velox: lambda index filter(array,(x,i)→…) #16334</a:t>
+                        <a:t>Velox: lambda index filter(array,(x,i)→...) #16334</a:t>
                       </a:r>
                     </a:p>
                   </a:txBody>
-                  <a:tcPr>
+                  <a:tcPr marL="101600" marR="101600" marT="50800" marB="50800">
                     <a:solidFill>
                       <a:srgbClr val="FFFFFF"/>
                     </a:solidFill>
                   </a:tcPr>
                 </a:tc>
               </a:tr>
-              <a:tr h="365760">
+              <a:tr h="384048">
                 <a:tc>
                   <a:txBody>
-                    <a:bodyPr/>
+                    <a:bodyPr wrap="square"/>
                     <a:lstStyle/>
                     <a:p>
                       <a:pPr>
+                        <a:spcAft>
+                          <a:spcPts val="100"/>
+                        </a:spcAft>
                         <a:defRPr sz="1000">
                           <a:solidFill>
                             <a:srgbClr val="323130"/>
@@ -4869,11 +6256,11 @@
                         </a:defRPr>
                       </a:pPr>
                       <a:r>
-                        <a:t>🔄 Fallback Reduction</a:t>
+                        <a:t>Fallback Reduction</a:t>
                       </a:r>
                     </a:p>
                   </a:txBody>
-                  <a:tcPr>
+                  <a:tcPr marL="101600" marR="101600" marT="50800" marB="50800">
                     <a:solidFill>
                       <a:srgbClr val="FAF9F8"/>
                     </a:solidFill>
@@ -4881,10 +6268,13 @@
                 </a:tc>
                 <a:tc>
                   <a:txBody>
-                    <a:bodyPr/>
+                    <a:bodyPr wrap="square"/>
                     <a:lstStyle/>
                     <a:p>
                       <a:pPr>
+                        <a:spcAft>
+                          <a:spcPts val="100"/>
+                        </a:spcAft>
                         <a:defRPr sz="1000">
                           <a:solidFill>
                             <a:srgbClr val="323130"/>
@@ -4897,7 +6287,7 @@
                       </a:r>
                     </a:p>
                   </a:txBody>
-                  <a:tcPr>
+                  <a:tcPr marL="101600" marR="101600" marT="50800" marB="50800">
                     <a:solidFill>
                       <a:srgbClr val="FAF9F8"/>
                     </a:solidFill>
@@ -4905,10 +6295,13 @@
                 </a:tc>
                 <a:tc>
                   <a:txBody>
-                    <a:bodyPr/>
+                    <a:bodyPr wrap="square"/>
                     <a:lstStyle/>
                     <a:p>
                       <a:pPr>
+                        <a:spcAft>
+                          <a:spcPts val="100"/>
+                        </a:spcAft>
                         <a:defRPr sz="1000">
                           <a:solidFill>
                             <a:srgbClr val="323130"/>
@@ -4922,6 +6315,9 @@
                     </a:p>
                     <a:p>
                       <a:pPr>
+                        <a:spcAft>
+                          <a:spcPts val="100"/>
+                        </a:spcAft>
                         <a:defRPr sz="1000">
                           <a:solidFill>
                             <a:srgbClr val="323130"/>
@@ -4935,6 +6331,9 @@
                     </a:p>
                     <a:p>
                       <a:pPr>
+                        <a:spcAft>
+                          <a:spcPts val="100"/>
+                        </a:spcAft>
                         <a:defRPr sz="1000">
                           <a:solidFill>
                             <a:srgbClr val="323130"/>
@@ -4947,20 +6346,23 @@
                       </a:r>
                     </a:p>
                   </a:txBody>
-                  <a:tcPr>
+                  <a:tcPr marL="101600" marR="101600" marT="50800" marB="50800">
                     <a:solidFill>
                       <a:srgbClr val="FAF9F8"/>
                     </a:solidFill>
                   </a:tcPr>
                 </a:tc>
               </a:tr>
-              <a:tr h="365760">
+              <a:tr h="384048">
                 <a:tc>
                   <a:txBody>
-                    <a:bodyPr/>
+                    <a:bodyPr wrap="square"/>
                     <a:lstStyle/>
                     <a:p>
                       <a:pPr>
+                        <a:spcAft>
+                          <a:spcPts val="100"/>
+                        </a:spcAft>
                         <a:defRPr sz="1000">
                           <a:solidFill>
                             <a:srgbClr val="323130"/>
@@ -4969,11 +6371,11 @@
                         </a:defRPr>
                       </a:pPr>
                       <a:r>
-                        <a:t>⚡ Performance &amp; Scale</a:t>
+                        <a:t>Performance &amp; Scale</a:t>
                       </a:r>
                     </a:p>
                   </a:txBody>
-                  <a:tcPr>
+                  <a:tcPr marL="101600" marR="101600" marT="50800" marB="50800">
                     <a:solidFill>
                       <a:srgbClr val="FFFFFF"/>
                     </a:solidFill>
@@ -4981,10 +6383,13 @@
                 </a:tc>
                 <a:tc>
                   <a:txBody>
-                    <a:bodyPr/>
+                    <a:bodyPr wrap="square"/>
                     <a:lstStyle/>
                     <a:p>
                       <a:pPr>
+                        <a:spcAft>
+                          <a:spcPts val="100"/>
+                        </a:spcAft>
                         <a:defRPr sz="1000">
                           <a:solidFill>
                             <a:srgbClr val="323130"/>
@@ -4993,11 +6398,11 @@
                         </a:defRPr>
                       </a:pPr>
                       <a:r>
-                        <a:t>Batch-size limits, spill estimation errors, Spark 4.x readiness gaps</a:t>
+                        <a:t>Batch-size limits, spill estimation errors, Spark 4.x readiness</a:t>
                       </a:r>
                     </a:p>
                   </a:txBody>
-                  <a:tcPr>
+                  <a:tcPr marL="101600" marR="101600" marT="50800" marB="50800">
                     <a:solidFill>
                       <a:srgbClr val="FFFFFF"/>
                     </a:solidFill>
@@ -5005,10 +6410,13 @@
                 </a:tc>
                 <a:tc>
                   <a:txBody>
-                    <a:bodyPr/>
+                    <a:bodyPr wrap="square"/>
                     <a:lstStyle/>
                     <a:p>
                       <a:pPr>
+                        <a:spcAft>
+                          <a:spcPts val="100"/>
+                        </a:spcAft>
                         <a:defRPr sz="1000">
                           <a:solidFill>
                             <a:srgbClr val="323130"/>
@@ -5022,6 +6430,9 @@
                     </a:p>
                     <a:p>
                       <a:pPr>
+                        <a:spcAft>
+                          <a:spcPts val="100"/>
+                        </a:spcAft>
                         <a:defRPr sz="1000">
                           <a:solidFill>
                             <a:srgbClr val="323130"/>
@@ -5035,6 +6446,9 @@
                     </a:p>
                     <a:p>
                       <a:pPr>
+                        <a:spcAft>
+                          <a:spcPts val="100"/>
+                        </a:spcAft>
                         <a:defRPr sz="1000">
                           <a:solidFill>
                             <a:srgbClr val="323130"/>
@@ -5043,24 +6457,27 @@
                         </a:defRPr>
                       </a:pPr>
                       <a:r>
-                        <a:t>Gluten: Spark 4.x — 8 test suites enabled #11816</a:t>
+                        <a:t>Gluten: Spark 4.x - 8 test suites enabled #11816</a:t>
                       </a:r>
                     </a:p>
                   </a:txBody>
-                  <a:tcPr>
+                  <a:tcPr marL="101600" marR="101600" marT="50800" marB="50800">
                     <a:solidFill>
                       <a:srgbClr val="FFFFFF"/>
                     </a:solidFill>
                   </a:tcPr>
                 </a:tc>
               </a:tr>
-              <a:tr h="365760">
+              <a:tr h="384048">
                 <a:tc>
                   <a:txBody>
-                    <a:bodyPr/>
+                    <a:bodyPr wrap="square"/>
                     <a:lstStyle/>
                     <a:p>
                       <a:pPr>
+                        <a:spcAft>
+                          <a:spcPts val="100"/>
+                        </a:spcAft>
                         <a:defRPr sz="1000">
                           <a:solidFill>
                             <a:srgbClr val="323130"/>
@@ -5069,11 +6486,11 @@
                         </a:defRPr>
                       </a:pPr>
                       <a:r>
-                        <a:t>📊 Observability</a:t>
+                        <a:t>Observability</a:t>
                       </a:r>
                     </a:p>
                   </a:txBody>
-                  <a:tcPr>
+                  <a:tcPr marL="101600" marR="101600" marT="50800" marB="50800">
                     <a:solidFill>
                       <a:srgbClr val="FAF9F8"/>
                     </a:solidFill>
@@ -5081,10 +6498,13 @@
                 </a:tc>
                 <a:tc>
                   <a:txBody>
-                    <a:bodyPr/>
+                    <a:bodyPr wrap="square"/>
                     <a:lstStyle/>
                     <a:p>
                       <a:pPr>
+                        <a:spcAft>
+                          <a:spcPts val="100"/>
+                        </a:spcAft>
                         <a:defRPr sz="1000">
                           <a:solidFill>
                             <a:srgbClr val="323130"/>
@@ -5097,7 +6517,7 @@
                       </a:r>
                     </a:p>
                   </a:txBody>
-                  <a:tcPr>
+                  <a:tcPr marL="101600" marR="101600" marT="50800" marB="50800">
                     <a:solidFill>
                       <a:srgbClr val="FAF9F8"/>
                     </a:solidFill>
@@ -5105,10 +6525,13 @@
                 </a:tc>
                 <a:tc>
                   <a:txBody>
-                    <a:bodyPr/>
+                    <a:bodyPr wrap="square"/>
                     <a:lstStyle/>
                     <a:p>
                       <a:pPr>
+                        <a:spcAft>
+                          <a:spcPts val="100"/>
+                        </a:spcAft>
                         <a:defRPr sz="1000">
                           <a:solidFill>
                             <a:srgbClr val="323130"/>
@@ -5122,6 +6545,9 @@
                     </a:p>
                     <a:p>
                       <a:pPr>
+                        <a:spcAft>
+                          <a:spcPts val="100"/>
+                        </a:spcAft>
                         <a:defRPr sz="1000">
                           <a:solidFill>
                             <a:srgbClr val="323130"/>
@@ -5134,20 +6560,23 @@
                       </a:r>
                     </a:p>
                   </a:txBody>
-                  <a:tcPr>
+                  <a:tcPr marL="101600" marR="101600" marT="50800" marB="50800">
                     <a:solidFill>
                       <a:srgbClr val="FAF9F8"/>
                     </a:solidFill>
                   </a:tcPr>
                 </a:tc>
               </a:tr>
-              <a:tr h="365760">
+              <a:tr h="384048">
                 <a:tc>
                   <a:txBody>
-                    <a:bodyPr/>
+                    <a:bodyPr wrap="square"/>
                     <a:lstStyle/>
                     <a:p>
                       <a:pPr>
+                        <a:spcAft>
+                          <a:spcPts val="100"/>
+                        </a:spcAft>
                         <a:defRPr sz="1000">
                           <a:solidFill>
                             <a:srgbClr val="323130"/>
@@ -5156,11 +6585,11 @@
                         </a:defRPr>
                       </a:pPr>
                       <a:r>
-                        <a:t>🎓 TLP Graduation</a:t>
+                        <a:t>TLP Graduation</a:t>
                       </a:r>
                     </a:p>
                   </a:txBody>
-                  <a:tcPr>
+                  <a:tcPr marL="101600" marR="101600" marT="50800" marB="50800">
                     <a:solidFill>
                       <a:srgbClr val="FFFFFF"/>
                     </a:solidFill>
@@ -5168,10 +6597,13 @@
                 </a:tc>
                 <a:tc>
                   <a:txBody>
-                    <a:bodyPr/>
+                    <a:bodyPr wrap="square"/>
                     <a:lstStyle/>
                     <a:p>
                       <a:pPr>
+                        <a:spcAft>
+                          <a:spcPts val="100"/>
+                        </a:spcAft>
                         <a:defRPr sz="1000">
                           <a:solidFill>
                             <a:srgbClr val="323130"/>
@@ -5184,7 +6616,7 @@
                       </a:r>
                     </a:p>
                   </a:txBody>
-                  <a:tcPr>
+                  <a:tcPr marL="101600" marR="101600" marT="50800" marB="50800">
                     <a:solidFill>
                       <a:srgbClr val="FFFFFF"/>
                     </a:solidFill>
@@ -5192,10 +6624,13 @@
                 </a:tc>
                 <a:tc>
                   <a:txBody>
-                    <a:bodyPr/>
+                    <a:bodyPr wrap="square"/>
                     <a:lstStyle/>
                     <a:p>
                       <a:pPr>
+                        <a:spcAft>
+                          <a:spcPts val="100"/>
+                        </a:spcAft>
                         <a:defRPr sz="1000">
                           <a:solidFill>
                             <a:srgbClr val="323130"/>
@@ -5204,24 +6639,27 @@
                         </a:defRPr>
                       </a:pPr>
                       <a:r>
-                        <a:t>Gluten: removed incubating refs, CI/release updates #11737–#11742</a:t>
+                        <a:t>Gluten: removed incubating refs, CI/release updates #11737-#11742</a:t>
                       </a:r>
                     </a:p>
                   </a:txBody>
-                  <a:tcPr>
+                  <a:tcPr marL="101600" marR="101600" marT="50800" marB="50800">
                     <a:solidFill>
                       <a:srgbClr val="FFFFFF"/>
                     </a:solidFill>
                   </a:tcPr>
                 </a:tc>
               </a:tr>
-              <a:tr h="365760">
+              <a:tr h="384048">
                 <a:tc>
                   <a:txBody>
-                    <a:bodyPr/>
+                    <a:bodyPr wrap="square"/>
                     <a:lstStyle/>
                     <a:p>
                       <a:pPr>
+                        <a:spcAft>
+                          <a:spcPts val="100"/>
+                        </a:spcAft>
                         <a:defRPr sz="1000">
                           <a:solidFill>
                             <a:srgbClr val="323130"/>
@@ -5231,7 +6669,7 @@
                       </a:pPr>
                     </a:p>
                   </a:txBody>
-                  <a:tcPr>
+                  <a:tcPr marL="101600" marR="101600" marT="50800" marB="50800">
                     <a:solidFill>
                       <a:srgbClr val="FAF9F8"/>
                     </a:solidFill>
@@ -5239,10 +6677,13 @@
                 </a:tc>
                 <a:tc>
                   <a:txBody>
-                    <a:bodyPr/>
+                    <a:bodyPr wrap="square"/>
                     <a:lstStyle/>
                     <a:p>
                       <a:pPr>
+                        <a:spcAft>
+                          <a:spcPts val="100"/>
+                        </a:spcAft>
                         <a:defRPr sz="1000">
                           <a:solidFill>
                             <a:srgbClr val="323130"/>
@@ -5252,7 +6693,7 @@
                       </a:pPr>
                     </a:p>
                   </a:txBody>
-                  <a:tcPr>
+                  <a:tcPr marL="101600" marR="101600" marT="50800" marB="50800">
                     <a:solidFill>
                       <a:srgbClr val="FAF9F8"/>
                     </a:solidFill>
@@ -5260,10 +6701,13 @@
                 </a:tc>
                 <a:tc>
                   <a:txBody>
-                    <a:bodyPr/>
+                    <a:bodyPr wrap="square"/>
                     <a:lstStyle/>
                     <a:p>
                       <a:pPr>
+                        <a:spcAft>
+                          <a:spcPts val="100"/>
+                        </a:spcAft>
                         <a:defRPr sz="1000">
                           <a:solidFill>
                             <a:srgbClr val="323130"/>
@@ -5273,7 +6717,7 @@
                       </a:pPr>
                     </a:p>
                   </a:txBody>
-                  <a:tcPr>
+                  <a:tcPr marL="101600" marR="101600" marT="50800" marB="50800">
                     <a:solidFill>
                       <a:srgbClr val="FAF9F8"/>
                     </a:solidFill>
@@ -5306,15 +6750,16 @@
           </a:bodyPr>
           <a:lstStyle/>
           <a:p>
-            <a:pPr algn="l">
+            <a:pPr>
               <a:defRPr sz="900">
                 <a:solidFill>
                   <a:srgbClr val="605E5C"/>
                 </a:solidFill>
+                <a:latin typeface="Segoe UI"/>
               </a:defRPr>
             </a:pPr>
             <a:r>
-              <a:t>VeloxCon 2026  •  April 30  •  Meta HQ, Menlo Park</a:t>
+              <a:t>VeloxCon 2026  |  April 30  |  Meta HQ, Menlo Park</a:t>
             </a:r>
           </a:p>
         </p:txBody>
@@ -5346,6 +6791,7 @@
                 <a:solidFill>
                   <a:srgbClr val="605E5C"/>
                 </a:solidFill>
+                <a:latin typeface="Segoe UI"/>
               </a:defRPr>
             </a:pPr>
             <a:r>
@@ -5446,6 +6892,9 @@
           <a:lstStyle/>
           <a:p>
             <a:pPr algn="l">
+              <a:spcAft>
+                <a:spcPts val="200"/>
+              </a:spcAft>
               <a:defRPr sz="4800" b="1">
                 <a:solidFill>
                   <a:srgbClr val="FFFFFF"/>
@@ -5482,6 +6931,9 @@
           <a:lstStyle/>
           <a:p>
             <a:pPr algn="l">
+              <a:spcAft>
+                <a:spcPts val="200"/>
+              </a:spcAft>
               <a:defRPr sz="3600" b="1">
                 <a:solidFill>
                   <a:srgbClr val="FFFFFF"/>
@@ -5518,6 +6970,9 @@
           <a:lstStyle/>
           <a:p>
             <a:pPr algn="l">
+              <a:spcAft>
+                <a:spcPts val="200"/>
+              </a:spcAft>
               <a:defRPr sz="1800" b="0">
                 <a:solidFill>
                   <a:srgbClr val="B4D6FA"/>
@@ -5526,7 +6981,7 @@
               </a:defRPr>
             </a:pPr>
             <a:r>
-              <a:t>Product evidence from Microsoft's Spark runtime</a:t>
+              <a:t>Productionizing Gluten + Velox in Microsoft Fabric</a:t>
             </a:r>
           </a:p>
         </p:txBody>
@@ -5558,6 +7013,7 @@
                 <a:solidFill>
                   <a:srgbClr val="B4D6FA"/>
                 </a:solidFill>
+                <a:latin typeface="Segoe UI"/>
               </a:defRPr>
             </a:pPr>
             <a:r>
@@ -5607,6 +7063,9 @@
           <a:lstStyle/>
           <a:p>
             <a:pPr algn="l">
+              <a:spcAft>
+                <a:spcPts val="200"/>
+              </a:spcAft>
               <a:defRPr sz="3200" b="1">
                 <a:solidFill>
                   <a:srgbClr val="323130"/>
@@ -5615,7 +7074,7 @@
               </a:defRPr>
             </a:pPr>
             <a:r>
-              <a:t>NEE: Gluten + Velox, Productionized</a:t>
+              <a:t>Productionizing Gluten + Velox in Microsoft Fabric</a:t>
             </a:r>
           </a:p>
         </p:txBody>
@@ -5729,6 +7188,9 @@
           <a:lstStyle/>
           <a:p>
             <a:pPr algn="ctr">
+              <a:spcAft>
+                <a:spcPts val="200"/>
+              </a:spcAft>
               <a:defRPr sz="1300" b="1">
                 <a:solidFill>
                   <a:srgbClr val="FFFFFF"/>
@@ -5741,7 +7203,7 @@
             </a:r>
             <a:br/>
             <a:r>
-              <a:t>Spark 3.5  •  Delta Lake 3.2</a:t>
+              <a:t>Spark 3.5  |  Delta Lake 3.2</a:t>
             </a:r>
           </a:p>
         </p:txBody>
@@ -5769,6 +7231,9 @@
           <a:lstStyle/>
           <a:p>
             <a:pPr algn="ctr">
+              <a:spcAft>
+                <a:spcPts val="200"/>
+              </a:spcAft>
               <a:defRPr sz="1400" b="0">
                 <a:solidFill>
                   <a:srgbClr val="0078D4"/>
@@ -5848,6 +7313,9 @@
           <a:lstStyle/>
           <a:p>
             <a:pPr algn="ctr">
+              <a:spcAft>
+                <a:spcPts val="200"/>
+              </a:spcAft>
               <a:defRPr sz="1300" b="1">
                 <a:solidFill>
                   <a:srgbClr val="FFFFFF"/>
@@ -5884,6 +7352,9 @@
           <a:lstStyle/>
           <a:p>
             <a:pPr algn="ctr">
+              <a:spcAft>
+                <a:spcPts val="200"/>
+              </a:spcAft>
               <a:defRPr sz="1400" b="0">
                 <a:solidFill>
                   <a:srgbClr val="0078D4"/>
@@ -5963,6 +7434,9 @@
           <a:lstStyle/>
           <a:p>
             <a:pPr algn="ctr">
+              <a:spcAft>
+                <a:spcPts val="200"/>
+              </a:spcAft>
               <a:defRPr sz="1300" b="1">
                 <a:solidFill>
                   <a:srgbClr val="FFFFFF"/>
@@ -6042,6 +7516,9 @@
           <a:lstStyle/>
           <a:p>
             <a:pPr algn="ctr">
+              <a:spcAft>
+                <a:spcPts val="200"/>
+              </a:spcAft>
               <a:defRPr sz="1200" b="1">
                 <a:solidFill>
                   <a:srgbClr val="0078D4"/>
@@ -6078,6 +7555,9 @@
           <a:lstStyle/>
           <a:p>
             <a:pPr algn="ctr">
+              <a:spcAft>
+                <a:spcPts val="200"/>
+              </a:spcAft>
               <a:defRPr sz="1000" b="0">
                 <a:solidFill>
                   <a:srgbClr val="605E5C"/>
@@ -6086,7 +7566,7 @@
               </a:defRPr>
             </a:pPr>
             <a:r>
-              <a:t>Best-fit: heavy joins/aggregations, ETL, interactive notebooks, Delta snapshot loading</a:t>
+              <a:t>Optimal for: complex joins/aggregations, high-volume ETL, interactive exploration, Delta-heavy workloads</a:t>
             </a:r>
           </a:p>
         </p:txBody>
@@ -6159,6 +7639,9 @@
           <a:lstStyle/>
           <a:p>
             <a:pPr algn="ctr">
+              <a:spcAft>
+                <a:spcPts val="200"/>
+              </a:spcAft>
               <a:defRPr sz="2800" b="1">
                 <a:solidFill>
                   <a:srgbClr val="0078D4"/>
@@ -6195,6 +7678,9 @@
           <a:lstStyle/>
           <a:p>
             <a:pPr algn="ctr">
+              <a:spcAft>
+                <a:spcPts val="200"/>
+              </a:spcAft>
               <a:defRPr sz="1000" b="0">
                 <a:solidFill>
                   <a:srgbClr val="323130"/>
@@ -6235,6 +7721,9 @@
           <a:lstStyle/>
           <a:p>
             <a:pPr algn="ctr">
+              <a:spcAft>
+                <a:spcPts val="200"/>
+              </a:spcAft>
               <a:defRPr sz="800" b="0">
                 <a:solidFill>
                   <a:srgbClr val="605E5C"/>
@@ -6316,6 +7805,9 @@
           <a:lstStyle/>
           <a:p>
             <a:pPr algn="ctr">
+              <a:spcAft>
+                <a:spcPts val="200"/>
+              </a:spcAft>
               <a:defRPr sz="2800" b="1">
                 <a:solidFill>
                   <a:srgbClr val="107C10"/>
@@ -6352,6 +7844,9 @@
           <a:lstStyle/>
           <a:p>
             <a:pPr algn="ctr">
+              <a:spcAft>
+                <a:spcPts val="200"/>
+              </a:spcAft>
               <a:defRPr sz="1000" b="0">
                 <a:solidFill>
                   <a:srgbClr val="323130"/>
@@ -6364,7 +7859,7 @@
             </a:r>
             <a:br/>
             <a:r>
-              <a:t>(query-specific)</a:t>
+              <a:t>(query-specific, ETL)</a:t>
             </a:r>
           </a:p>
         </p:txBody>
@@ -6392,6 +7887,9 @@
           <a:lstStyle/>
           <a:p>
             <a:pPr algn="ctr">
+              <a:spcAft>
+                <a:spcPts val="200"/>
+              </a:spcAft>
               <a:defRPr sz="800" b="0">
                 <a:solidFill>
                   <a:srgbClr val="605E5C"/>
@@ -6473,6 +7971,9 @@
           <a:lstStyle/>
           <a:p>
             <a:pPr algn="ctr">
+              <a:spcAft>
+                <a:spcPts val="200"/>
+              </a:spcAft>
               <a:defRPr sz="2800" b="1">
                 <a:solidFill>
                   <a:srgbClr val="886CE4"/>
@@ -6509,6 +8010,9 @@
           <a:lstStyle/>
           <a:p>
             <a:pPr algn="ctr">
+              <a:spcAft>
+                <a:spcPts val="200"/>
+              </a:spcAft>
               <a:defRPr sz="1000" b="0">
                 <a:solidFill>
                   <a:srgbClr val="323130"/>
@@ -6517,11 +8021,11 @@
               </a:defRPr>
             </a:pPr>
             <a:r>
-              <a:t>Cost Savings</a:t>
+              <a:t>Runtime Reduction</a:t>
             </a:r>
             <a:br/>
             <a:r>
-              <a:t>(runtime reduction)</a:t>
+              <a:t>(cost savings)</a:t>
             </a:r>
           </a:p>
         </p:txBody>
@@ -6549,6 +8053,9 @@
           <a:lstStyle/>
           <a:p>
             <a:pPr algn="ctr">
+              <a:spcAft>
+                <a:spcPts val="200"/>
+              </a:spcAft>
               <a:defRPr sz="800" b="0">
                 <a:solidFill>
                   <a:srgbClr val="605E5C"/>
@@ -6630,6 +8137,9 @@
           <a:lstStyle/>
           <a:p>
             <a:pPr algn="ctr">
+              <a:spcAft>
+                <a:spcPts val="200"/>
+              </a:spcAft>
               <a:defRPr sz="2800" b="1">
                 <a:solidFill>
                   <a:srgbClr val="FF8C00"/>
@@ -6666,6 +8176,9 @@
           <a:lstStyle/>
           <a:p>
             <a:pPr algn="ctr">
+              <a:spcAft>
+                <a:spcPts val="200"/>
+              </a:spcAft>
               <a:defRPr sz="1000" b="0">
                 <a:solidFill>
                   <a:srgbClr val="323130"/>
@@ -6675,6 +8188,10 @@
             </a:pPr>
             <a:r>
               <a:t>In Fabric Runtime</a:t>
+            </a:r>
+            <a:br/>
+            <a:r>
+              <a:t>(no extra cost)</a:t>
             </a:r>
           </a:p>
         </p:txBody>
@@ -6702,6 +8219,9 @@
           <a:lstStyle/>
           <a:p>
             <a:pPr algn="ctr">
+              <a:spcAft>
+                <a:spcPts val="200"/>
+              </a:spcAft>
               <a:defRPr sz="800" b="0">
                 <a:solidFill>
                   <a:srgbClr val="605E5C"/>
@@ -6718,6 +8238,45 @@
       <p:sp>
         <p:nvSpPr>
           <p:cNvPr id="31" name="TextBox 30"/>
+          <p:cNvSpPr txBox="1"/>
+          <p:nvPr/>
+        </p:nvSpPr>
+        <p:spPr>
+          <a:xfrm>
+            <a:off x="6217920" y="4937760"/>
+            <a:ext cx="5212080" cy="274320"/>
+          </a:xfrm>
+          <a:prstGeom prst="rect">
+            <a:avLst/>
+          </a:prstGeom>
+          <a:noFill/>
+        </p:spPr>
+        <p:txBody>
+          <a:bodyPr wrap="square">
+            <a:spAutoFit/>
+          </a:bodyPr>
+          <a:lstStyle/>
+          <a:p>
+            <a:pPr algn="ctr">
+              <a:spcAft>
+                <a:spcPts val="200"/>
+              </a:spcAft>
+              <a:defRPr sz="900" b="0">
+                <a:solidFill>
+                  <a:srgbClr val="605E5C"/>
+                </a:solidFill>
+                <a:latin typeface="Segoe UI"/>
+              </a:defRPr>
+            </a:pPr>
+            <a:r>
+              <a:t>TPC-DS: synthetic benchmark on homogeneous data. Production results vary by workload.</a:t>
+            </a:r>
+          </a:p>
+        </p:txBody>
+      </p:sp>
+      <p:sp>
+        <p:nvSpPr>
+          <p:cNvPr id="32" name="TextBox 31"/>
           <p:cNvSpPr txBox="1"/>
           <p:nvPr/>
         </p:nvSpPr>
@@ -6737,22 +8296,23 @@
           </a:bodyPr>
           <a:lstStyle/>
           <a:p>
-            <a:pPr algn="l">
+            <a:pPr>
               <a:defRPr sz="900">
                 <a:solidFill>
                   <a:srgbClr val="605E5C"/>
                 </a:solidFill>
+                <a:latin typeface="Segoe UI"/>
               </a:defRPr>
             </a:pPr>
             <a:r>
-              <a:t>VeloxCon 2026  •  April 30  •  Meta HQ, Menlo Park</a:t>
-            </a:r>
-          </a:p>
-        </p:txBody>
-      </p:sp>
-      <p:sp>
-        <p:nvSpPr>
-          <p:cNvPr id="32" name="TextBox 31"/>
+              <a:t>VeloxCon 2026  |  April 30  |  Meta HQ, Menlo Park</a:t>
+            </a:r>
+          </a:p>
+        </p:txBody>
+      </p:sp>
+      <p:sp>
+        <p:nvSpPr>
+          <p:cNvPr id="33" name="TextBox 32"/>
           <p:cNvSpPr txBox="1"/>
           <p:nvPr/>
         </p:nvSpPr>
@@ -6777,6 +8337,7 @@
                 <a:solidFill>
                   <a:srgbClr val="605E5C"/>
                 </a:solidFill>
+                <a:latin typeface="Segoe UI"/>
               </a:defRPr>
             </a:pPr>
             <a:r>
@@ -6826,6 +8387,9 @@
           <a:lstStyle/>
           <a:p>
             <a:pPr algn="l">
+              <a:spcAft>
+                <a:spcPts val="200"/>
+              </a:spcAft>
               <a:defRPr sz="3200" b="1">
                 <a:solidFill>
                   <a:srgbClr val="323130"/>
@@ -6834,7 +8398,7 @@
               </a:defRPr>
             </a:pPr>
             <a:r>
-              <a:t>Fabric-Specific Extensions on Top of OSS Gluten</a:t>
+              <a:t>Fabric Extensions Built on Open-Source Gluten</a:t>
             </a:r>
           </a:p>
         </p:txBody>
@@ -6892,7 +8456,7 @@
         </p:nvGraphicFramePr>
         <p:xfrm>
           <a:off x="731520" y="1097280"/>
-          <a:ext cx="10698480" cy="2926080"/>
+          <a:ext cx="10698480" cy="3072384"/>
         </p:xfrm>
         <a:graphic>
           <a:graphicData uri="http://schemas.openxmlformats.org/drawingml/2006/table">
@@ -6901,17 +8465,20 @@
                 <a:tableStyleId>{5C22544A-7EE6-4342-B048-85BDC9FD1C3A}</a:tableStyleId>
               </a:tblPr>
               <a:tblGrid>
-                <a:gridCol w="1828800"/>
+                <a:gridCol w="1645920"/>
                 <a:gridCol w="2286000"/>
-                <a:gridCol w="6583680"/>
+                <a:gridCol w="6766560"/>
               </a:tblGrid>
-              <a:tr h="365760">
+              <a:tr h="384048">
                 <a:tc>
                   <a:txBody>
-                    <a:bodyPr/>
+                    <a:bodyPr wrap="square"/>
                     <a:lstStyle/>
                     <a:p>
                       <a:pPr>
+                        <a:spcAft>
+                          <a:spcPts val="100"/>
+                        </a:spcAft>
                         <a:defRPr sz="1000" b="1">
                           <a:solidFill>
                             <a:srgbClr val="FFFFFF"/>
@@ -6924,7 +8491,7 @@
                       </a:r>
                     </a:p>
                   </a:txBody>
-                  <a:tcPr>
+                  <a:tcPr marL="101600" marR="101600" marT="50800" marB="50800">
                     <a:solidFill>
                       <a:srgbClr val="0078D4"/>
                     </a:solidFill>
@@ -6932,10 +8499,13 @@
                 </a:tc>
                 <a:tc>
                   <a:txBody>
-                    <a:bodyPr/>
+                    <a:bodyPr wrap="square"/>
                     <a:lstStyle/>
                     <a:p>
                       <a:pPr>
+                        <a:spcAft>
+                          <a:spcPts val="100"/>
+                        </a:spcAft>
                         <a:defRPr sz="1000" b="1">
                           <a:solidFill>
                             <a:srgbClr val="FFFFFF"/>
@@ -6948,7 +8518,7 @@
                       </a:r>
                     </a:p>
                   </a:txBody>
-                  <a:tcPr>
+                  <a:tcPr marL="101600" marR="101600" marT="50800" marB="50800">
                     <a:solidFill>
                       <a:srgbClr val="0078D4"/>
                     </a:solidFill>
@@ -6956,10 +8526,13 @@
                 </a:tc>
                 <a:tc>
                   <a:txBody>
-                    <a:bodyPr/>
+                    <a:bodyPr wrap="square"/>
                     <a:lstStyle/>
                     <a:p>
                       <a:pPr>
+                        <a:spcAft>
+                          <a:spcPts val="100"/>
+                        </a:spcAft>
                         <a:defRPr sz="1000" b="1">
                           <a:solidFill>
                             <a:srgbClr val="FFFFFF"/>
@@ -6972,20 +8545,23 @@
                       </a:r>
                     </a:p>
                   </a:txBody>
-                  <a:tcPr>
+                  <a:tcPr marL="101600" marR="101600" marT="50800" marB="50800">
                     <a:solidFill>
                       <a:srgbClr val="0078D4"/>
                     </a:solidFill>
                   </a:tcPr>
                 </a:tc>
               </a:tr>
-              <a:tr h="365760">
+              <a:tr h="384048">
                 <a:tc>
                   <a:txBody>
-                    <a:bodyPr/>
+                    <a:bodyPr wrap="square"/>
                     <a:lstStyle/>
                     <a:p>
                       <a:pPr>
+                        <a:spcAft>
+                          <a:spcPts val="100"/>
+                        </a:spcAft>
                         <a:defRPr sz="1000">
                           <a:solidFill>
                             <a:srgbClr val="323130"/>
@@ -6994,11 +8570,11 @@
                         </a:defRPr>
                       </a:pPr>
                       <a:r>
-                        <a:t>🔐 Security</a:t>
+                        <a:t>Security</a:t>
                       </a:r>
                     </a:p>
                   </a:txBody>
-                  <a:tcPr>
+                  <a:tcPr marL="101600" marR="101600" marT="50800" marB="50800">
                     <a:solidFill>
                       <a:srgbClr val="FFFFFF"/>
                     </a:solidFill>
@@ -7006,10 +8582,13 @@
                 </a:tc>
                 <a:tc>
                   <a:txBody>
-                    <a:bodyPr/>
+                    <a:bodyPr wrap="square"/>
                     <a:lstStyle/>
                     <a:p>
                       <a:pPr>
+                        <a:spcAft>
+                          <a:spcPts val="100"/>
+                        </a:spcAft>
                         <a:defRPr sz="1000">
                           <a:solidFill>
                             <a:srgbClr val="323130"/>
@@ -7022,7 +8601,7 @@
                       </a:r>
                     </a:p>
                   </a:txBody>
-                  <a:tcPr>
+                  <a:tcPr marL="101600" marR="101600" marT="50800" marB="50800">
                     <a:solidFill>
                       <a:srgbClr val="FFFFFF"/>
                     </a:solidFill>
@@ -7030,10 +8609,13 @@
                 </a:tc>
                 <a:tc>
                   <a:txBody>
-                    <a:bodyPr/>
+                    <a:bodyPr wrap="square"/>
                     <a:lstStyle/>
                     <a:p>
                       <a:pPr>
+                        <a:spcAft>
+                          <a:spcPts val="100"/>
+                        </a:spcAft>
                         <a:defRPr sz="1000">
                           <a:solidFill>
                             <a:srgbClr val="323130"/>
@@ -7046,20 +8628,23 @@
                       </a:r>
                     </a:p>
                   </a:txBody>
-                  <a:tcPr>
+                  <a:tcPr marL="101600" marR="101600" marT="50800" marB="50800">
                     <a:solidFill>
                       <a:srgbClr val="FFFFFF"/>
                     </a:solidFill>
                   </a:tcPr>
                 </a:tc>
               </a:tr>
-              <a:tr h="365760">
+              <a:tr h="384048">
                 <a:tc>
                   <a:txBody>
-                    <a:bodyPr/>
+                    <a:bodyPr wrap="square"/>
                     <a:lstStyle/>
                     <a:p>
                       <a:pPr>
+                        <a:spcAft>
+                          <a:spcPts val="100"/>
+                        </a:spcAft>
                         <a:defRPr sz="1000">
                           <a:solidFill>
                             <a:srgbClr val="323130"/>
@@ -7068,11 +8653,11 @@
                         </a:defRPr>
                       </a:pPr>
                       <a:r>
-                        <a:t>🔐 Security</a:t>
+                        <a:t>Security</a:t>
                       </a:r>
                     </a:p>
                   </a:txBody>
-                  <a:tcPr>
+                  <a:tcPr marL="101600" marR="101600" marT="50800" marB="50800">
                     <a:solidFill>
                       <a:srgbClr val="FAF9F8"/>
                     </a:solidFill>
@@ -7080,10 +8665,13 @@
                 </a:tc>
                 <a:tc>
                   <a:txBody>
-                    <a:bodyPr/>
+                    <a:bodyPr wrap="square"/>
                     <a:lstStyle/>
                     <a:p>
                       <a:pPr>
+                        <a:spcAft>
+                          <a:spcPts val="100"/>
+                        </a:spcAft>
                         <a:defRPr sz="1000">
                           <a:solidFill>
                             <a:srgbClr val="323130"/>
@@ -7096,7 +8684,7 @@
                       </a:r>
                     </a:p>
                   </a:txBody>
-                  <a:tcPr>
+                  <a:tcPr marL="101600" marR="101600" marT="50800" marB="50800">
                     <a:solidFill>
                       <a:srgbClr val="FAF9F8"/>
                     </a:solidFill>
@@ -7104,10 +8692,13 @@
                 </a:tc>
                 <a:tc>
                   <a:txBody>
-                    <a:bodyPr/>
+                    <a:bodyPr wrap="square"/>
                     <a:lstStyle/>
                     <a:p>
                       <a:pPr>
+                        <a:spcAft>
+                          <a:spcPts val="100"/>
+                        </a:spcAft>
                         <a:defRPr sz="1000">
                           <a:solidFill>
                             <a:srgbClr val="323130"/>
@@ -7120,20 +8711,23 @@
                       </a:r>
                     </a:p>
                   </a:txBody>
-                  <a:tcPr>
+                  <a:tcPr marL="101600" marR="101600" marT="50800" marB="50800">
                     <a:solidFill>
                       <a:srgbClr val="FAF9F8"/>
                     </a:solidFill>
                   </a:tcPr>
                 </a:tc>
               </a:tr>
-              <a:tr h="365760">
+              <a:tr h="384048">
                 <a:tc>
                   <a:txBody>
-                    <a:bodyPr/>
+                    <a:bodyPr wrap="square"/>
                     <a:lstStyle/>
                     <a:p>
                       <a:pPr>
+                        <a:spcAft>
+                          <a:spcPts val="100"/>
+                        </a:spcAft>
                         <a:defRPr sz="1000">
                           <a:solidFill>
                             <a:srgbClr val="323130"/>
@@ -7142,11 +8736,11 @@
                         </a:defRPr>
                       </a:pPr>
                       <a:r>
-                        <a:t>🐍 UDF Support</a:t>
+                        <a:t>UDF Support</a:t>
                       </a:r>
                     </a:p>
                   </a:txBody>
-                  <a:tcPr>
+                  <a:tcPr marL="101600" marR="101600" marT="50800" marB="50800">
                     <a:solidFill>
                       <a:srgbClr val="FFFFFF"/>
                     </a:solidFill>
@@ -7154,10 +8748,13 @@
                 </a:tc>
                 <a:tc>
                   <a:txBody>
-                    <a:bodyPr/>
+                    <a:bodyPr wrap="square"/>
                     <a:lstStyle/>
                     <a:p>
                       <a:pPr>
+                        <a:spcAft>
+                          <a:spcPts val="100"/>
+                        </a:spcAft>
                         <a:defRPr sz="1000">
                           <a:solidFill>
                             <a:srgbClr val="323130"/>
@@ -7170,7 +8767,7 @@
                       </a:r>
                     </a:p>
                   </a:txBody>
-                  <a:tcPr>
+                  <a:tcPr marL="101600" marR="101600" marT="50800" marB="50800">
                     <a:solidFill>
                       <a:srgbClr val="FFFFFF"/>
                     </a:solidFill>
@@ -7178,10 +8775,13 @@
                 </a:tc>
                 <a:tc>
                   <a:txBody>
-                    <a:bodyPr/>
+                    <a:bodyPr wrap="square"/>
                     <a:lstStyle/>
                     <a:p>
                       <a:pPr>
+                        <a:spcAft>
+                          <a:spcPts val="100"/>
+                        </a:spcAft>
                         <a:defRPr sz="1000">
                           <a:solidFill>
                             <a:srgbClr val="323130"/>
@@ -7190,24 +8790,27 @@
                         </a:defRPr>
                       </a:pPr>
                       <a:r>
-                        <a:t>Arrow-based columnar transfer via ArrowEvalPython — data stays columnar across JVM↔Python, avoiding Row serialization</a:t>
+                        <a:t>Arrow-based columnar transfer via ArrowEvalPython — data stays columnar across JVM-Python, avoiding Row serialization</a:t>
                       </a:r>
                     </a:p>
                   </a:txBody>
-                  <a:tcPr>
+                  <a:tcPr marL="101600" marR="101600" marT="50800" marB="50800">
                     <a:solidFill>
                       <a:srgbClr val="FFFFFF"/>
                     </a:solidFill>
                   </a:tcPr>
                 </a:tc>
               </a:tr>
-              <a:tr h="365760">
+              <a:tr h="384048">
                 <a:tc>
                   <a:txBody>
-                    <a:bodyPr/>
+                    <a:bodyPr wrap="square"/>
                     <a:lstStyle/>
                     <a:p>
                       <a:pPr>
+                        <a:spcAft>
+                          <a:spcPts val="100"/>
+                        </a:spcAft>
                         <a:defRPr sz="1000">
                           <a:solidFill>
                             <a:srgbClr val="323130"/>
@@ -7216,11 +8819,11 @@
                         </a:defRPr>
                       </a:pPr>
                       <a:r>
-                        <a:t>🐍 UDF Support</a:t>
+                        <a:t>UDF Support</a:t>
                       </a:r>
                     </a:p>
                   </a:txBody>
-                  <a:tcPr>
+                  <a:tcPr marL="101600" marR="101600" marT="50800" marB="50800">
                     <a:solidFill>
                       <a:srgbClr val="FAF9F8"/>
                     </a:solidFill>
@@ -7228,10 +8831,13 @@
                 </a:tc>
                 <a:tc>
                   <a:txBody>
-                    <a:bodyPr/>
+                    <a:bodyPr wrap="square"/>
                     <a:lstStyle/>
                     <a:p>
                       <a:pPr>
+                        <a:spcAft>
+                          <a:spcPts val="100"/>
+                        </a:spcAft>
                         <a:defRPr sz="1000">
                           <a:solidFill>
                             <a:srgbClr val="323130"/>
@@ -7244,7 +8850,7 @@
                       </a:r>
                     </a:p>
                   </a:txBody>
-                  <a:tcPr>
+                  <a:tcPr marL="101600" marR="101600" marT="50800" marB="50800">
                     <a:solidFill>
                       <a:srgbClr val="FAF9F8"/>
                     </a:solidFill>
@@ -7252,10 +8858,13 @@
                 </a:tc>
                 <a:tc>
                   <a:txBody>
-                    <a:bodyPr/>
+                    <a:bodyPr wrap="square"/>
                     <a:lstStyle/>
                     <a:p>
                       <a:pPr>
+                        <a:spcAft>
+                          <a:spcPts val="100"/>
+                        </a:spcAft>
                         <a:defRPr sz="1000">
                           <a:solidFill>
                             <a:srgbClr val="323130"/>
@@ -7268,20 +8877,23 @@
                       </a:r>
                     </a:p>
                   </a:txBody>
-                  <a:tcPr>
+                  <a:tcPr marL="101600" marR="101600" marT="50800" marB="50800">
                     <a:solidFill>
                       <a:srgbClr val="FAF9F8"/>
                     </a:solidFill>
                   </a:tcPr>
                 </a:tc>
               </a:tr>
-              <a:tr h="365760">
+              <a:tr h="384048">
                 <a:tc>
                   <a:txBody>
-                    <a:bodyPr/>
+                    <a:bodyPr wrap="square"/>
                     <a:lstStyle/>
                     <a:p>
                       <a:pPr>
+                        <a:spcAft>
+                          <a:spcPts val="100"/>
+                        </a:spcAft>
                         <a:defRPr sz="1000">
                           <a:solidFill>
                             <a:srgbClr val="323130"/>
@@ -7290,11 +8902,11 @@
                         </a:defRPr>
                       </a:pPr>
                       <a:r>
-                        <a:t>⚡ Performance</a:t>
+                        <a:t>Performance</a:t>
                       </a:r>
                     </a:p>
                   </a:txBody>
-                  <a:tcPr>
+                  <a:tcPr marL="101600" marR="101600" marT="50800" marB="50800">
                     <a:solidFill>
                       <a:srgbClr val="FFFFFF"/>
                     </a:solidFill>
@@ -7302,10 +8914,13 @@
                 </a:tc>
                 <a:tc>
                   <a:txBody>
-                    <a:bodyPr/>
+                    <a:bodyPr wrap="square"/>
                     <a:lstStyle/>
                     <a:p>
                       <a:pPr>
+                        <a:spcAft>
+                          <a:spcPts val="100"/>
+                        </a:spcAft>
                         <a:defRPr sz="1000">
                           <a:solidFill>
                             <a:srgbClr val="323130"/>
@@ -7318,7 +8933,7 @@
                       </a:r>
                     </a:p>
                   </a:txBody>
-                  <a:tcPr>
+                  <a:tcPr marL="101600" marR="101600" marT="50800" marB="50800">
                     <a:solidFill>
                       <a:srgbClr val="FFFFFF"/>
                     </a:solidFill>
@@ -7326,10 +8941,13 @@
                 </a:tc>
                 <a:tc>
                   <a:txBody>
-                    <a:bodyPr/>
+                    <a:bodyPr wrap="square"/>
                     <a:lstStyle/>
                     <a:p>
                       <a:pPr>
+                        <a:spcAft>
+                          <a:spcPts val="100"/>
+                        </a:spcAft>
                         <a:defRPr sz="1000">
                           <a:solidFill>
                             <a:srgbClr val="323130"/>
@@ -7342,20 +8960,23 @@
                       </a:r>
                     </a:p>
                   </a:txBody>
-                  <a:tcPr>
+                  <a:tcPr marL="101600" marR="101600" marT="50800" marB="50800">
                     <a:solidFill>
                       <a:srgbClr val="FFFFFF"/>
                     </a:solidFill>
                   </a:tcPr>
                 </a:tc>
               </a:tr>
-              <a:tr h="365760">
+              <a:tr h="384048">
                 <a:tc>
                   <a:txBody>
-                    <a:bodyPr/>
+                    <a:bodyPr wrap="square"/>
                     <a:lstStyle/>
                     <a:p>
                       <a:pPr>
+                        <a:spcAft>
+                          <a:spcPts val="100"/>
+                        </a:spcAft>
                         <a:defRPr sz="1000">
                           <a:solidFill>
                             <a:srgbClr val="323130"/>
@@ -7364,11 +8985,11 @@
                         </a:defRPr>
                       </a:pPr>
                       <a:r>
-                        <a:t>⚡ Performance</a:t>
+                        <a:t>Performance</a:t>
                       </a:r>
                     </a:p>
                   </a:txBody>
-                  <a:tcPr>
+                  <a:tcPr marL="101600" marR="101600" marT="50800" marB="50800">
                     <a:solidFill>
                       <a:srgbClr val="FAF9F8"/>
                     </a:solidFill>
@@ -7376,10 +8997,13 @@
                 </a:tc>
                 <a:tc>
                   <a:txBody>
-                    <a:bodyPr/>
+                    <a:bodyPr wrap="square"/>
                     <a:lstStyle/>
                     <a:p>
                       <a:pPr>
+                        <a:spcAft>
+                          <a:spcPts val="100"/>
+                        </a:spcAft>
                         <a:defRPr sz="1000">
                           <a:solidFill>
                             <a:srgbClr val="323130"/>
@@ -7392,7 +9016,7 @@
                       </a:r>
                     </a:p>
                   </a:txBody>
-                  <a:tcPr>
+                  <a:tcPr marL="101600" marR="101600" marT="50800" marB="50800">
                     <a:solidFill>
                       <a:srgbClr val="FAF9F8"/>
                     </a:solidFill>
@@ -7400,10 +9024,13 @@
                 </a:tc>
                 <a:tc>
                   <a:txBody>
-                    <a:bodyPr/>
+                    <a:bodyPr wrap="square"/>
                     <a:lstStyle/>
                     <a:p>
                       <a:pPr>
+                        <a:spcAft>
+                          <a:spcPts val="100"/>
+                        </a:spcAft>
                         <a:defRPr sz="1000">
                           <a:solidFill>
                             <a:srgbClr val="323130"/>
@@ -7416,20 +9043,23 @@
                       </a:r>
                     </a:p>
                   </a:txBody>
-                  <a:tcPr>
+                  <a:tcPr marL="101600" marR="101600" marT="50800" marB="50800">
                     <a:solidFill>
                       <a:srgbClr val="FAF9F8"/>
                     </a:solidFill>
                   </a:tcPr>
                 </a:tc>
               </a:tr>
-              <a:tr h="365760">
+              <a:tr h="384048">
                 <a:tc>
                   <a:txBody>
-                    <a:bodyPr/>
+                    <a:bodyPr wrap="square"/>
                     <a:lstStyle/>
                     <a:p>
                       <a:pPr>
+                        <a:spcAft>
+                          <a:spcPts val="100"/>
+                        </a:spcAft>
                         <a:defRPr sz="1000">
                           <a:solidFill>
                             <a:srgbClr val="323130"/>
@@ -7438,11 +9068,11 @@
                         </a:defRPr>
                       </a:pPr>
                       <a:r>
-                        <a:t>⚡ Performance</a:t>
+                        <a:t>Performance</a:t>
                       </a:r>
                     </a:p>
                   </a:txBody>
-                  <a:tcPr>
+                  <a:tcPr marL="101600" marR="101600" marT="50800" marB="50800">
                     <a:solidFill>
                       <a:srgbClr val="FFFFFF"/>
                     </a:solidFill>
@@ -7450,10 +9080,13 @@
                 </a:tc>
                 <a:tc>
                   <a:txBody>
-                    <a:bodyPr/>
+                    <a:bodyPr wrap="square"/>
                     <a:lstStyle/>
                     <a:p>
                       <a:pPr>
+                        <a:spcAft>
+                          <a:spcPts val="100"/>
+                        </a:spcAft>
                         <a:defRPr sz="1000">
                           <a:solidFill>
                             <a:srgbClr val="323130"/>
@@ -7466,7 +9099,7 @@
                       </a:r>
                     </a:p>
                   </a:txBody>
-                  <a:tcPr>
+                  <a:tcPr marL="101600" marR="101600" marT="50800" marB="50800">
                     <a:solidFill>
                       <a:srgbClr val="FFFFFF"/>
                     </a:solidFill>
@@ -7474,10 +9107,13 @@
                 </a:tc>
                 <a:tc>
                   <a:txBody>
-                    <a:bodyPr/>
+                    <a:bodyPr wrap="square"/>
                     <a:lstStyle/>
                     <a:p>
                       <a:pPr>
+                        <a:spcAft>
+                          <a:spcPts val="100"/>
+                        </a:spcAft>
                         <a:defRPr sz="1000">
                           <a:solidFill>
                             <a:srgbClr val="323130"/>
@@ -7486,11 +9122,11 @@
                         </a:defRPr>
                       </a:pPr>
                       <a:r>
-                        <a:t>Improved build-side memory layout for cache locality, explicit prefetch hints for probe-side lookups on large joins</a:t>
+                        <a:t>Improved build-side memory layout for cache locality, explicit prefetch hints for probe-side lookups</a:t>
                       </a:r>
                     </a:p>
                   </a:txBody>
-                  <a:tcPr>
+                  <a:tcPr marL="101600" marR="101600" marT="50800" marB="50800">
                     <a:solidFill>
                       <a:srgbClr val="FFFFFF"/>
                     </a:solidFill>
@@ -7509,6 +9145,45 @@
         </p:nvSpPr>
         <p:spPr>
           <a:xfrm>
+            <a:off x="731520" y="5303520"/>
+            <a:ext cx="10515600" cy="274320"/>
+          </a:xfrm>
+          <a:prstGeom prst="rect">
+            <a:avLst/>
+          </a:prstGeom>
+          <a:noFill/>
+        </p:spPr>
+        <p:txBody>
+          <a:bodyPr wrap="square">
+            <a:spAutoFit/>
+          </a:bodyPr>
+          <a:lstStyle/>
+          <a:p>
+            <a:pPr algn="l">
+              <a:spcAft>
+                <a:spcPts val="200"/>
+              </a:spcAft>
+              <a:defRPr sz="1000" b="0">
+                <a:solidFill>
+                  <a:srgbClr val="605E5C"/>
+                </a:solidFill>
+                <a:latin typeface="Segoe UI"/>
+              </a:defRPr>
+            </a:pPr>
+            <a:r>
+              <a:t>These are Fabric-specific production hardening layers built on top of OSS Gluten and Velox.</a:t>
+            </a:r>
+          </a:p>
+        </p:txBody>
+      </p:sp>
+      <p:sp>
+        <p:nvSpPr>
+          <p:cNvPr id="6" name="TextBox 5"/>
+          <p:cNvSpPr txBox="1"/>
+          <p:nvPr/>
+        </p:nvSpPr>
+        <p:spPr>
+          <a:xfrm>
             <a:off x="457200" y="6400800"/>
             <a:ext cx="11247120" cy="320040"/>
           </a:xfrm>
@@ -7523,22 +9198,23 @@
           </a:bodyPr>
           <a:lstStyle/>
           <a:p>
-            <a:pPr algn="l">
+            <a:pPr>
               <a:defRPr sz="900">
                 <a:solidFill>
                   <a:srgbClr val="605E5C"/>
                 </a:solidFill>
+                <a:latin typeface="Segoe UI"/>
               </a:defRPr>
             </a:pPr>
             <a:r>
-              <a:t>VeloxCon 2026  •  April 30  •  Meta HQ, Menlo Park</a:t>
-            </a:r>
-          </a:p>
-        </p:txBody>
-      </p:sp>
-      <p:sp>
-        <p:nvSpPr>
-          <p:cNvPr id="6" name="TextBox 5"/>
+              <a:t>VeloxCon 2026  |  April 30  |  Meta HQ, Menlo Park</a:t>
+            </a:r>
+          </a:p>
+        </p:txBody>
+      </p:sp>
+      <p:sp>
+        <p:nvSpPr>
+          <p:cNvPr id="7" name="TextBox 6"/>
           <p:cNvSpPr txBox="1"/>
           <p:nvPr/>
         </p:nvSpPr>
@@ -7563,6 +9239,7 @@
                 <a:solidFill>
                   <a:srgbClr val="605E5C"/>
                 </a:solidFill>
+                <a:latin typeface="Segoe UI"/>
               </a:defRPr>
             </a:pPr>
             <a:r>
@@ -7612,6 +9289,9 @@
           <a:lstStyle/>
           <a:p>
             <a:pPr algn="l">
+              <a:spcAft>
+                <a:spcPts val="200"/>
+              </a:spcAft>
               <a:defRPr sz="3200" b="1">
                 <a:solidFill>
                   <a:srgbClr val="323130"/>
@@ -7691,6 +9371,9 @@
           <a:lstStyle/>
           <a:p>
             <a:pPr algn="l">
+              <a:spcAft>
+                <a:spcPts val="200"/>
+              </a:spcAft>
               <a:defRPr sz="1800" b="1">
                 <a:solidFill>
                   <a:srgbClr val="0078D4"/>
@@ -7714,7 +9397,7 @@
         </p:nvGraphicFramePr>
         <p:xfrm>
           <a:off x="731520" y="1508760"/>
-          <a:ext cx="5029200" cy="1828800"/>
+          <a:ext cx="5029200" cy="1920240"/>
         </p:xfrm>
         <a:graphic>
           <a:graphicData uri="http://schemas.openxmlformats.org/drawingml/2006/table">
@@ -7726,13 +9409,16 @@
                 <a:gridCol w="1828800"/>
                 <a:gridCol w="3200400"/>
               </a:tblGrid>
-              <a:tr h="365760">
+              <a:tr h="384048">
                 <a:tc>
                   <a:txBody>
-                    <a:bodyPr/>
+                    <a:bodyPr wrap="square"/>
                     <a:lstStyle/>
                     <a:p>
                       <a:pPr>
+                        <a:spcAft>
+                          <a:spcPts val="100"/>
+                        </a:spcAft>
                         <a:defRPr sz="1100" b="1">
                           <a:solidFill>
                             <a:srgbClr val="FFFFFF"/>
@@ -7745,7 +9431,7 @@
                       </a:r>
                     </a:p>
                   </a:txBody>
-                  <a:tcPr>
+                  <a:tcPr marL="101600" marR="101600" marT="50800" marB="50800">
                     <a:solidFill>
                       <a:srgbClr val="0078D4"/>
                     </a:solidFill>
@@ -7753,10 +9439,13 @@
                 </a:tc>
                 <a:tc>
                   <a:txBody>
-                    <a:bodyPr/>
+                    <a:bodyPr wrap="square"/>
                     <a:lstStyle/>
                     <a:p>
                       <a:pPr>
+                        <a:spcAft>
+                          <a:spcPts val="100"/>
+                        </a:spcAft>
                         <a:defRPr sz="1100" b="1">
                           <a:solidFill>
                             <a:srgbClr val="FFFFFF"/>
@@ -7769,20 +9458,23 @@
                       </a:r>
                     </a:p>
                   </a:txBody>
-                  <a:tcPr>
+                  <a:tcPr marL="101600" marR="101600" marT="50800" marB="50800">
                     <a:solidFill>
                       <a:srgbClr val="0078D4"/>
                     </a:solidFill>
                   </a:tcPr>
                 </a:tc>
               </a:tr>
-              <a:tr h="365760">
+              <a:tr h="384048">
                 <a:tc>
                   <a:txBody>
-                    <a:bodyPr/>
+                    <a:bodyPr wrap="square"/>
                     <a:lstStyle/>
                     <a:p>
                       <a:pPr>
+                        <a:spcAft>
+                          <a:spcPts val="100"/>
+                        </a:spcAft>
                         <a:defRPr sz="1100">
                           <a:solidFill>
                             <a:srgbClr val="323130"/>
@@ -7795,7 +9487,7 @@
                       </a:r>
                     </a:p>
                   </a:txBody>
-                  <a:tcPr>
+                  <a:tcPr marL="101600" marR="101600" marT="50800" marB="50800">
                     <a:solidFill>
                       <a:srgbClr val="FFFFFF"/>
                     </a:solidFill>
@@ -7803,10 +9495,13 @@
                 </a:tc>
                 <a:tc>
                   <a:txBody>
-                    <a:bodyPr/>
+                    <a:bodyPr wrap="square"/>
                     <a:lstStyle/>
                     <a:p>
                       <a:pPr>
+                        <a:spcAft>
+                          <a:spcPts val="100"/>
+                        </a:spcAft>
                         <a:defRPr sz="1100">
                           <a:solidFill>
                             <a:srgbClr val="323130"/>
@@ -7819,20 +9514,23 @@
                       </a:r>
                     </a:p>
                   </a:txBody>
-                  <a:tcPr>
+                  <a:tcPr marL="101600" marR="101600" marT="50800" marB="50800">
                     <a:solidFill>
                       <a:srgbClr val="FFFFFF"/>
                     </a:solidFill>
                   </a:tcPr>
                 </a:tc>
               </a:tr>
-              <a:tr h="365760">
+              <a:tr h="384048">
                 <a:tc>
                   <a:txBody>
-                    <a:bodyPr/>
+                    <a:bodyPr wrap="square"/>
                     <a:lstStyle/>
                     <a:p>
                       <a:pPr>
+                        <a:spcAft>
+                          <a:spcPts val="100"/>
+                        </a:spcAft>
                         <a:defRPr sz="1100">
                           <a:solidFill>
                             <a:srgbClr val="323130"/>
@@ -7845,7 +9543,7 @@
                       </a:r>
                     </a:p>
                   </a:txBody>
-                  <a:tcPr>
+                  <a:tcPr marL="101600" marR="101600" marT="50800" marB="50800">
                     <a:solidFill>
                       <a:srgbClr val="FAF9F8"/>
                     </a:solidFill>
@@ -7853,10 +9551,13 @@
                 </a:tc>
                 <a:tc>
                   <a:txBody>
-                    <a:bodyPr/>
+                    <a:bodyPr wrap="square"/>
                     <a:lstStyle/>
                     <a:p>
                       <a:pPr>
+                        <a:spcAft>
+                          <a:spcPts val="100"/>
+                        </a:spcAft>
                         <a:defRPr sz="1100">
                           <a:solidFill>
                             <a:srgbClr val="323130"/>
@@ -7869,20 +9570,23 @@
                       </a:r>
                     </a:p>
                   </a:txBody>
-                  <a:tcPr>
+                  <a:tcPr marL="101600" marR="101600" marT="50800" marB="50800">
                     <a:solidFill>
                       <a:srgbClr val="FAF9F8"/>
                     </a:solidFill>
                   </a:tcPr>
                 </a:tc>
               </a:tr>
-              <a:tr h="365760">
+              <a:tr h="384048">
                 <a:tc>
                   <a:txBody>
-                    <a:bodyPr/>
+                    <a:bodyPr wrap="square"/>
                     <a:lstStyle/>
                     <a:p>
                       <a:pPr>
+                        <a:spcAft>
+                          <a:spcPts val="100"/>
+                        </a:spcAft>
                         <a:defRPr sz="1100">
                           <a:solidFill>
                             <a:srgbClr val="323130"/>
@@ -7895,7 +9599,7 @@
                       </a:r>
                     </a:p>
                   </a:txBody>
-                  <a:tcPr>
+                  <a:tcPr marL="101600" marR="101600" marT="50800" marB="50800">
                     <a:solidFill>
                       <a:srgbClr val="FFFFFF"/>
                     </a:solidFill>
@@ -7903,10 +9607,13 @@
                 </a:tc>
                 <a:tc>
                   <a:txBody>
-                    <a:bodyPr/>
+                    <a:bodyPr wrap="square"/>
                     <a:lstStyle/>
                     <a:p>
                       <a:pPr>
+                        <a:spcAft>
+                          <a:spcPts val="100"/>
+                        </a:spcAft>
                         <a:defRPr sz="1100">
                           <a:solidFill>
                             <a:srgbClr val="323130"/>
@@ -7919,20 +9626,23 @@
                       </a:r>
                     </a:p>
                   </a:txBody>
-                  <a:tcPr>
+                  <a:tcPr marL="101600" marR="101600" marT="50800" marB="50800">
                     <a:solidFill>
                       <a:srgbClr val="FFFFFF"/>
                     </a:solidFill>
                   </a:tcPr>
                 </a:tc>
               </a:tr>
-              <a:tr h="365760">
+              <a:tr h="384048">
                 <a:tc>
                   <a:txBody>
-                    <a:bodyPr/>
+                    <a:bodyPr wrap="square"/>
                     <a:lstStyle/>
                     <a:p>
                       <a:pPr>
+                        <a:spcAft>
+                          <a:spcPts val="100"/>
+                        </a:spcAft>
                         <a:defRPr sz="1100">
                           <a:solidFill>
                             <a:srgbClr val="323130"/>
@@ -7945,7 +9655,7 @@
                       </a:r>
                     </a:p>
                   </a:txBody>
-                  <a:tcPr>
+                  <a:tcPr marL="101600" marR="101600" marT="50800" marB="50800">
                     <a:solidFill>
                       <a:srgbClr val="FAF9F8"/>
                     </a:solidFill>
@@ -7953,10 +9663,13 @@
                 </a:tc>
                 <a:tc>
                   <a:txBody>
-                    <a:bodyPr/>
+                    <a:bodyPr wrap="square"/>
                     <a:lstStyle/>
                     <a:p>
                       <a:pPr>
+                        <a:spcAft>
+                          <a:spcPts val="100"/>
+                        </a:spcAft>
                         <a:defRPr sz="1100">
                           <a:solidFill>
                             <a:srgbClr val="323130"/>
@@ -7969,7 +9682,7 @@
                       </a:r>
                     </a:p>
                   </a:txBody>
-                  <a:tcPr>
+                  <a:tcPr marL="101600" marR="101600" marT="50800" marB="50800">
                     <a:solidFill>
                       <a:srgbClr val="FAF9F8"/>
                     </a:solidFill>
@@ -8003,6 +9716,9 @@
           <a:lstStyle/>
           <a:p>
             <a:pPr algn="l">
+              <a:spcAft>
+                <a:spcPts val="200"/>
+              </a:spcAft>
               <a:defRPr sz="1800" b="1">
                 <a:solidFill>
                   <a:srgbClr val="0078D4"/>
@@ -8053,7 +9769,7 @@
                 </a:solidFill>
                 <a:latin typeface="Segoe UI"/>
               </a:rPr>
-              <a:t>Spark Advisor — real-time fallback alerts:</a:t>
+              <a:t>Spark Advisor:</a:t>
             </a:r>
             <a:r>
               <a:rPr sz="1200">
@@ -8062,7 +9778,7 @@
                 </a:solidFill>
                 <a:latin typeface="Segoe UI"/>
               </a:rPr>
-              <a:t> shows which operator, why, and what to change</a:t>
+              <a:t> real-time fallback alerts — shows which operator, why, and what to change</a:t>
             </a:r>
           </a:p>
           <a:p>
@@ -8075,13 +9791,22 @@
               </a:spcAft>
             </a:pPr>
             <a:r>
-              <a:rPr sz="1200">
+              <a:rPr sz="1200" b="1">
                 <a:solidFill>
                   <a:srgbClr val="323130"/>
                 </a:solidFill>
                 <a:latin typeface="Segoe UI"/>
               </a:rPr>
-              <a:t>Gluten SQL tab — native vs. JVM node visibility in Spark UI</a:t>
+              <a:t>Gluten SQL tab:</a:t>
+            </a:r>
+            <a:r>
+              <a:rPr sz="1200">
+                <a:solidFill>
+                  <a:srgbClr val="323130"/>
+                </a:solidFill>
+                <a:latin typeface="Segoe UI"/>
+              </a:rPr>
+              <a:t> native vs. JVM node visibility in Spark UI</a:t>
             </a:r>
           </a:p>
           <a:p>
@@ -8094,13 +9819,22 @@
               </a:spcAft>
             </a:pPr>
             <a:r>
-              <a:rPr sz="1200">
+              <a:rPr sz="1200" b="1">
                 <a:solidFill>
                   <a:srgbClr val="323130"/>
                 </a:solidFill>
                 <a:latin typeface="Segoe UI"/>
               </a:rPr>
-              <a:t>Run Series — before/after NEE performance comparison</a:t>
+              <a:t>Run Series:</a:t>
+            </a:r>
+            <a:r>
+              <a:rPr sz="1200">
+                <a:solidFill>
+                  <a:srgbClr val="323130"/>
+                </a:solidFill>
+                <a:latin typeface="Segoe UI"/>
+              </a:rPr>
+              <a:t> before/after NEE performance comparison</a:t>
             </a:r>
           </a:p>
           <a:p>
@@ -8113,13 +9847,22 @@
               </a:spcAft>
             </a:pPr>
             <a:r>
-              <a:rPr sz="1200">
+              <a:rPr sz="1200" b="1">
                 <a:solidFill>
                   <a:srgbClr val="323130"/>
                 </a:solidFill>
                 <a:latin typeface="Segoe UI"/>
               </a:rPr>
-              <a:t>NEE Overview — full documentation on Microsoft Learn</a:t>
+              <a:t>In explain() output:</a:t>
+            </a:r>
+            <a:r>
+              <a:rPr sz="1200">
+                <a:solidFill>
+                  <a:srgbClr val="323130"/>
+                </a:solidFill>
+                <a:latin typeface="Segoe UI"/>
+              </a:rPr>
+              <a:t> Transformer = native C++, ColumnarToRow = back to JVM</a:t>
             </a:r>
           </a:p>
           <a:p>
@@ -8132,13 +9875,22 @@
               </a:spcAft>
             </a:pPr>
             <a:r>
-              <a:rPr sz="1200">
+              <a:rPr sz="1200" b="1">
                 <a:solidFill>
                   <a:srgbClr val="323130"/>
                 </a:solidFill>
                 <a:latin typeface="Segoe UI"/>
               </a:rPr>
-              <a:t>Operator names ending in Transformer / NativeFileScan make native/fallback boundaries explicit in explain()</a:t>
+              <a:t>Full docs:</a:t>
+            </a:r>
+            <a:r>
+              <a:rPr sz="1200">
+                <a:solidFill>
+                  <a:srgbClr val="323130"/>
+                </a:solidFill>
+                <a:latin typeface="Segoe UI"/>
+              </a:rPr>
+              <a:t> learn.microsoft.com/fabric/.../native-execution-engine-overview</a:t>
             </a:r>
           </a:p>
         </p:txBody>
@@ -8152,7 +9904,7 @@
         <p:spPr>
           <a:xfrm>
             <a:off x="731520" y="4846320"/>
-            <a:ext cx="10515600" cy="548640"/>
+            <a:ext cx="10515600" cy="457200"/>
           </a:xfrm>
           <a:prstGeom prst="rect">
             <a:avLst/>
@@ -8166,6 +9918,9 @@
           <a:lstStyle/>
           <a:p>
             <a:pPr algn="l">
+              <a:spcAft>
+                <a:spcPts val="200"/>
+              </a:spcAft>
               <a:defRPr sz="900" b="0">
                 <a:solidFill>
                   <a:srgbClr val="605E5C"/>
@@ -8174,7 +9929,7 @@
               </a:defRPr>
             </a:pPr>
             <a:r>
-              <a:t>Refs: learn.microsoft.com/fabric/data-engineering/spark-advisor-introduction  •  learn.microsoft.com/fabric/data-engineering/native-execution-engine-overview  •  learn.microsoft.com/fabric/data-engineering/delta-optimization-and-v-order</a:t>
+              <a:t>Refs: learn.microsoft.com/fabric/data-engineering/spark-advisor-introduction  |  learn.microsoft.com/fabric/data-engineering/delta-optimization-and-v-order</a:t>
             </a:r>
           </a:p>
         </p:txBody>
@@ -8201,15 +9956,16 @@
           </a:bodyPr>
           <a:lstStyle/>
           <a:p>
-            <a:pPr algn="l">
+            <a:pPr>
               <a:defRPr sz="900">
                 <a:solidFill>
                   <a:srgbClr val="605E5C"/>
                 </a:solidFill>
+                <a:latin typeface="Segoe UI"/>
               </a:defRPr>
             </a:pPr>
             <a:r>
-              <a:t>VeloxCon 2026  •  April 30  •  Meta HQ, Menlo Park</a:t>
+              <a:t>VeloxCon 2026  |  April 30  |  Meta HQ, Menlo Park</a:t>
             </a:r>
           </a:p>
         </p:txBody>
@@ -8241,6 +9997,7 @@
                 <a:solidFill>
                   <a:srgbClr val="605E5C"/>
                 </a:solidFill>
+                <a:latin typeface="Segoe UI"/>
               </a:defRPr>
             </a:pPr>
             <a:r>
@@ -8341,6 +10098,9 @@
           <a:lstStyle/>
           <a:p>
             <a:pPr algn="l">
+              <a:spcAft>
+                <a:spcPts val="200"/>
+              </a:spcAft>
               <a:defRPr sz="4800" b="1">
                 <a:solidFill>
                   <a:srgbClr val="FFFFFF"/>
@@ -8377,6 +10137,9 @@
           <a:lstStyle/>
           <a:p>
             <a:pPr algn="l">
+              <a:spcAft>
+                <a:spcPts val="200"/>
+              </a:spcAft>
               <a:defRPr sz="3600" b="1">
                 <a:solidFill>
                   <a:srgbClr val="FFFFFF"/>
@@ -8413,6 +10176,9 @@
           <a:lstStyle/>
           <a:p>
             <a:pPr algn="l">
+              <a:spcAft>
+                <a:spcPts val="200"/>
+              </a:spcAft>
               <a:defRPr sz="1800" b="0">
                 <a:solidFill>
                   <a:srgbClr val="B4D6FA"/>
@@ -8453,6 +10219,7 @@
                 <a:solidFill>
                   <a:srgbClr val="B4D6FA"/>
                 </a:solidFill>
+                <a:latin typeface="Segoe UI"/>
               </a:defRPr>
             </a:pPr>
             <a:r>
@@ -8502,6 +10269,9 @@
           <a:lstStyle/>
           <a:p>
             <a:pPr algn="l">
+              <a:spcAft>
+                <a:spcPts val="200"/>
+              </a:spcAft>
               <a:defRPr sz="3200" b="1">
                 <a:solidFill>
                   <a:srgbClr val="323130"/>
@@ -8581,6 +10351,9 @@
           <a:lstStyle/>
           <a:p>
             <a:pPr algn="l">
+              <a:spcAft>
+                <a:spcPts val="200"/>
+              </a:spcAft>
               <a:defRPr sz="1800" b="1">
                 <a:solidFill>
                   <a:srgbClr val="0078D4"/>
@@ -8703,6 +10476,9 @@
           <a:lstStyle/>
           <a:p>
             <a:pPr algn="l">
+              <a:spcAft>
+                <a:spcPts val="200"/>
+              </a:spcAft>
               <a:defRPr sz="1100" b="1">
                 <a:solidFill>
                   <a:srgbClr val="0078D4"/>
@@ -8739,6 +10515,9 @@
           <a:lstStyle/>
           <a:p>
             <a:pPr algn="l">
+              <a:spcAft>
+                <a:spcPts val="200"/>
+              </a:spcAft>
               <a:defRPr sz="1100" b="0">
                 <a:solidFill>
                   <a:srgbClr val="323130"/>
@@ -8861,6 +10640,9 @@
           <a:lstStyle/>
           <a:p>
             <a:pPr algn="l">
+              <a:spcAft>
+                <a:spcPts val="200"/>
+              </a:spcAft>
               <a:defRPr sz="1100" b="1">
                 <a:solidFill>
                   <a:srgbClr val="0078D4"/>
@@ -8897,6 +10679,9 @@
           <a:lstStyle/>
           <a:p>
             <a:pPr algn="l">
+              <a:spcAft>
+                <a:spcPts val="200"/>
+              </a:spcAft>
               <a:defRPr sz="1100" b="0">
                 <a:solidFill>
                   <a:srgbClr val="323130"/>
@@ -9019,6 +10804,9 @@
           <a:lstStyle/>
           <a:p>
             <a:pPr algn="l">
+              <a:spcAft>
+                <a:spcPts val="200"/>
+              </a:spcAft>
               <a:defRPr sz="1100" b="1">
                 <a:solidFill>
                   <a:srgbClr val="0078D4"/>
@@ -9055,6 +10843,9 @@
           <a:lstStyle/>
           <a:p>
             <a:pPr algn="l">
+              <a:spcAft>
+                <a:spcPts val="200"/>
+              </a:spcAft>
               <a:defRPr sz="1100" b="0">
                 <a:solidFill>
                   <a:srgbClr val="323130"/>
@@ -9177,6 +10968,9 @@
           <a:lstStyle/>
           <a:p>
             <a:pPr algn="l">
+              <a:spcAft>
+                <a:spcPts val="200"/>
+              </a:spcAft>
               <a:defRPr sz="1100" b="1">
                 <a:solidFill>
                   <a:srgbClr val="0078D4"/>
@@ -9213,6 +11007,9 @@
           <a:lstStyle/>
           <a:p>
             <a:pPr algn="l">
+              <a:spcAft>
+                <a:spcPts val="200"/>
+              </a:spcAft>
               <a:defRPr sz="1100" b="0">
                 <a:solidFill>
                   <a:srgbClr val="323130"/>
@@ -9292,6 +11089,9 @@
           <a:lstStyle/>
           <a:p>
             <a:pPr algn="l">
+              <a:spcAft>
+                <a:spcPts val="200"/>
+              </a:spcAft>
               <a:defRPr sz="1100" b="1">
                 <a:solidFill>
                   <a:srgbClr val="0078D4"/>
@@ -9328,6 +11128,9 @@
           <a:lstStyle/>
           <a:p>
             <a:pPr algn="l">
+              <a:spcAft>
+                <a:spcPts val="200"/>
+              </a:spcAft>
               <a:defRPr sz="1100" b="0">
                 <a:solidFill>
                   <a:srgbClr val="323130"/>
@@ -9336,7 +11139,7 @@
               </a:defRPr>
             </a:pPr>
             <a:r>
-              <a:t>🎓 Apache TLP — 1,500+ ★, ~194 contributors</a:t>
+              <a:t>Apache TLP — 1,500+ stars, ~194 contributors</a:t>
             </a:r>
           </a:p>
         </p:txBody>
@@ -9364,6 +11167,9 @@
           <a:lstStyle/>
           <a:p>
             <a:pPr algn="l">
+              <a:spcAft>
+                <a:spcPts val="200"/>
+              </a:spcAft>
               <a:defRPr sz="1800" b="1">
                 <a:solidFill>
                   <a:srgbClr val="0078D4"/>
@@ -9488,6 +11294,9 @@
           <a:lstStyle/>
           <a:p>
             <a:pPr algn="l">
+              <a:spcAft>
+                <a:spcPts val="200"/>
+              </a:spcAft>
               <a:defRPr sz="1300" b="1">
                 <a:solidFill>
                   <a:srgbClr val="0078D4"/>
@@ -9496,7 +11305,7 @@
               </a:defRPr>
             </a:pPr>
             <a:r>
-              <a:t>🏛️ Governance &gt; Code</a:t>
+              <a:t>Governance Matters as Much as Code</a:t>
             </a:r>
           </a:p>
         </p:txBody>
@@ -9524,6 +11333,9 @@
           <a:lstStyle/>
           <a:p>
             <a:pPr algn="l">
+              <a:spcAft>
+                <a:spcPts val="200"/>
+              </a:spcAft>
               <a:defRPr sz="1100" b="0">
                 <a:solidFill>
                   <a:srgbClr val="605E5C"/>
@@ -9532,7 +11344,7 @@
               </a:defRPr>
             </a:pPr>
             <a:r>
-              <a:t>ASF demands diverse PMC. Graduation required deliberate multi-company diversification.</a:t>
+              <a:t>ASF graduation required a PMC with Intel, Kyligence, Microsoft, and independents — not a single company's project.</a:t>
             </a:r>
           </a:p>
         </p:txBody>
@@ -9648,6 +11460,9 @@
           <a:lstStyle/>
           <a:p>
             <a:pPr algn="l">
+              <a:spcAft>
+                <a:spcPts val="200"/>
+              </a:spcAft>
               <a:defRPr sz="1300" b="1">
                 <a:solidFill>
                   <a:srgbClr val="FF8C00"/>
@@ -9656,7 +11471,7 @@
               </a:defRPr>
             </a:pPr>
             <a:r>
-              <a:t>🧠 Memory: The Hardest Problem</a:t>
+              <a:t>Memory: The Hardest Problem</a:t>
             </a:r>
           </a:p>
         </p:txBody>
@@ -9684,6 +11499,9 @@
           <a:lstStyle/>
           <a:p>
             <a:pPr algn="l">
+              <a:spcAft>
+                <a:spcPts val="200"/>
+              </a:spcAft>
               <a:defRPr sz="1100" b="0">
                 <a:solidFill>
                   <a:srgbClr val="605E5C"/>
@@ -9692,7 +11510,7 @@
               </a:defRPr>
             </a:pPr>
             <a:r>
-              <a:t>JVM vs. native off-heap — 9 months to build dynamic negotiation. OOM dropped 70%.</a:t>
+              <a:t>JVM vs. native off-heap — 9-month collaboration to build cooperative memory arbitration. OOM dropped 70%.</a:t>
             </a:r>
           </a:p>
         </p:txBody>
@@ -9808,6 +11626,9 @@
           <a:lstStyle/>
           <a:p>
             <a:pPr algn="l">
+              <a:spcAft>
+                <a:spcPts val="200"/>
+              </a:spcAft>
               <a:defRPr sz="1300" b="1">
                 <a:solidFill>
                   <a:srgbClr val="107C10"/>
@@ -9816,7 +11637,7 @@
               </a:defRPr>
             </a:pPr>
             <a:r>
-              <a:t>🔄 Production → Upstream → Graduation</a:t>
+              <a:t>Production → Upstream → Graduation</a:t>
             </a:r>
           </a:p>
         </p:txBody>
@@ -9844,6 +11665,9 @@
           <a:lstStyle/>
           <a:p>
             <a:pPr algn="l">
+              <a:spcAft>
+                <a:spcPts val="200"/>
+              </a:spcAft>
               <a:defRPr sz="1100" b="0">
                 <a:solidFill>
                   <a:srgbClr val="605E5C"/>
@@ -9852,7 +11676,7 @@
               </a:defRPr>
             </a:pPr>
             <a:r>
-              <a:t>Microsoft's role: production-scale validation, upstream fixes, and active participation in community governance — not a downstream fork strategy.</a:t>
+              <a:t>How production adoption (at Microsoft and elsewhere) validated Gluten at scale and accelerated TLP readiness — not a downstream fork strategy.</a:t>
             </a:r>
           </a:p>
         </p:txBody>
@@ -9866,7 +11690,7 @@
         <p:spPr>
           <a:xfrm>
             <a:off x="731520" y="5029200"/>
-            <a:ext cx="5029200" cy="274320"/>
+            <a:ext cx="5029200" cy="228600"/>
           </a:xfrm>
           <a:prstGeom prst="rect">
             <a:avLst/>
@@ -9880,6 +11704,9 @@
           <a:lstStyle/>
           <a:p>
             <a:pPr algn="l">
+              <a:spcAft>
+                <a:spcPts val="200"/>
+              </a:spcAft>
               <a:defRPr sz="900" b="0">
                 <a:solidFill>
                   <a:srgbClr val="605E5C"/>
@@ -9915,15 +11742,16 @@
           </a:bodyPr>
           <a:lstStyle/>
           <a:p>
-            <a:pPr algn="l">
+            <a:pPr>
               <a:defRPr sz="900">
                 <a:solidFill>
                   <a:srgbClr val="605E5C"/>
                 </a:solidFill>
+                <a:latin typeface="Segoe UI"/>
               </a:defRPr>
             </a:pPr>
             <a:r>
-              <a:t>VeloxCon 2026  •  April 30  •  Meta HQ, Menlo Park</a:t>
+              <a:t>VeloxCon 2026  |  April 30  |  Meta HQ, Menlo Park</a:t>
             </a:r>
           </a:p>
         </p:txBody>
@@ -9955,6 +11783,7 @@
                 <a:solidFill>
                   <a:srgbClr val="605E5C"/>
                 </a:solidFill>
+                <a:latin typeface="Segoe UI"/>
               </a:defRPr>
             </a:pPr>
             <a:r>
@@ -10004,6 +11833,9 @@
           <a:lstStyle/>
           <a:p>
             <a:pPr algn="l">
+              <a:spcAft>
+                <a:spcPts val="200"/>
+              </a:spcAft>
               <a:defRPr sz="3200" b="1">
                 <a:solidFill>
                   <a:srgbClr val="323130"/>
@@ -10083,6 +11915,9 @@
           <a:lstStyle/>
           <a:p>
             <a:pPr algn="l">
+              <a:spcAft>
+                <a:spcPts val="200"/>
+              </a:spcAft>
               <a:defRPr sz="1800" b="1">
                 <a:solidFill>
                   <a:srgbClr val="0078D4"/>
@@ -10106,7 +11941,7 @@
         </p:nvGraphicFramePr>
         <p:xfrm>
           <a:off x="731520" y="1554480"/>
-          <a:ext cx="5029200" cy="1828800"/>
+          <a:ext cx="5029200" cy="1920240"/>
         </p:xfrm>
         <a:graphic>
           <a:graphicData uri="http://schemas.openxmlformats.org/drawingml/2006/table">
@@ -10119,13 +11954,16 @@
                 <a:gridCol w="914400"/>
                 <a:gridCol w="3566160"/>
               </a:tblGrid>
-              <a:tr h="365760">
+              <a:tr h="384048">
                 <a:tc>
                   <a:txBody>
-                    <a:bodyPr/>
+                    <a:bodyPr wrap="square"/>
                     <a:lstStyle/>
                     <a:p>
                       <a:pPr>
+                        <a:spcAft>
+                          <a:spcPts val="100"/>
+                        </a:spcAft>
                         <a:defRPr sz="1200" b="1">
                           <a:solidFill>
                             <a:srgbClr val="FFFFFF"/>
@@ -10138,7 +11976,7 @@
                       </a:r>
                     </a:p>
                   </a:txBody>
-                  <a:tcPr>
+                  <a:tcPr marL="101600" marR="101600" marT="50800" marB="50800">
                     <a:solidFill>
                       <a:srgbClr val="0078D4"/>
                     </a:solidFill>
@@ -10146,10 +11984,13 @@
                 </a:tc>
                 <a:tc>
                   <a:txBody>
-                    <a:bodyPr/>
+                    <a:bodyPr wrap="square"/>
                     <a:lstStyle/>
                     <a:p>
                       <a:pPr>
+                        <a:spcAft>
+                          <a:spcPts val="100"/>
+                        </a:spcAft>
                         <a:defRPr sz="1200" b="1">
                           <a:solidFill>
                             <a:srgbClr val="FFFFFF"/>
@@ -10162,7 +12003,7 @@
                       </a:r>
                     </a:p>
                   </a:txBody>
-                  <a:tcPr>
+                  <a:tcPr marL="101600" marR="101600" marT="50800" marB="50800">
                     <a:solidFill>
                       <a:srgbClr val="0078D4"/>
                     </a:solidFill>
@@ -10170,10 +12011,13 @@
                 </a:tc>
                 <a:tc>
                   <a:txBody>
-                    <a:bodyPr/>
+                    <a:bodyPr wrap="square"/>
                     <a:lstStyle/>
                     <a:p>
                       <a:pPr>
+                        <a:spcAft>
+                          <a:spcPts val="100"/>
+                        </a:spcAft>
                         <a:defRPr sz="1200" b="1">
                           <a:solidFill>
                             <a:srgbClr val="FFFFFF"/>
@@ -10186,20 +12030,23 @@
                       </a:r>
                     </a:p>
                   </a:txBody>
-                  <a:tcPr>
+                  <a:tcPr marL="101600" marR="101600" marT="50800" marB="50800">
                     <a:solidFill>
                       <a:srgbClr val="0078D4"/>
                     </a:solidFill>
                   </a:tcPr>
                 </a:tc>
               </a:tr>
-              <a:tr h="365760">
+              <a:tr h="384048">
                 <a:tc>
                   <a:txBody>
-                    <a:bodyPr/>
+                    <a:bodyPr wrap="square"/>
                     <a:lstStyle/>
                     <a:p>
                       <a:pPr>
+                        <a:spcAft>
+                          <a:spcPts val="100"/>
+                        </a:spcAft>
                         <a:defRPr sz="1200">
                           <a:solidFill>
                             <a:srgbClr val="323130"/>
@@ -10212,7 +12059,7 @@
                       </a:r>
                     </a:p>
                   </a:txBody>
-                  <a:tcPr>
+                  <a:tcPr marL="101600" marR="101600" marT="50800" marB="50800">
                     <a:solidFill>
                       <a:srgbClr val="FFFFFF"/>
                     </a:solidFill>
@@ -10220,10 +12067,13 @@
                 </a:tc>
                 <a:tc>
                   <a:txBody>
-                    <a:bodyPr/>
+                    <a:bodyPr wrap="square"/>
                     <a:lstStyle/>
                     <a:p>
                       <a:pPr>
+                        <a:spcAft>
+                          <a:spcPts val="100"/>
+                        </a:spcAft>
                         <a:defRPr sz="1200">
                           <a:solidFill>
                             <a:srgbClr val="323130"/>
@@ -10236,7 +12086,7 @@
                       </a:r>
                     </a:p>
                   </a:txBody>
-                  <a:tcPr>
+                  <a:tcPr marL="101600" marR="101600" marT="50800" marB="50800">
                     <a:solidFill>
                       <a:srgbClr val="FFFFFF"/>
                     </a:solidFill>
@@ -10244,10 +12094,13 @@
                 </a:tc>
                 <a:tc>
                   <a:txBody>
-                    <a:bodyPr/>
+                    <a:bodyPr wrap="square"/>
                     <a:lstStyle/>
                     <a:p>
                       <a:pPr>
+                        <a:spcAft>
+                          <a:spcPts val="100"/>
+                        </a:spcAft>
                         <a:defRPr sz="1200">
                           <a:solidFill>
                             <a:srgbClr val="323130"/>
@@ -10260,20 +12113,23 @@
                       </a:r>
                     </a:p>
                   </a:txBody>
-                  <a:tcPr>
+                  <a:tcPr marL="101600" marR="101600" marT="50800" marB="50800">
                     <a:solidFill>
                       <a:srgbClr val="FFFFFF"/>
                     </a:solidFill>
                   </a:tcPr>
                 </a:tc>
               </a:tr>
-              <a:tr h="365760">
+              <a:tr h="384048">
                 <a:tc>
                   <a:txBody>
-                    <a:bodyPr/>
+                    <a:bodyPr wrap="square"/>
                     <a:lstStyle/>
                     <a:p>
                       <a:pPr>
+                        <a:spcAft>
+                          <a:spcPts val="100"/>
+                        </a:spcAft>
                         <a:defRPr sz="1200">
                           <a:solidFill>
                             <a:srgbClr val="323130"/>
@@ -10286,7 +12142,7 @@
                       </a:r>
                     </a:p>
                   </a:txBody>
-                  <a:tcPr>
+                  <a:tcPr marL="101600" marR="101600" marT="50800" marB="50800">
                     <a:solidFill>
                       <a:srgbClr val="FAF9F8"/>
                     </a:solidFill>
@@ -10294,10 +12150,13 @@
                 </a:tc>
                 <a:tc>
                   <a:txBody>
-                    <a:bodyPr/>
+                    <a:bodyPr wrap="square"/>
                     <a:lstStyle/>
                     <a:p>
                       <a:pPr>
+                        <a:spcAft>
+                          <a:spcPts val="100"/>
+                        </a:spcAft>
                         <a:defRPr sz="1200">
                           <a:solidFill>
                             <a:srgbClr val="323130"/>
@@ -10310,7 +12169,7 @@
                       </a:r>
                     </a:p>
                   </a:txBody>
-                  <a:tcPr>
+                  <a:tcPr marL="101600" marR="101600" marT="50800" marB="50800">
                     <a:solidFill>
                       <a:srgbClr val="FAF9F8"/>
                     </a:solidFill>
@@ -10318,10 +12177,13 @@
                 </a:tc>
                 <a:tc>
                   <a:txBody>
-                    <a:bodyPr/>
+                    <a:bodyPr wrap="square"/>
                     <a:lstStyle/>
                     <a:p>
                       <a:pPr>
+                        <a:spcAft>
+                          <a:spcPts val="100"/>
+                        </a:spcAft>
                         <a:defRPr sz="1200">
                           <a:solidFill>
                             <a:srgbClr val="323130"/>
@@ -10334,20 +12196,23 @@
                       </a:r>
                     </a:p>
                   </a:txBody>
-                  <a:tcPr>
+                  <a:tcPr marL="101600" marR="101600" marT="50800" marB="50800">
                     <a:solidFill>
                       <a:srgbClr val="FAF9F8"/>
                     </a:solidFill>
                   </a:tcPr>
                 </a:tc>
               </a:tr>
-              <a:tr h="365760">
+              <a:tr h="384048">
                 <a:tc>
                   <a:txBody>
-                    <a:bodyPr/>
+                    <a:bodyPr wrap="square"/>
                     <a:lstStyle/>
                     <a:p>
                       <a:pPr>
+                        <a:spcAft>
+                          <a:spcPts val="100"/>
+                        </a:spcAft>
                         <a:defRPr sz="1200">
                           <a:solidFill>
                             <a:srgbClr val="323130"/>
@@ -10360,7 +12225,7 @@
                       </a:r>
                     </a:p>
                   </a:txBody>
-                  <a:tcPr>
+                  <a:tcPr marL="101600" marR="101600" marT="50800" marB="50800">
                     <a:solidFill>
                       <a:srgbClr val="FFFFFF"/>
                     </a:solidFill>
@@ -10368,10 +12233,13 @@
                 </a:tc>
                 <a:tc>
                   <a:txBody>
-                    <a:bodyPr/>
+                    <a:bodyPr wrap="square"/>
                     <a:lstStyle/>
                     <a:p>
                       <a:pPr>
+                        <a:spcAft>
+                          <a:spcPts val="100"/>
+                        </a:spcAft>
                         <a:defRPr sz="1200">
                           <a:solidFill>
                             <a:srgbClr val="323130"/>
@@ -10384,7 +12252,7 @@
                       </a:r>
                     </a:p>
                   </a:txBody>
-                  <a:tcPr>
+                  <a:tcPr marL="101600" marR="101600" marT="50800" marB="50800">
                     <a:solidFill>
                       <a:srgbClr val="FFFFFF"/>
                     </a:solidFill>
@@ -10392,10 +12260,13 @@
                 </a:tc>
                 <a:tc>
                   <a:txBody>
-                    <a:bodyPr/>
+                    <a:bodyPr wrap="square"/>
                     <a:lstStyle/>
                     <a:p>
                       <a:pPr>
+                        <a:spcAft>
+                          <a:spcPts val="100"/>
+                        </a:spcAft>
                         <a:defRPr sz="1200">
                           <a:solidFill>
                             <a:srgbClr val="323130"/>
@@ -10408,20 +12279,23 @@
                       </a:r>
                     </a:p>
                   </a:txBody>
-                  <a:tcPr>
+                  <a:tcPr marL="101600" marR="101600" marT="50800" marB="50800">
                     <a:solidFill>
                       <a:srgbClr val="FFFFFF"/>
                     </a:solidFill>
                   </a:tcPr>
                 </a:tc>
               </a:tr>
-              <a:tr h="365760">
+              <a:tr h="384048">
                 <a:tc>
                   <a:txBody>
-                    <a:bodyPr/>
+                    <a:bodyPr wrap="square"/>
                     <a:lstStyle/>
                     <a:p>
                       <a:pPr>
+                        <a:spcAft>
+                          <a:spcPts val="100"/>
+                        </a:spcAft>
                         <a:defRPr sz="1200">
                           <a:solidFill>
                             <a:srgbClr val="323130"/>
@@ -10434,7 +12308,7 @@
                       </a:r>
                     </a:p>
                   </a:txBody>
-                  <a:tcPr>
+                  <a:tcPr marL="101600" marR="101600" marT="50800" marB="50800">
                     <a:solidFill>
                       <a:srgbClr val="FAF9F8"/>
                     </a:solidFill>
@@ -10442,10 +12316,13 @@
                 </a:tc>
                 <a:tc>
                   <a:txBody>
-                    <a:bodyPr/>
+                    <a:bodyPr wrap="square"/>
                     <a:lstStyle/>
                     <a:p>
                       <a:pPr>
+                        <a:spcAft>
+                          <a:spcPts val="100"/>
+                        </a:spcAft>
                         <a:defRPr sz="1200">
                           <a:solidFill>
                             <a:srgbClr val="323130"/>
@@ -10458,7 +12335,7 @@
                       </a:r>
                     </a:p>
                   </a:txBody>
-                  <a:tcPr>
+                  <a:tcPr marL="101600" marR="101600" marT="50800" marB="50800">
                     <a:solidFill>
                       <a:srgbClr val="FAF9F8"/>
                     </a:solidFill>
@@ -10466,10 +12343,13 @@
                 </a:tc>
                 <a:tc>
                   <a:txBody>
-                    <a:bodyPr/>
+                    <a:bodyPr wrap="square"/>
                     <a:lstStyle/>
                     <a:p>
                       <a:pPr>
+                        <a:spcAft>
+                          <a:spcPts val="100"/>
+                        </a:spcAft>
                         <a:defRPr sz="1200">
                           <a:solidFill>
                             <a:srgbClr val="323130"/>
@@ -10482,7 +12362,7 @@
                       </a:r>
                     </a:p>
                   </a:txBody>
-                  <a:tcPr>
+                  <a:tcPr marL="101600" marR="101600" marT="50800" marB="50800">
                     <a:solidFill>
                       <a:srgbClr val="FAF9F8"/>
                     </a:solidFill>
@@ -10516,6 +12396,9 @@
           <a:lstStyle/>
           <a:p>
             <a:pPr algn="l">
+              <a:spcAft>
+                <a:spcPts val="200"/>
+              </a:spcAft>
               <a:defRPr sz="900" b="0">
                 <a:solidFill>
                   <a:srgbClr val="605E5C"/>
@@ -10552,6 +12435,9 @@
           <a:lstStyle/>
           <a:p>
             <a:pPr algn="l">
+              <a:spcAft>
+                <a:spcPts val="200"/>
+              </a:spcAft>
               <a:defRPr sz="1800" b="1">
                 <a:solidFill>
                   <a:srgbClr val="0078D4"/>
@@ -10676,6 +12562,9 @@
           <a:lstStyle/>
           <a:p>
             <a:pPr algn="l">
+              <a:spcAft>
+                <a:spcPts val="200"/>
+              </a:spcAft>
               <a:defRPr sz="1300" b="1">
                 <a:solidFill>
                   <a:srgbClr val="0078D4"/>
@@ -10684,7 +12573,7 @@
               </a:defRPr>
             </a:pPr>
             <a:r>
-              <a:t>🔧 Spark Compatibility</a:t>
+              <a:t>Spark Compatibility</a:t>
             </a:r>
           </a:p>
         </p:txBody>
@@ -10712,6 +12601,9 @@
           <a:lstStyle/>
           <a:p>
             <a:pPr algn="l">
+              <a:spcAft>
+                <a:spcPts val="200"/>
+              </a:spcAft>
               <a:defRPr sz="1100" b="0">
                 <a:solidFill>
                   <a:srgbClr val="605E5C"/>
@@ -10836,6 +12728,9 @@
           <a:lstStyle/>
           <a:p>
             <a:pPr algn="l">
+              <a:spcAft>
+                <a:spcPts val="200"/>
+              </a:spcAft>
               <a:defRPr sz="1300" b="1">
                 <a:solidFill>
                   <a:srgbClr val="107C10"/>
@@ -10844,7 +12739,7 @@
               </a:defRPr>
             </a:pPr>
             <a:r>
-              <a:t>⚡ Performance</a:t>
+              <a:t>Performance</a:t>
             </a:r>
           </a:p>
         </p:txBody>
@@ -10872,6 +12767,9 @@
           <a:lstStyle/>
           <a:p>
             <a:pPr algn="l">
+              <a:spcAft>
+                <a:spcPts val="200"/>
+              </a:spcAft>
               <a:defRPr sz="1100" b="0">
                 <a:solidFill>
                   <a:srgbClr val="605E5C"/>
@@ -10996,6 +12894,9 @@
           <a:lstStyle/>
           <a:p>
             <a:pPr algn="l">
+              <a:spcAft>
+                <a:spcPts val="200"/>
+              </a:spcAft>
               <a:defRPr sz="1300" b="1">
                 <a:solidFill>
                   <a:srgbClr val="886CE4"/>
@@ -11004,7 +12905,7 @@
               </a:defRPr>
             </a:pPr>
             <a:r>
-              <a:t>🏢 Enterprise Features</a:t>
+              <a:t>Enterprise Features</a:t>
             </a:r>
           </a:p>
         </p:txBody>
@@ -11032,6 +12933,9 @@
           <a:lstStyle/>
           <a:p>
             <a:pPr algn="l">
+              <a:spcAft>
+                <a:spcPts val="200"/>
+              </a:spcAft>
               <a:defRPr sz="1100" b="0">
                 <a:solidFill>
                   <a:srgbClr val="605E5C"/>
@@ -11139,8 +13043,8 @@
         </p:nvSpPr>
         <p:spPr>
           <a:xfrm>
-            <a:off x="1005840" y="4754880"/>
-            <a:ext cx="10058400" cy="548640"/>
+            <a:off x="914400" y="4736592"/>
+            <a:ext cx="10241280" cy="594360"/>
           </a:xfrm>
           <a:prstGeom prst="rect">
             <a:avLst/>
@@ -11153,16 +13057,23 @@
           </a:bodyPr>
           <a:lstStyle/>
           <a:p>
-            <a:pPr algn="l">
-              <a:defRPr sz="1300" b="0">
+            <a:r>
+              <a:rPr sz="1300" b="1">
+                <a:solidFill>
+                  <a:srgbClr val="0078D4"/>
+                </a:solidFill>
+                <a:latin typeface="Segoe UI"/>
+              </a:rPr>
+              <a:t>Shared investment: </a:t>
+            </a:r>
+            <a:r>
+              <a:rPr sz="1300">
                 <a:solidFill>
                   <a:srgbClr val="323130"/>
                 </a:solidFill>
                 <a:latin typeface="Segoe UI"/>
-              </a:defRPr>
-            </a:pPr>
-            <a:r>
-              <a:t>Every Spark function Velox implements unlocks more native execution paths for Fabric and the broader community. Microsoft is investing in Spark-Velox integration as a key pillar of our analytical compute strategy.</a:t>
+              </a:rPr>
+              <a:t>Each new Spark-compatible Velox capability expands native execution opportunities for Fabric and the broader ecosystem. We're committed to closing the Spark-Velox semantic gap — every function we upstream benefits all adopters.</a:t>
             </a:r>
           </a:p>
         </p:txBody>
@@ -11189,15 +13100,16 @@
           </a:bodyPr>
           <a:lstStyle/>
           <a:p>
-            <a:pPr algn="l">
+            <a:pPr>
               <a:defRPr sz="900">
                 <a:solidFill>
                   <a:srgbClr val="605E5C"/>
                 </a:solidFill>
+                <a:latin typeface="Segoe UI"/>
               </a:defRPr>
             </a:pPr>
             <a:r>
-              <a:t>VeloxCon 2026  •  April 30  •  Meta HQ, Menlo Park</a:t>
+              <a:t>VeloxCon 2026  |  April 30  |  Meta HQ, Menlo Park</a:t>
             </a:r>
           </a:p>
         </p:txBody>
@@ -11229,6 +13141,7 @@
                 <a:solidFill>
                   <a:srgbClr val="605E5C"/>
                 </a:solidFill>
+                <a:latin typeface="Segoe UI"/>
               </a:defRPr>
             </a:pPr>
             <a:r>
@@ -11278,6 +13191,9 @@
           <a:lstStyle/>
           <a:p>
             <a:pPr algn="l">
+              <a:spcAft>
+                <a:spcPts val="200"/>
+              </a:spcAft>
               <a:defRPr sz="3200" b="1">
                 <a:solidFill>
                   <a:srgbClr val="323130"/>
@@ -11402,7 +13318,7 @@
                 </a:solidFill>
                 <a:latin typeface="Segoe UI"/>
               </a:rPr>
-              <a:t>  Architecture in Practice — How Gluten offloads Spark to Velox</a:t>
+              <a:t>  Architecture in Practice — Where Spark ends, Gluten translates, Velox executes</a:t>
             </a:r>
           </a:p>
           <a:p>
@@ -11427,7 +13343,7 @@
                 </a:solidFill>
                 <a:latin typeface="Segoe UI"/>
               </a:rPr>
-              <a:t>  Production War Stories — What production exposed, what we upstreamed</a:t>
+              <a:t>  Production Lessons — What Fabric-scale workloads exposed, what the community upstreamed</a:t>
             </a:r>
           </a:p>
           <a:p>
@@ -11452,7 +13368,7 @@
                 </a:solidFill>
                 <a:latin typeface="Segoe UI"/>
               </a:rPr>
-              <a:t>  Upstream Contributions — Semantic parity • Fallback reduction • Performance</a:t>
+              <a:t>  Upstream Contributions — Semantic parity, fallback reduction, performance</a:t>
             </a:r>
           </a:p>
           <a:p>
@@ -11477,7 +13393,7 @@
                 </a:solidFill>
                 <a:latin typeface="Segoe UI"/>
               </a:rPr>
-              <a:t>  Fabric NEE — Product evidence from Microsoft's Spark runtime</a:t>
+              <a:t>  Fabric NEE — Productionizing Gluten + Velox in Microsoft Fabric</a:t>
             </a:r>
           </a:p>
           <a:p>
@@ -11598,6 +13514,9 @@
           <a:lstStyle/>
           <a:p>
             <a:pPr algn="l">
+              <a:spcAft>
+                <a:spcPts val="200"/>
+              </a:spcAft>
               <a:defRPr sz="1200" b="0">
                 <a:solidFill>
                   <a:srgbClr val="323130"/>
@@ -11606,7 +13525,7 @@
               </a:defRPr>
             </a:pPr>
             <a:r>
-              <a:t>Context: Yuan Zhou's session (1:40 PM) covers Gluten's community growth and ecosystem. This talk focuses on production lessons at Fabric scale — and how those lessons upstream to Gluten, Velox, and Spark.</a:t>
+              <a:t>Context: Yuan Zhou's session (1:40 PM) covers Gluten's community growth and ecosystem broadly. This talk focuses on production lessons at Fabric scale — and how those lessons upstream to Gluten, Velox, and Spark.</a:t>
             </a:r>
           </a:p>
         </p:txBody>
@@ -11633,15 +13552,16 @@
           </a:bodyPr>
           <a:lstStyle/>
           <a:p>
-            <a:pPr algn="l">
+            <a:pPr>
               <a:defRPr sz="900">
                 <a:solidFill>
                   <a:srgbClr val="605E5C"/>
                 </a:solidFill>
+                <a:latin typeface="Segoe UI"/>
               </a:defRPr>
             </a:pPr>
             <a:r>
-              <a:t>VeloxCon 2026  •  April 30  •  Meta HQ, Menlo Park</a:t>
+              <a:t>VeloxCon 2026  |  April 30  |  Meta HQ, Menlo Park</a:t>
             </a:r>
           </a:p>
         </p:txBody>
@@ -11673,6 +13593,7 @@
                 <a:solidFill>
                   <a:srgbClr val="605E5C"/>
                 </a:solidFill>
+                <a:latin typeface="Segoe UI"/>
               </a:defRPr>
             </a:pPr>
             <a:r>
@@ -11773,6 +13694,9 @@
           <a:lstStyle/>
           <a:p>
             <a:pPr algn="l">
+              <a:spcAft>
+                <a:spcPts val="200"/>
+              </a:spcAft>
               <a:defRPr sz="4800" b="1">
                 <a:solidFill>
                   <a:srgbClr val="FFFFFF"/>
@@ -11809,6 +13733,9 @@
           <a:lstStyle/>
           <a:p>
             <a:pPr algn="l">
+              <a:spcAft>
+                <a:spcPts val="200"/>
+              </a:spcAft>
               <a:defRPr sz="3600" b="1">
                 <a:solidFill>
                   <a:srgbClr val="FFFFFF"/>
@@ -11845,6 +13772,9 @@
           <a:lstStyle/>
           <a:p>
             <a:pPr algn="l">
+              <a:spcAft>
+                <a:spcPts val="200"/>
+              </a:spcAft>
               <a:defRPr sz="1800" b="0">
                 <a:solidFill>
                   <a:srgbClr val="B4D6FA"/>
@@ -11853,11 +13783,7 @@
               </a:defRPr>
             </a:pPr>
             <a:r>
-              <a:t>Production workloads accelerate open-source maturity.</a:t>
-            </a:r>
-            <a:br/>
-            <a:r>
-              <a:t>We'd love to collaborate with the community on Velox and Gluten.</a:t>
+              <a:t>We welcome deeper collaboration with the Velox and Gluten communities.</a:t>
             </a:r>
           </a:p>
         </p:txBody>
@@ -11889,6 +13815,7 @@
                 <a:solidFill>
                   <a:srgbClr val="B4D6FA"/>
                 </a:solidFill>
+                <a:latin typeface="Segoe UI"/>
               </a:defRPr>
             </a:pPr>
             <a:r>
@@ -11938,6 +13865,9 @@
           <a:lstStyle/>
           <a:p>
             <a:pPr algn="l">
+              <a:spcAft>
+                <a:spcPts val="200"/>
+              </a:spcAft>
               <a:defRPr sz="3200" b="1">
                 <a:solidFill>
                   <a:srgbClr val="323130"/>
@@ -12017,6 +13947,9 @@
           <a:lstStyle/>
           <a:p>
             <a:pPr algn="l">
+              <a:spcAft>
+                <a:spcPts val="200"/>
+              </a:spcAft>
               <a:defRPr sz="1400" b="0">
                 <a:solidFill>
                   <a:srgbClr val="323130"/>
@@ -12141,6 +14074,9 @@
           <a:lstStyle/>
           <a:p>
             <a:pPr algn="l">
+              <a:spcAft>
+                <a:spcPts val="200"/>
+              </a:spcAft>
               <a:defRPr sz="1300" b="1">
                 <a:solidFill>
                   <a:srgbClr val="0078D4"/>
@@ -12149,7 +14085,7 @@
               </a:defRPr>
             </a:pPr>
             <a:r>
-              <a:t>💻 Contribute Code</a:t>
+              <a:t>Contribute Code</a:t>
             </a:r>
           </a:p>
         </p:txBody>
@@ -12177,6 +14113,9 @@
           <a:lstStyle/>
           <a:p>
             <a:pPr algn="l">
+              <a:spcAft>
+                <a:spcPts val="200"/>
+              </a:spcAft>
               <a:defRPr sz="1100" b="0">
                 <a:solidFill>
                   <a:srgbClr val="605E5C"/>
@@ -12185,7 +14124,7 @@
               </a:defRPr>
             </a:pPr>
             <a:r>
-              <a:t>Pick up a help-wanted issue on Gluten or Velox. Spark function coverage and expression parity are great starting points.</a:t>
+              <a:t>Start here: add a missing Spark function to Velox (e.g., approx_percentile, avg_if). It unblocks native execution for thousands of users. See help-wanted issues on Gluten and Velox GitHub.</a:t>
             </a:r>
           </a:p>
         </p:txBody>
@@ -12301,6 +14240,9 @@
           <a:lstStyle/>
           <a:p>
             <a:pPr algn="l">
+              <a:spcAft>
+                <a:spcPts val="200"/>
+              </a:spcAft>
               <a:defRPr sz="1300" b="1">
                 <a:solidFill>
                   <a:srgbClr val="107C10"/>
@@ -12309,7 +14251,7 @@
               </a:defRPr>
             </a:pPr>
             <a:r>
-              <a:t>🧪 Test &amp; Report</a:t>
+              <a:t>Test &amp; Report</a:t>
             </a:r>
           </a:p>
         </p:txBody>
@@ -12337,6 +14279,9 @@
           <a:lstStyle/>
           <a:p>
             <a:pPr algn="l">
+              <a:spcAft>
+                <a:spcPts val="200"/>
+              </a:spcAft>
               <a:defRPr sz="1100" b="0">
                 <a:solidFill>
                   <a:srgbClr val="605E5C"/>
@@ -12461,6 +14406,9 @@
           <a:lstStyle/>
           <a:p>
             <a:pPr algn="l">
+              <a:spcAft>
+                <a:spcPts val="200"/>
+              </a:spcAft>
               <a:defRPr sz="1300" b="1">
                 <a:solidFill>
                   <a:srgbClr val="886CE4"/>
@@ -12469,7 +14417,7 @@
               </a:defRPr>
             </a:pPr>
             <a:r>
-              <a:t>📖 Improve Documentation</a:t>
+              <a:t>Improve Documentation</a:t>
             </a:r>
           </a:p>
         </p:txBody>
@@ -12497,6 +14445,9 @@
           <a:lstStyle/>
           <a:p>
             <a:pPr algn="l">
+              <a:spcAft>
+                <a:spcPts val="200"/>
+              </a:spcAft>
               <a:defRPr sz="1100" b="0">
                 <a:solidFill>
                   <a:srgbClr val="605E5C"/>
@@ -12621,6 +14572,9 @@
           <a:lstStyle/>
           <a:p>
             <a:pPr algn="l">
+              <a:spcAft>
+                <a:spcPts val="200"/>
+              </a:spcAft>
               <a:defRPr sz="1300" b="1">
                 <a:solidFill>
                   <a:srgbClr val="FF8C00"/>
@@ -12629,7 +14583,7 @@
               </a:defRPr>
             </a:pPr>
             <a:r>
-              <a:t>🔌 Integrate &amp; Extend</a:t>
+              <a:t>Integrate &amp; Extend</a:t>
             </a:r>
           </a:p>
         </p:txBody>
@@ -12657,6 +14611,9 @@
           <a:lstStyle/>
           <a:p>
             <a:pPr algn="l">
+              <a:spcAft>
+                <a:spcPts val="200"/>
+              </a:spcAft>
               <a:defRPr sz="1100" b="0">
                 <a:solidFill>
                   <a:srgbClr val="605E5C"/>
@@ -12764,8 +14721,8 @@
         </p:nvSpPr>
         <p:spPr>
           <a:xfrm>
-            <a:off x="1005840" y="4937760"/>
-            <a:ext cx="10058400" cy="457200"/>
+            <a:off x="914400" y="4919472"/>
+            <a:ext cx="10241280" cy="502920"/>
           </a:xfrm>
           <a:prstGeom prst="rect">
             <a:avLst/>
@@ -12778,16 +14735,23 @@
           </a:bodyPr>
           <a:lstStyle/>
           <a:p>
-            <a:pPr algn="ctr">
-              <a:defRPr sz="1400" b="1">
+            <a:r>
+              <a:rPr sz="1300" b="1">
                 <a:solidFill>
                   <a:srgbClr val="0078D4"/>
                 </a:solidFill>
                 <a:latin typeface="Segoe UI"/>
-              </a:defRPr>
-            </a:pPr>
-            <a:r>
-              <a:t>Bring us your hardest Spark-on-Velox edge cases — we want those feedback loops in the open.</a:t>
+              </a:rPr>
+              <a:t>Open invitation: </a:t>
+            </a:r>
+            <a:r>
+              <a:rPr sz="1300">
+                <a:solidFill>
+                  <a:srgbClr val="323130"/>
+                </a:solidFill>
+                <a:latin typeface="Segoe UI"/>
+              </a:rPr>
+              <a:t>If you are debugging difficult Spark-on-Velox edge cases, collaborate with us upstream so the fixes benefit the full ecosystem.</a:t>
             </a:r>
           </a:p>
         </p:txBody>
@@ -12815,6 +14779,9 @@
           <a:lstStyle/>
           <a:p>
             <a:pPr algn="ctr">
+              <a:spcAft>
+                <a:spcPts val="200"/>
+              </a:spcAft>
               <a:defRPr sz="1000" b="0">
                 <a:solidFill>
                   <a:srgbClr val="605E5C"/>
@@ -12823,7 +14790,7 @@
               </a:defRPr>
             </a:pPr>
             <a:r>
-              <a:t>github.com/apache/gluten  •  github.com/facebookincubator/velox  •  learn.microsoft.com/fabric/data-engineering/native-execution-engine-overview</a:t>
+              <a:t>github.com/apache/gluten  |  github.com/facebookincubator/velox  |  learn.microsoft.com/fabric/.../native-execution-engine-overview</a:t>
             </a:r>
           </a:p>
         </p:txBody>
@@ -12850,15 +14817,16 @@
           </a:bodyPr>
           <a:lstStyle/>
           <a:p>
-            <a:pPr algn="l">
+            <a:pPr>
               <a:defRPr sz="900">
                 <a:solidFill>
                   <a:srgbClr val="605E5C"/>
                 </a:solidFill>
+                <a:latin typeface="Segoe UI"/>
               </a:defRPr>
             </a:pPr>
             <a:r>
-              <a:t>VeloxCon 2026  •  April 30  •  Meta HQ, Menlo Park</a:t>
+              <a:t>VeloxCon 2026  |  April 30  |  Meta HQ, Menlo Park</a:t>
             </a:r>
           </a:p>
         </p:txBody>
@@ -12890,6 +14858,7 @@
                 <a:solidFill>
                   <a:srgbClr val="605E5C"/>
                 </a:solidFill>
+                <a:latin typeface="Segoe UI"/>
               </a:defRPr>
             </a:pPr>
             <a:r>
@@ -13162,6 +15131,9 @@
           <a:lstStyle/>
           <a:p>
             <a:pPr algn="l">
+              <a:spcAft>
+                <a:spcPts val="200"/>
+              </a:spcAft>
               <a:defRPr sz="2200" b="1">
                 <a:solidFill>
                   <a:srgbClr val="FFFFFF"/>
@@ -13198,6 +15170,9 @@
           <a:lstStyle/>
           <a:p>
             <a:pPr algn="ctr">
+              <a:spcAft>
+                <a:spcPts val="200"/>
+              </a:spcAft>
               <a:defRPr sz="3600" b="1">
                 <a:solidFill>
                   <a:srgbClr val="FFFFFF"/>
@@ -13234,6 +15209,9 @@
           <a:lstStyle/>
           <a:p>
             <a:pPr algn="ctr">
+              <a:spcAft>
+                <a:spcPts val="200"/>
+              </a:spcAft>
               <a:defRPr sz="1800" b="0">
                 <a:solidFill>
                   <a:srgbClr val="B4D6FA"/>
@@ -13274,6 +15252,9 @@
           <a:lstStyle/>
           <a:p>
             <a:pPr algn="ctr">
+              <a:spcAft>
+                <a:spcPts val="200"/>
+              </a:spcAft>
               <a:defRPr sz="1500" b="1">
                 <a:solidFill>
                   <a:srgbClr val="FFFFFF"/>
@@ -13282,7 +15263,7 @@
               </a:defRPr>
             </a:pPr>
             <a:r>
-              <a:t>William Chen  •  Apache Gluten PMC Member  •  Microsoft</a:t>
+              <a:t>William Chen  |  Apache Gluten PMC Member  |  Microsoft</a:t>
             </a:r>
           </a:p>
         </p:txBody>
@@ -13310,6 +15291,9 @@
           <a:lstStyle/>
           <a:p>
             <a:pPr algn="ctr">
+              <a:spcAft>
+                <a:spcPts val="200"/>
+              </a:spcAft>
               <a:defRPr sz="1200" b="0">
                 <a:solidFill>
                   <a:srgbClr val="B4D6FA"/>
@@ -13318,7 +15302,7 @@
               </a:defRPr>
             </a:pPr>
             <a:r>
-              <a:t>📧  williamchen@microsoft.com</a:t>
+              <a:t>williamchen@microsoft.com</a:t>
             </a:r>
           </a:p>
         </p:txBody>
@@ -13346,6 +15330,9 @@
           <a:lstStyle/>
           <a:p>
             <a:pPr algn="ctr">
+              <a:spcAft>
+                <a:spcPts val="200"/>
+              </a:spcAft>
               <a:defRPr sz="1500" b="1">
                 <a:solidFill>
                   <a:srgbClr val="FFFFFF"/>
@@ -13354,7 +15341,7 @@
               </a:defRPr>
             </a:pPr>
             <a:r>
-              <a:t>Ajith Shetty  •  Microsoft</a:t>
+              <a:t>Ajith Shetty  |  Microsoft</a:t>
             </a:r>
           </a:p>
         </p:txBody>
@@ -13382,6 +15369,9 @@
           <a:lstStyle/>
           <a:p>
             <a:pPr algn="ctr">
+              <a:spcAft>
+                <a:spcPts val="200"/>
+              </a:spcAft>
               <a:defRPr sz="1200" b="0">
                 <a:solidFill>
                   <a:srgbClr val="B4D6FA"/>
@@ -13390,7 +15380,7 @@
               </a:defRPr>
             </a:pPr>
             <a:r>
-              <a:t>📧  ajithshetty@microsoft.com</a:t>
+              <a:t>ajithshetty@microsoft.com</a:t>
             </a:r>
           </a:p>
         </p:txBody>
@@ -13418,6 +15408,9 @@
           <a:lstStyle/>
           <a:p>
             <a:pPr algn="ctr">
+              <a:spcAft>
+                <a:spcPts val="200"/>
+              </a:spcAft>
               <a:defRPr sz="1200" b="0">
                 <a:solidFill>
                   <a:srgbClr val="8EC8FF"/>
@@ -13426,7 +15419,7 @@
               </a:defRPr>
             </a:pPr>
             <a:r>
-              <a:t>🔗  github.com/apache/gluten</a:t>
+              <a:t>github.com/apache/gluten</a:t>
             </a:r>
           </a:p>
         </p:txBody>
@@ -13454,6 +15447,9 @@
           <a:lstStyle/>
           <a:p>
             <a:pPr algn="ctr">
+              <a:spcAft>
+                <a:spcPts val="200"/>
+              </a:spcAft>
               <a:defRPr sz="1200" b="0">
                 <a:solidFill>
                   <a:srgbClr val="8EC8FF"/>
@@ -13462,7 +15458,7 @@
               </a:defRPr>
             </a:pPr>
             <a:r>
-              <a:t>🔗  github.com/facebookincubator/velox</a:t>
+              <a:t>github.com/facebookincubator/velox</a:t>
             </a:r>
           </a:p>
         </p:txBody>
@@ -13490,6 +15486,9 @@
           <a:lstStyle/>
           <a:p>
             <a:pPr algn="ctr">
+              <a:spcAft>
+                <a:spcPts val="200"/>
+              </a:spcAft>
               <a:defRPr sz="1200" b="0">
                 <a:solidFill>
                   <a:srgbClr val="8EC8FF"/>
@@ -13498,7 +15497,7 @@
               </a:defRPr>
             </a:pPr>
             <a:r>
-              <a:t>🔗  learn.microsoft.com/fabric/data-engineering/native-execution-engine-overview</a:t>
+              <a:t>learn.microsoft.com/fabric/data-engineering/native-execution-engine-overview</a:t>
             </a:r>
           </a:p>
         </p:txBody>
@@ -13526,6 +15525,9 @@
           <a:lstStyle/>
           <a:p>
             <a:pPr algn="ctr">
+              <a:spcAft>
+                <a:spcPts val="200"/>
+              </a:spcAft>
               <a:defRPr sz="1300" b="0">
                 <a:solidFill>
                   <a:srgbClr val="B4D6FA"/>
@@ -13534,7 +15536,7 @@
               </a:defRPr>
             </a:pPr>
             <a:r>
-              <a:t>Our commitment: upstream first, product at scale, and a stronger shared Velox ecosystem for everyone.</a:t>
+              <a:t>Shared commitment: upstream innovation, production hardening at scale, and shared progress across the Velox ecosystem.</a:t>
             </a:r>
           </a:p>
         </p:txBody>
@@ -13562,6 +15564,9 @@
           <a:lstStyle/>
           <a:p>
             <a:pPr algn="ctr">
+              <a:spcAft>
+                <a:spcPts val="200"/>
+              </a:spcAft>
               <a:defRPr sz="1000" b="0">
                 <a:solidFill>
                   <a:srgbClr val="8EC8FF"/>
@@ -13570,7 +15575,7 @@
               </a:defRPr>
             </a:pPr>
             <a:r>
-              <a:t>VeloxCon 2026  •  April 30  •  Meta HQ, Menlo Park</a:t>
+              <a:t>VeloxCon 2026  |  April 30  |  Meta HQ, Menlo Park</a:t>
             </a:r>
           </a:p>
         </p:txBody>
@@ -13667,6 +15672,9 @@
           <a:lstStyle/>
           <a:p>
             <a:pPr algn="l">
+              <a:spcAft>
+                <a:spcPts val="200"/>
+              </a:spcAft>
               <a:defRPr sz="4800" b="1">
                 <a:solidFill>
                   <a:srgbClr val="FFFFFF"/>
@@ -13703,6 +15711,9 @@
           <a:lstStyle/>
           <a:p>
             <a:pPr algn="l">
+              <a:spcAft>
+                <a:spcPts val="200"/>
+              </a:spcAft>
               <a:defRPr sz="3600" b="1">
                 <a:solidFill>
                   <a:srgbClr val="FFFFFF"/>
@@ -13739,6 +15750,9 @@
           <a:lstStyle/>
           <a:p>
             <a:pPr algn="l">
+              <a:spcAft>
+                <a:spcPts val="200"/>
+              </a:spcAft>
               <a:defRPr sz="1800" b="0">
                 <a:solidFill>
                   <a:srgbClr val="B4D6FA"/>
@@ -13779,6 +15793,7 @@
                 <a:solidFill>
                   <a:srgbClr val="B4D6FA"/>
                 </a:solidFill>
+                <a:latin typeface="Segoe UI"/>
               </a:defRPr>
             </a:pPr>
             <a:r>
@@ -13828,6 +15843,9 @@
           <a:lstStyle/>
           <a:p>
             <a:pPr algn="l">
+              <a:spcAft>
+                <a:spcPts val="200"/>
+              </a:spcAft>
               <a:defRPr sz="3200" b="1">
                 <a:solidFill>
                   <a:srgbClr val="323130"/>
@@ -13952,6 +15970,9 @@
           <a:lstStyle/>
           <a:p>
             <a:pPr algn="l">
+              <a:spcAft>
+                <a:spcPts val="200"/>
+              </a:spcAft>
               <a:defRPr sz="1500" b="1">
                 <a:solidFill>
                   <a:srgbClr val="323130"/>
@@ -13974,7 +15995,7 @@
         <p:spPr>
           <a:xfrm>
             <a:off x="731520" y="1828800"/>
-            <a:ext cx="10515600" cy="1280160"/>
+            <a:ext cx="10515600" cy="1188720"/>
           </a:xfrm>
           <a:prstGeom prst="roundRect">
             <a:avLst/>
@@ -14017,7 +16038,7 @@
         <p:spPr>
           <a:xfrm>
             <a:off x="731520" y="1828800"/>
-            <a:ext cx="73152" cy="1280160"/>
+            <a:ext cx="73152" cy="1188720"/>
           </a:xfrm>
           <a:prstGeom prst="rect">
             <a:avLst/>
@@ -14059,8 +16080,8 @@
         </p:nvSpPr>
         <p:spPr>
           <a:xfrm>
-            <a:off x="1005840" y="1920240"/>
-            <a:ext cx="10058400" cy="1097280"/>
+            <a:off x="914400" y="1901952"/>
+            <a:ext cx="10241280" cy="1051560"/>
           </a:xfrm>
           <a:prstGeom prst="rect">
             <a:avLst/>
@@ -14074,13 +16095,13 @@
           <a:lstStyle/>
           <a:p>
             <a:r>
-              <a:rPr sz="1400" b="1">
+              <a:rPr sz="1300" b="1">
                 <a:solidFill>
                   <a:srgbClr val="0078D4"/>
                 </a:solidFill>
                 <a:latin typeface="Segoe UI"/>
               </a:rPr>
-              <a:t>Our thesis: </a:t>
+              <a:t>Hypothesis: </a:t>
             </a:r>
             <a:r>
               <a:rPr sz="1300">
@@ -14089,7 +16110,7 @@
                 </a:solidFill>
                 <a:latin typeface="Segoe UI"/>
               </a:rPr>
-              <a:t>Production feedback loops accelerate open-source maturity. At Fabric scale, we discover semantic gaps, edge-case bugs, and performance bottlenecks orders of magnitude faster than synthetic benchmarks — and upstream fixes within sprints. This production-to-upstream cycle helped Gluten reach TLP graduation.</a:t>
+              <a:t>Production feedback loops accelerate open-source maturity. At Fabric scale, we discover semantic gaps, edge-case bugs, and performance bottlenecks faster than synthetic benchmarks — and upstream fixes within sprints. This production-to-upstream cycle helped Gluten reach TLP graduation.</a:t>
             </a:r>
           </a:p>
         </p:txBody>
@@ -14102,8 +16123,8 @@
         </p:nvSpPr>
         <p:spPr>
           <a:xfrm>
-            <a:off x="731520" y="3383280"/>
-            <a:ext cx="3291840" cy="1051560"/>
+            <a:off x="731520" y="3291840"/>
+            <a:ext cx="3291840" cy="1005840"/>
           </a:xfrm>
           <a:prstGeom prst="roundRect">
             <a:avLst/>
@@ -14147,7 +16168,7 @@
         </p:nvSpPr>
         <p:spPr>
           <a:xfrm>
-            <a:off x="731520" y="3493008"/>
+            <a:off x="731520" y="3401568"/>
             <a:ext cx="3291840" cy="411480"/>
           </a:xfrm>
           <a:prstGeom prst="rect">
@@ -14162,6 +16183,9 @@
           <a:lstStyle/>
           <a:p>
             <a:pPr algn="ctr">
+              <a:spcAft>
+                <a:spcPts val="200"/>
+              </a:spcAft>
               <a:defRPr sz="2800" b="1">
                 <a:solidFill>
                   <a:srgbClr val="0078D4"/>
@@ -14170,7 +16194,7 @@
               </a:defRPr>
             </a:pPr>
             <a:r>
-              <a:t>🏭</a:t>
+              <a:t>Production User</a:t>
             </a:r>
           </a:p>
         </p:txBody>
@@ -14183,7 +16207,7 @@
         </p:nvSpPr>
         <p:spPr>
           <a:xfrm>
-            <a:off x="804672" y="3886200"/>
+            <a:off x="804672" y="3794760"/>
             <a:ext cx="3145536" cy="320040"/>
           </a:xfrm>
           <a:prstGeom prst="rect">
@@ -14198,6 +16222,9 @@
           <a:lstStyle/>
           <a:p>
             <a:pPr algn="ctr">
+              <a:spcAft>
+                <a:spcPts val="200"/>
+              </a:spcAft>
               <a:defRPr sz="1000" b="0">
                 <a:solidFill>
                   <a:srgbClr val="323130"/>
@@ -14205,10 +16232,6 @@
                 <a:latin typeface="Segoe UI"/>
               </a:defRPr>
             </a:pPr>
-            <a:r>
-              <a:t>Production User</a:t>
-            </a:r>
-            <a:br/>
             <a:r>
               <a:t>Fabric NEE at scale</a:t>
             </a:r>
@@ -14223,8 +16246,8 @@
         </p:nvSpPr>
         <p:spPr>
           <a:xfrm>
-            <a:off x="4389120" y="3383280"/>
-            <a:ext cx="3291840" cy="1051560"/>
+            <a:off x="4389120" y="3291840"/>
+            <a:ext cx="3291840" cy="1005840"/>
           </a:xfrm>
           <a:prstGeom prst="roundRect">
             <a:avLst/>
@@ -14268,7 +16291,7 @@
         </p:nvSpPr>
         <p:spPr>
           <a:xfrm>
-            <a:off x="4389120" y="3493008"/>
+            <a:off x="4389120" y="3401568"/>
             <a:ext cx="3291840" cy="411480"/>
           </a:xfrm>
           <a:prstGeom prst="rect">
@@ -14283,6 +16306,9 @@
           <a:lstStyle/>
           <a:p>
             <a:pPr algn="ctr">
+              <a:spcAft>
+                <a:spcPts val="200"/>
+              </a:spcAft>
               <a:defRPr sz="2800" b="1">
                 <a:solidFill>
                   <a:srgbClr val="107C10"/>
@@ -14291,7 +16317,7 @@
               </a:defRPr>
             </a:pPr>
             <a:r>
-              <a:t>🔧</a:t>
+              <a:t>Upstream Contributor</a:t>
             </a:r>
           </a:p>
         </p:txBody>
@@ -14304,7 +16330,7 @@
         </p:nvSpPr>
         <p:spPr>
           <a:xfrm>
-            <a:off x="4462272" y="3886200"/>
+            <a:off x="4462272" y="3794760"/>
             <a:ext cx="3145536" cy="320040"/>
           </a:xfrm>
           <a:prstGeom prst="rect">
@@ -14319,6 +16345,9 @@
           <a:lstStyle/>
           <a:p>
             <a:pPr algn="ctr">
+              <a:spcAft>
+                <a:spcPts val="200"/>
+              </a:spcAft>
               <a:defRPr sz="1000" b="0">
                 <a:solidFill>
                   <a:srgbClr val="323130"/>
@@ -14326,10 +16355,6 @@
                 <a:latin typeface="Segoe UI"/>
               </a:defRPr>
             </a:pPr>
-            <a:r>
-              <a:t>Upstream Contributor</a:t>
-            </a:r>
-            <a:br/>
             <a:r>
               <a:t>Gluten + Velox + Spark</a:t>
             </a:r>
@@ -14344,8 +16369,8 @@
         </p:nvSpPr>
         <p:spPr>
           <a:xfrm>
-            <a:off x="8046720" y="3383280"/>
-            <a:ext cx="3291840" cy="1051560"/>
+            <a:off x="8046720" y="3291840"/>
+            <a:ext cx="3291840" cy="1005840"/>
           </a:xfrm>
           <a:prstGeom prst="roundRect">
             <a:avLst/>
@@ -14389,7 +16414,7 @@
         </p:nvSpPr>
         <p:spPr>
           <a:xfrm>
-            <a:off x="8046720" y="3493008"/>
+            <a:off x="8046720" y="3401568"/>
             <a:ext cx="3291840" cy="411480"/>
           </a:xfrm>
           <a:prstGeom prst="rect">
@@ -14404,6 +16429,9 @@
           <a:lstStyle/>
           <a:p>
             <a:pPr algn="ctr">
+              <a:spcAft>
+                <a:spcPts val="200"/>
+              </a:spcAft>
               <a:defRPr sz="2800" b="1">
                 <a:solidFill>
                   <a:srgbClr val="886CE4"/>
@@ -14412,7 +16440,7 @@
               </a:defRPr>
             </a:pPr>
             <a:r>
-              <a:t>🌍</a:t>
+              <a:t>Community Partner</a:t>
             </a:r>
           </a:p>
         </p:txBody>
@@ -14425,7 +16453,7 @@
         </p:nvSpPr>
         <p:spPr>
           <a:xfrm>
-            <a:off x="8119872" y="3886200"/>
+            <a:off x="8119872" y="3794760"/>
             <a:ext cx="3145536" cy="320040"/>
           </a:xfrm>
           <a:prstGeom prst="rect">
@@ -14440,6 +16468,9 @@
           <a:lstStyle/>
           <a:p>
             <a:pPr algn="ctr">
+              <a:spcAft>
+                <a:spcPts val="200"/>
+              </a:spcAft>
               <a:defRPr sz="1000" b="0">
                 <a:solidFill>
                   <a:srgbClr val="323130"/>
@@ -14447,10 +16478,6 @@
                 <a:latin typeface="Segoe UI"/>
               </a:defRPr>
             </a:pPr>
-            <a:r>
-              <a:t>Community Partner</a:t>
-            </a:r>
-            <a:br/>
             <a:r>
               <a:t>PMC &amp; committer seat</a:t>
             </a:r>
@@ -14465,7 +16492,7 @@
         </p:nvSpPr>
         <p:spPr>
           <a:xfrm>
-            <a:off x="731520" y="4663440"/>
+            <a:off x="731520" y="4526280"/>
             <a:ext cx="10515600" cy="457200"/>
           </a:xfrm>
           <a:prstGeom prst="rect">
@@ -14480,6 +16507,9 @@
           <a:lstStyle/>
           <a:p>
             <a:pPr algn="ctr">
+              <a:spcAft>
+                <a:spcPts val="200"/>
+              </a:spcAft>
               <a:defRPr sz="1200" b="0">
                 <a:solidFill>
                   <a:srgbClr val="605E5C"/>
@@ -14488,7 +16518,7 @@
               </a:defRPr>
             </a:pPr>
             <a:r>
-              <a:t>Our default posture is upstream-first: validate at Fabric scale, contribute fixes in the open, and productize on top of the shared foundation.</a:t>
+              <a:t>The upstream-first pattern: validate at scale, contribute in the open, ship products based on the shared foundation.</a:t>
             </a:r>
           </a:p>
         </p:txBody>
@@ -14501,8 +16531,8 @@
         </p:nvSpPr>
         <p:spPr>
           <a:xfrm>
-            <a:off x="731520" y="5029200"/>
-            <a:ext cx="10515600" cy="274320"/>
+            <a:off x="731520" y="4937760"/>
+            <a:ext cx="10515600" cy="228600"/>
           </a:xfrm>
           <a:prstGeom prst="rect">
             <a:avLst/>
@@ -14516,6 +16546,9 @@
           <a:lstStyle/>
           <a:p>
             <a:pPr algn="l">
+              <a:spcAft>
+                <a:spcPts val="200"/>
+              </a:spcAft>
               <a:defRPr sz="900" b="0">
                 <a:solidFill>
                   <a:srgbClr val="605E5C"/>
@@ -14551,15 +16584,16 @@
           </a:bodyPr>
           <a:lstStyle/>
           <a:p>
-            <a:pPr algn="l">
+            <a:pPr>
               <a:defRPr sz="900">
                 <a:solidFill>
                   <a:srgbClr val="605E5C"/>
                 </a:solidFill>
+                <a:latin typeface="Segoe UI"/>
               </a:defRPr>
             </a:pPr>
             <a:r>
-              <a:t>VeloxCon 2026  •  April 30  •  Meta HQ, Menlo Park</a:t>
+              <a:t>VeloxCon 2026  |  April 30  |  Meta HQ, Menlo Park</a:t>
             </a:r>
           </a:p>
         </p:txBody>
@@ -14591,6 +16625,7 @@
                 <a:solidFill>
                   <a:srgbClr val="605E5C"/>
                 </a:solidFill>
+                <a:latin typeface="Segoe UI"/>
               </a:defRPr>
             </a:pPr>
             <a:r>
@@ -14640,6 +16675,9 @@
           <a:lstStyle/>
           <a:p>
             <a:pPr algn="l">
+              <a:spcAft>
+                <a:spcPts val="200"/>
+              </a:spcAft>
               <a:defRPr sz="3200" b="1">
                 <a:solidFill>
                   <a:srgbClr val="323130"/>
@@ -14719,6 +16757,9 @@
           <a:lstStyle/>
           <a:p>
             <a:pPr algn="l">
+              <a:spcAft>
+                <a:spcPts val="200"/>
+              </a:spcAft>
               <a:defRPr sz="1400" b="0">
                 <a:solidFill>
                   <a:srgbClr val="323130"/>
@@ -14727,7 +16768,7 @@
               </a:defRPr>
             </a:pPr>
             <a:r>
-              <a:t>Fabric runs Spark at massive scale. We needed dramatic speedups — no application rewrites, no extra cost.</a:t>
+              <a:t>Fabric runs Spark at large scale. We needed material performance gains without requiring application rewrites or a separate premium runtime.</a:t>
             </a:r>
           </a:p>
         </p:txBody>
@@ -14742,7 +16783,7 @@
         </p:nvGraphicFramePr>
         <p:xfrm>
           <a:off x="731520" y="1737360"/>
-          <a:ext cx="10515600" cy="1828800"/>
+          <a:ext cx="10515600" cy="1920240"/>
         </p:xfrm>
         <a:graphic>
           <a:graphicData uri="http://schemas.openxmlformats.org/drawingml/2006/table">
@@ -14754,13 +16795,16 @@
                 <a:gridCol w="3200400"/>
                 <a:gridCol w="7315200"/>
               </a:tblGrid>
-              <a:tr h="365760">
+              <a:tr h="384048">
                 <a:tc>
                   <a:txBody>
-                    <a:bodyPr/>
+                    <a:bodyPr wrap="square"/>
                     <a:lstStyle/>
                     <a:p>
                       <a:pPr>
+                        <a:spcAft>
+                          <a:spcPts val="100"/>
+                        </a:spcAft>
                         <a:defRPr sz="1200" b="1">
                           <a:solidFill>
                             <a:srgbClr val="FFFFFF"/>
@@ -14773,7 +16817,7 @@
                       </a:r>
                     </a:p>
                   </a:txBody>
-                  <a:tcPr>
+                  <a:tcPr marL="101600" marR="101600" marT="50800" marB="50800">
                     <a:solidFill>
                       <a:srgbClr val="0078D4"/>
                     </a:solidFill>
@@ -14781,10 +16825,13 @@
                 </a:tc>
                 <a:tc>
                   <a:txBody>
-                    <a:bodyPr/>
+                    <a:bodyPr wrap="square"/>
                     <a:lstStyle/>
                     <a:p>
                       <a:pPr>
+                        <a:spcAft>
+                          <a:spcPts val="100"/>
+                        </a:spcAft>
                         <a:defRPr sz="1200" b="1">
                           <a:solidFill>
                             <a:srgbClr val="FFFFFF"/>
@@ -14797,20 +16844,23 @@
                       </a:r>
                     </a:p>
                   </a:txBody>
-                  <a:tcPr>
+                  <a:tcPr marL="101600" marR="101600" marT="50800" marB="50800">
                     <a:solidFill>
                       <a:srgbClr val="0078D4"/>
                     </a:solidFill>
                   </a:tcPr>
                 </a:tc>
               </a:tr>
-              <a:tr h="365760">
+              <a:tr h="384048">
                 <a:tc>
                   <a:txBody>
-                    <a:bodyPr/>
+                    <a:bodyPr wrap="square"/>
                     <a:lstStyle/>
                     <a:p>
                       <a:pPr>
+                        <a:spcAft>
+                          <a:spcPts val="100"/>
+                        </a:spcAft>
                         <a:defRPr sz="1200">
                           <a:solidFill>
                             <a:srgbClr val="323130"/>
@@ -14823,7 +16873,7 @@
                       </a:r>
                     </a:p>
                   </a:txBody>
-                  <a:tcPr>
+                  <a:tcPr marL="101600" marR="101600" marT="50800" marB="50800">
                     <a:solidFill>
                       <a:srgbClr val="FFFFFF"/>
                     </a:solidFill>
@@ -14831,10 +16881,13 @@
                 </a:tc>
                 <a:tc>
                   <a:txBody>
-                    <a:bodyPr/>
+                    <a:bodyPr wrap="square"/>
                     <a:lstStyle/>
                     <a:p>
                       <a:pPr>
+                        <a:spcAft>
+                          <a:spcPts val="100"/>
+                        </a:spcAft>
                         <a:defRPr sz="1200">
                           <a:solidFill>
                             <a:srgbClr val="323130"/>
@@ -14847,20 +16900,23 @@
                       </a:r>
                     </a:p>
                   </a:txBody>
-                  <a:tcPr>
+                  <a:tcPr marL="101600" marR="101600" marT="50800" marB="50800">
                     <a:solidFill>
                       <a:srgbClr val="FFFFFF"/>
                     </a:solidFill>
                   </a:tcPr>
                 </a:tc>
               </a:tr>
-              <a:tr h="365760">
+              <a:tr h="384048">
                 <a:tc>
                   <a:txBody>
-                    <a:bodyPr/>
+                    <a:bodyPr wrap="square"/>
                     <a:lstStyle/>
                     <a:p>
                       <a:pPr>
+                        <a:spcAft>
+                          <a:spcPts val="100"/>
+                        </a:spcAft>
                         <a:defRPr sz="1200">
                           <a:solidFill>
                             <a:srgbClr val="323130"/>
@@ -14873,7 +16929,7 @@
                       </a:r>
                     </a:p>
                   </a:txBody>
-                  <a:tcPr>
+                  <a:tcPr marL="101600" marR="101600" marT="50800" marB="50800">
                     <a:solidFill>
                       <a:srgbClr val="FAF9F8"/>
                     </a:solidFill>
@@ -14881,10 +16937,13 @@
                 </a:tc>
                 <a:tc>
                   <a:txBody>
-                    <a:bodyPr/>
+                    <a:bodyPr wrap="square"/>
                     <a:lstStyle/>
                     <a:p>
                       <a:pPr>
+                        <a:spcAft>
+                          <a:spcPts val="100"/>
+                        </a:spcAft>
                         <a:defRPr sz="1200">
                           <a:solidFill>
                             <a:srgbClr val="323130"/>
@@ -14897,20 +16956,23 @@
                       </a:r>
                     </a:p>
                   </a:txBody>
-                  <a:tcPr>
+                  <a:tcPr marL="101600" marR="101600" marT="50800" marB="50800">
                     <a:solidFill>
                       <a:srgbClr val="FAF9F8"/>
                     </a:solidFill>
                   </a:tcPr>
                 </a:tc>
               </a:tr>
-              <a:tr h="365760">
+              <a:tr h="384048">
                 <a:tc>
                   <a:txBody>
-                    <a:bodyPr/>
+                    <a:bodyPr wrap="square"/>
                     <a:lstStyle/>
                     <a:p>
                       <a:pPr>
+                        <a:spcAft>
+                          <a:spcPts val="100"/>
+                        </a:spcAft>
                         <a:defRPr sz="1200">
                           <a:solidFill>
                             <a:srgbClr val="323130"/>
@@ -14923,7 +16985,7 @@
                       </a:r>
                     </a:p>
                   </a:txBody>
-                  <a:tcPr>
+                  <a:tcPr marL="101600" marR="101600" marT="50800" marB="50800">
                     <a:solidFill>
                       <a:srgbClr val="FFFFFF"/>
                     </a:solidFill>
@@ -14931,10 +16993,13 @@
                 </a:tc>
                 <a:tc>
                   <a:txBody>
-                    <a:bodyPr/>
+                    <a:bodyPr wrap="square"/>
                     <a:lstStyle/>
                     <a:p>
                       <a:pPr>
+                        <a:spcAft>
+                          <a:spcPts val="100"/>
+                        </a:spcAft>
                         <a:defRPr sz="1200">
                           <a:solidFill>
                             <a:srgbClr val="323130"/>
@@ -14947,20 +17012,23 @@
                       </a:r>
                     </a:p>
                   </a:txBody>
-                  <a:tcPr>
+                  <a:tcPr marL="101600" marR="101600" marT="50800" marB="50800">
                     <a:solidFill>
                       <a:srgbClr val="FFFFFF"/>
                     </a:solidFill>
                   </a:tcPr>
                 </a:tc>
               </a:tr>
-              <a:tr h="365760">
+              <a:tr h="384048">
                 <a:tc>
                   <a:txBody>
-                    <a:bodyPr/>
+                    <a:bodyPr wrap="square"/>
                     <a:lstStyle/>
                     <a:p>
                       <a:pPr>
+                        <a:spcAft>
+                          <a:spcPts val="100"/>
+                        </a:spcAft>
                         <a:defRPr sz="1200" b="1">
                           <a:solidFill>
                             <a:srgbClr val="0078D4"/>
@@ -14973,7 +17041,7 @@
                       </a:r>
                     </a:p>
                   </a:txBody>
-                  <a:tcPr>
+                  <a:tcPr marL="101600" marR="101600" marT="50800" marB="50800">
                     <a:solidFill>
                       <a:srgbClr val="EBF3FB"/>
                     </a:solidFill>
@@ -14981,10 +17049,13 @@
                 </a:tc>
                 <a:tc>
                   <a:txBody>
-                    <a:bodyPr/>
+                    <a:bodyPr wrap="square"/>
                     <a:lstStyle/>
                     <a:p>
                       <a:pPr>
+                        <a:spcAft>
+                          <a:spcPts val="100"/>
+                        </a:spcAft>
                         <a:defRPr sz="1200" b="1">
                           <a:solidFill>
                             <a:srgbClr val="0078D4"/>
@@ -14993,11 +17064,11 @@
                         </a:defRPr>
                       </a:pPr>
                       <a:r>
-                        <a:t>Meta-proven at exabyte scale, modular plugin architecture, active multi-company community</a:t>
+                        <a:t>Production-proven execution engine, modular integration model, active multi-company community</a:t>
                       </a:r>
                     </a:p>
                   </a:txBody>
-                  <a:tcPr>
+                  <a:tcPr marL="101600" marR="101600" marT="50800" marB="50800">
                     <a:solidFill>
                       <a:srgbClr val="EBF3FB"/>
                     </a:solidFill>
@@ -15017,7 +17088,7 @@
         <p:spPr>
           <a:xfrm>
             <a:off x="731520" y="4206240"/>
-            <a:ext cx="10515600" cy="1005840"/>
+            <a:ext cx="10515600" cy="914400"/>
           </a:xfrm>
           <a:prstGeom prst="roundRect">
             <a:avLst/>
@@ -15060,7 +17131,7 @@
         <p:spPr>
           <a:xfrm>
             <a:off x="731520" y="4206240"/>
-            <a:ext cx="73152" cy="1005840"/>
+            <a:ext cx="73152" cy="914400"/>
           </a:xfrm>
           <a:prstGeom prst="rect">
             <a:avLst/>
@@ -15102,8 +17173,8 @@
         </p:nvSpPr>
         <p:spPr>
           <a:xfrm>
-            <a:off x="1005840" y="4297680"/>
-            <a:ext cx="10058400" cy="822960"/>
+            <a:off x="914400" y="4279392"/>
+            <a:ext cx="10241280" cy="777240"/>
           </a:xfrm>
           <a:prstGeom prst="rect">
             <a:avLst/>
@@ -15123,7 +17194,7 @@
                 </a:solidFill>
                 <a:latin typeface="Segoe UI"/>
               </a:rPr>
-              <a:t>The flywheel: </a:t>
+              <a:t>Community flywheel: </a:t>
             </a:r>
             <a:r>
               <a:rPr sz="1300">
@@ -15132,7 +17203,7 @@
                 </a:solidFill>
                 <a:latin typeface="Segoe UI"/>
               </a:rPr>
-              <a:t>Deploy in production → discover issues at scale → contribute upstream fixes → entire community benefits (including Fabric) → repeat. Both the OSS project and all downstream consumers improve together.</a:t>
+              <a:t>Production adopters discover issues at scale → upstream fixes → Meta, Microsoft, Intel, Kyligence, and all adopters benefit → repeat.</a:t>
             </a:r>
           </a:p>
         </p:txBody>
@@ -15159,15 +17230,16 @@
           </a:bodyPr>
           <a:lstStyle/>
           <a:p>
-            <a:pPr algn="l">
+            <a:pPr>
               <a:defRPr sz="900">
                 <a:solidFill>
                   <a:srgbClr val="605E5C"/>
                 </a:solidFill>
+                <a:latin typeface="Segoe UI"/>
               </a:defRPr>
             </a:pPr>
             <a:r>
-              <a:t>VeloxCon 2026  •  April 30  •  Meta HQ, Menlo Park</a:t>
+              <a:t>VeloxCon 2026  |  April 30  |  Meta HQ, Menlo Park</a:t>
             </a:r>
           </a:p>
         </p:txBody>
@@ -15199,6 +17271,7 @@
                 <a:solidFill>
                   <a:srgbClr val="605E5C"/>
                 </a:solidFill>
+                <a:latin typeface="Segoe UI"/>
               </a:defRPr>
             </a:pPr>
             <a:r>
@@ -15299,6 +17372,9 @@
           <a:lstStyle/>
           <a:p>
             <a:pPr algn="l">
+              <a:spcAft>
+                <a:spcPts val="200"/>
+              </a:spcAft>
               <a:defRPr sz="4800" b="1">
                 <a:solidFill>
                   <a:srgbClr val="FFFFFF"/>
@@ -15335,6 +17411,9 @@
           <a:lstStyle/>
           <a:p>
             <a:pPr algn="l">
+              <a:spcAft>
+                <a:spcPts val="200"/>
+              </a:spcAft>
               <a:defRPr sz="3600" b="1">
                 <a:solidFill>
                   <a:srgbClr val="FFFFFF"/>
@@ -15371,6 +17450,9 @@
           <a:lstStyle/>
           <a:p>
             <a:pPr algn="l">
+              <a:spcAft>
+                <a:spcPts val="200"/>
+              </a:spcAft>
               <a:defRPr sz="1800" b="0">
                 <a:solidFill>
                   <a:srgbClr val="B4D6FA"/>
@@ -15411,6 +17493,7 @@
                 <a:solidFill>
                   <a:srgbClr val="B4D6FA"/>
                 </a:solidFill>
+                <a:latin typeface="Segoe UI"/>
               </a:defRPr>
             </a:pPr>
             <a:r>
@@ -15460,6 +17543,9 @@
           <a:lstStyle/>
           <a:p>
             <a:pPr algn="l">
+              <a:spcAft>
+                <a:spcPts val="200"/>
+              </a:spcAft>
               <a:defRPr sz="3200" b="1">
                 <a:solidFill>
                   <a:srgbClr val="323130"/>
@@ -15584,6 +17670,9 @@
           <a:lstStyle/>
           <a:p>
             <a:pPr algn="ctr">
+              <a:spcAft>
+                <a:spcPts val="200"/>
+              </a:spcAft>
               <a:defRPr sz="1400" b="1">
                 <a:solidFill>
                   <a:srgbClr val="323130"/>
@@ -15592,7 +17681,7 @@
               </a:defRPr>
             </a:pPr>
             <a:r>
-              <a:t>Spark Logical Plan</a:t>
+              <a:t>Spark Planning</a:t>
             </a:r>
           </a:p>
         </p:txBody>
@@ -15620,6 +17709,9 @@
           <a:lstStyle/>
           <a:p>
             <a:pPr algn="ctr">
+              <a:spcAft>
+                <a:spcPts val="200"/>
+              </a:spcAft>
               <a:defRPr sz="1100" b="0">
                 <a:solidFill>
                   <a:srgbClr val="605E5C"/>
@@ -15660,6 +17752,9 @@
           <a:lstStyle/>
           <a:p>
             <a:pPr algn="ctr">
+              <a:spcAft>
+                <a:spcPts val="200"/>
+              </a:spcAft>
               <a:defRPr sz="2800" b="1">
                 <a:solidFill>
                   <a:srgbClr val="0078D4"/>
@@ -15741,6 +17836,9 @@
           <a:lstStyle/>
           <a:p>
             <a:pPr algn="ctr">
+              <a:spcAft>
+                <a:spcPts val="200"/>
+              </a:spcAft>
               <a:defRPr sz="1400" b="1">
                 <a:solidFill>
                   <a:srgbClr val="323130"/>
@@ -15749,7 +17847,7 @@
               </a:defRPr>
             </a:pPr>
             <a:r>
-              <a:t>Gluten Intercept</a:t>
+              <a:t>Gluten Translation</a:t>
             </a:r>
           </a:p>
         </p:txBody>
@@ -15777,6 +17875,9 @@
           <a:lstStyle/>
           <a:p>
             <a:pPr algn="ctr">
+              <a:spcAft>
+                <a:spcPts val="200"/>
+              </a:spcAft>
               <a:defRPr sz="1100" b="0">
                 <a:solidFill>
                   <a:srgbClr val="605E5C"/>
@@ -15785,11 +17886,11 @@
               </a:defRPr>
             </a:pPr>
             <a:r>
-              <a:t>Physical plan → Substrait</a:t>
+              <a:t>Catalyst plan → Substrait IR</a:t>
             </a:r>
             <a:br/>
             <a:r>
-              <a:t>IR via JNI</a:t>
+              <a:t>→ Velox operators (via JNI)</a:t>
             </a:r>
           </a:p>
         </p:txBody>
@@ -15817,6 +17918,9 @@
           <a:lstStyle/>
           <a:p>
             <a:pPr algn="ctr">
+              <a:spcAft>
+                <a:spcPts val="200"/>
+              </a:spcAft>
               <a:defRPr sz="2800" b="1">
                 <a:solidFill>
                   <a:srgbClr val="0078D4"/>
@@ -15898,6 +18002,9 @@
           <a:lstStyle/>
           <a:p>
             <a:pPr algn="ctr">
+              <a:spcAft>
+                <a:spcPts val="200"/>
+              </a:spcAft>
               <a:defRPr sz="1400" b="1">
                 <a:solidFill>
                   <a:srgbClr val="323130"/>
@@ -15934,6 +18041,9 @@
           <a:lstStyle/>
           <a:p>
             <a:pPr algn="ctr">
+              <a:spcAft>
+                <a:spcPts val="200"/>
+              </a:spcAft>
               <a:defRPr sz="1100" b="0">
                 <a:solidFill>
                   <a:srgbClr val="605E5C"/>
@@ -15942,11 +18052,11 @@
               </a:defRPr>
             </a:pPr>
             <a:r>
-              <a:t>Vectorized C++ • SIMD</a:t>
+              <a:t>Vectorized C++ | SIMD</a:t>
             </a:r>
             <a:br/>
             <a:r>
-              <a:t>Columnar • Off-heap</a:t>
+              <a:t>Columnar | Off-heap</a:t>
             </a:r>
           </a:p>
         </p:txBody>
@@ -15974,6 +18084,9 @@
           <a:lstStyle/>
           <a:p>
             <a:pPr algn="ctr">
+              <a:spcAft>
+                <a:spcPts val="200"/>
+              </a:spcAft>
               <a:defRPr sz="1200" b="0">
                 <a:solidFill>
                   <a:srgbClr val="605E5C"/>
@@ -15982,7 +18095,7 @@
               </a:defRPr>
             </a:pPr>
             <a:r>
-              <a:t>Spark keeps planning, scheduling, retries, and fault tolerance. Gluten changes the execution path, not the programming model.</a:t>
+              <a:t>Gluten replaces Spark's row-based Volcano iterator with Velox's vectorized pipeline — Spark's planning, scheduling, and fault tolerance remain unchanged.</a:t>
             </a:r>
           </a:p>
         </p:txBody>
@@ -16010,6 +18123,9 @@
           <a:lstStyle/>
           <a:p>
             <a:pPr algn="l">
+              <a:spcAft>
+                <a:spcPts val="200"/>
+              </a:spcAft>
               <a:defRPr sz="1600" b="1">
                 <a:solidFill>
                   <a:srgbClr val="323130"/>
@@ -16032,7 +18148,7 @@
         <p:spPr>
           <a:xfrm>
             <a:off x="731520" y="3291840"/>
-            <a:ext cx="10515600" cy="2560320"/>
+            <a:ext cx="10515600" cy="2468880"/>
           </a:xfrm>
           <a:prstGeom prst="roundRect">
             <a:avLst/>
@@ -16077,7 +18193,7 @@
         <p:spPr>
           <a:xfrm>
             <a:off x="914400" y="3383280"/>
-            <a:ext cx="10149840" cy="2377440"/>
+            <a:ext cx="10149840" cy="2286000"/>
           </a:xfrm>
           <a:prstGeom prst="rect">
             <a:avLst/>
@@ -16091,6 +18207,9 @@
           <a:lstStyle/>
           <a:p>
             <a:pPr algn="l">
+              <a:spcAft>
+                <a:spcPts val="200"/>
+              </a:spcAft>
               <a:defRPr sz="1000" b="0">
                 <a:solidFill>
                   <a:srgbClr val="323130"/>
@@ -16144,7 +18263,7 @@
         </p:nvSpPr>
         <p:spPr>
           <a:xfrm>
-            <a:off x="731520" y="5943600"/>
+            <a:off x="731520" y="5897880"/>
             <a:ext cx="10515600" cy="365760"/>
           </a:xfrm>
           <a:prstGeom prst="rect">
@@ -16159,6 +18278,9 @@
           <a:lstStyle/>
           <a:p>
             <a:pPr algn="l">
+              <a:spcAft>
+                <a:spcPts val="200"/>
+              </a:spcAft>
               <a:defRPr sz="1200" b="1">
                 <a:solidFill>
                   <a:srgbClr val="0078D4"/>
@@ -16167,7 +18289,7 @@
               </a:defRPr>
             </a:pPr>
             <a:r>
-              <a:t>Win condition: Keep data columnar end-to-end and minimize ColumnarToRow / RowToColumnar transitions.</a:t>
+              <a:t>Goal: preserve end-to-end columnar execution and minimize ColumnarToRow / RowToColumnar transitions.</a:t>
             </a:r>
           </a:p>
         </p:txBody>
@@ -16194,15 +18316,16 @@
           </a:bodyPr>
           <a:lstStyle/>
           <a:p>
-            <a:pPr algn="l">
+            <a:pPr>
               <a:defRPr sz="900">
                 <a:solidFill>
                   <a:srgbClr val="605E5C"/>
                 </a:solidFill>
+                <a:latin typeface="Segoe UI"/>
               </a:defRPr>
             </a:pPr>
             <a:r>
-              <a:t>VeloxCon 2026  •  April 30  •  Meta HQ, Menlo Park</a:t>
+              <a:t>VeloxCon 2026  |  April 30  |  Meta HQ, Menlo Park</a:t>
             </a:r>
           </a:p>
         </p:txBody>
@@ -16234,6 +18357,7 @@
                 <a:solidFill>
                   <a:srgbClr val="605E5C"/>
                 </a:solidFill>
+                <a:latin typeface="Segoe UI"/>
               </a:defRPr>
             </a:pPr>
             <a:r>
@@ -16334,6 +18458,9 @@
           <a:lstStyle/>
           <a:p>
             <a:pPr algn="l">
+              <a:spcAft>
+                <a:spcPts val="200"/>
+              </a:spcAft>
               <a:defRPr sz="4800" b="1">
                 <a:solidFill>
                   <a:srgbClr val="FFFFFF"/>
@@ -16370,6 +18497,9 @@
           <a:lstStyle/>
           <a:p>
             <a:pPr algn="l">
+              <a:spcAft>
+                <a:spcPts val="200"/>
+              </a:spcAft>
               <a:defRPr sz="3600" b="1">
                 <a:solidFill>
                   <a:srgbClr val="FFFFFF"/>
@@ -16378,7 +18508,7 @@
               </a:defRPr>
             </a:pPr>
             <a:r>
-              <a:t>Production War Stories</a:t>
+              <a:t>Production Lessons</a:t>
             </a:r>
           </a:p>
         </p:txBody>
@@ -16406,6 +18536,9 @@
           <a:lstStyle/>
           <a:p>
             <a:pPr algn="l">
+              <a:spcAft>
+                <a:spcPts val="200"/>
+              </a:spcAft>
               <a:defRPr sz="1800" b="0">
                 <a:solidFill>
                   <a:srgbClr val="B4D6FA"/>
@@ -16414,7 +18547,7 @@
               </a:defRPr>
             </a:pPr>
             <a:r>
-              <a:t>Correctness, memory, and observability lessons from real workloads</a:t>
+              <a:t>Correctness, memory, and observability challenges from real workloads</a:t>
             </a:r>
           </a:p>
         </p:txBody>
@@ -16446,6 +18579,7 @@
                 <a:solidFill>
                   <a:srgbClr val="B4D6FA"/>
                 </a:solidFill>
+                <a:latin typeface="Segoe UI"/>
               </a:defRPr>
             </a:pPr>
             <a:r>
@@ -16495,6 +18629,9 @@
           <a:lstStyle/>
           <a:p>
             <a:pPr algn="l">
+              <a:spcAft>
+                <a:spcPts val="200"/>
+              </a:spcAft>
               <a:defRPr sz="3200" b="1">
                 <a:solidFill>
                   <a:srgbClr val="323130"/>
@@ -16503,7 +18640,7 @@
               </a:defRPr>
             </a:pPr>
             <a:r>
-              <a:t>The Memory War: 9 Months to Fix OOM</a:t>
+              <a:t>Solving Cross-Heap OOMs: A 9-Month Engineering Effort</a:t>
             </a:r>
           </a:p>
         </p:txBody>
@@ -16574,6 +18711,9 @@
           <a:lstStyle/>
           <a:p>
             <a:pPr algn="l">
+              <a:spcAft>
+                <a:spcPts val="200"/>
+              </a:spcAft>
               <a:defRPr sz="1800" b="1">
                 <a:solidFill>
                   <a:srgbClr val="D13438"/>
@@ -16610,6 +18750,9 @@
           <a:lstStyle/>
           <a:p>
             <a:pPr algn="l">
+              <a:spcAft>
+                <a:spcPts val="200"/>
+              </a:spcAft>
               <a:defRPr sz="1200" b="0">
                 <a:solidFill>
                   <a:srgbClr val="323130"/>
@@ -16618,7 +18761,7 @@
               </a:defRPr>
             </a:pPr>
             <a:r>
-              <a:t>Early 2025: TPC-DS queries that should take 5 minutes crash with OOM after 90 seconds. Spark's JVM on-heap allocator and Velox's off-heap allocator competed for the same RAM.</a:t>
+              <a:t>Early 2025: TPC-DS queries crash with OOM after 90 seconds — despite available memory. Without shared accounting, Velox's MmapAllocator and JVM heap competed independently — neither could react to global memory pressure.</a:t>
             </a:r>
           </a:p>
         </p:txBody>
@@ -16734,6 +18877,9 @@
           <a:lstStyle/>
           <a:p>
             <a:pPr algn="l">
+              <a:spcAft>
+                <a:spcPts val="200"/>
+              </a:spcAft>
               <a:defRPr sz="1300" b="1">
                 <a:solidFill>
                   <a:srgbClr val="D13438"/>
@@ -16742,7 +18888,7 @@
               </a:defRPr>
             </a:pPr>
             <a:r>
-              <a:t>Root Cause</a:t>
+              <a:t>Root Cause &amp; Symptom</a:t>
             </a:r>
           </a:p>
         </p:txBody>
@@ -16770,6 +18916,9 @@
           <a:lstStyle/>
           <a:p>
             <a:pPr algn="l">
+              <a:spcAft>
+                <a:spcPts val="200"/>
+              </a:spcAft>
               <a:defRPr sz="1100" b="0">
                 <a:solidFill>
                   <a:srgbClr val="605E5C"/>
@@ -16778,12 +18927,12 @@
               </a:defRPr>
             </a:pPr>
             <a:r>
-              <a:t>No unified memory accounting across JVM on-heap and Velox off-heap (via jemalloc). Velox allocated eagerly from OS while JVM GC ran under memory pressure, leading to container OOMs before either allocator could react.</a:t>
+              <a:t>No unified memory accounting across JVM on-heap and Velox off-heap (via jemalloc). Velox allocated from OS while JVM GC ran under pressure, causing container OOMs before either allocator could react.</a:t>
             </a:r>
             <a:br/>
             <a:br/>
             <a:r>
-              <a:t>Symptom: Large aggregations (GROUP BY with 100M+ groups) would OOM at ~60% reported memory — Velox off-heap invisible to Spark's memory manager.</a:t>
+              <a:t>Symptom: Large aggregations (GROUP BY with 100M+ groups) OOM at ~60% reported memory — Velox off-heap was invisible to Spark's memory manager.</a:t>
             </a:r>
           </a:p>
         </p:txBody>
@@ -16811,6 +18960,9 @@
           <a:lstStyle/>
           <a:p>
             <a:pPr algn="l">
+              <a:spcAft>
+                <a:spcPts val="200"/>
+              </a:spcAft>
               <a:defRPr sz="1800" b="1">
                 <a:solidFill>
                   <a:srgbClr val="107C10"/>
@@ -16847,6 +18999,9 @@
           <a:lstStyle/>
           <a:p>
             <a:pPr algn="l">
+              <a:spcAft>
+                <a:spcPts val="200"/>
+              </a:spcAft>
               <a:defRPr sz="1200" b="0">
                 <a:solidFill>
                   <a:srgbClr val="323130"/>
@@ -16855,7 +19010,7 @@
               </a:defRPr>
             </a:pPr>
             <a:r>
-              <a:t>9 months of engineering: dynamic memory negotiation between JVM and Velox:</a:t>
+              <a:t>9-month collaboration across Gluten, Velox, and Fabric teams:</a:t>
             </a:r>
           </a:p>
         </p:txBody>
@@ -16906,7 +19061,7 @@
                 </a:solidFill>
                 <a:latin typeface="Segoe UI"/>
               </a:rPr>
-              <a:t> Velox requests quota from Spark's memory manager before allocation</a:t>
+              <a:t> Velox requests quota from Spark's MemoryManager before allocation</a:t>
             </a:r>
           </a:p>
           <a:p>
@@ -17035,6 +19190,9 @@
           <a:lstStyle/>
           <a:p>
             <a:pPr algn="ctr">
+              <a:spcAft>
+                <a:spcPts val="200"/>
+              </a:spcAft>
               <a:defRPr sz="2800" b="1">
                 <a:solidFill>
                   <a:srgbClr val="107C10"/>
@@ -17071,6 +19229,9 @@
           <a:lstStyle/>
           <a:p>
             <a:pPr algn="ctr">
+              <a:spcAft>
+                <a:spcPts val="200"/>
+              </a:spcAft>
               <a:defRPr sz="1000" b="0">
                 <a:solidFill>
                   <a:srgbClr val="323130"/>
@@ -17111,6 +19272,9 @@
           <a:lstStyle/>
           <a:p>
             <a:pPr algn="ctr">
+              <a:spcAft>
+                <a:spcPts val="200"/>
+              </a:spcAft>
               <a:defRPr sz="800" b="0">
                 <a:solidFill>
                   <a:srgbClr val="605E5C"/>
@@ -17192,6 +19356,9 @@
           <a:lstStyle/>
           <a:p>
             <a:pPr algn="ctr">
+              <a:spcAft>
+                <a:spcPts val="200"/>
+              </a:spcAft>
               <a:defRPr sz="2800" b="1">
                 <a:solidFill>
                   <a:srgbClr val="0078D4"/>
@@ -17228,6 +19395,9 @@
           <a:lstStyle/>
           <a:p>
             <a:pPr algn="ctr">
+              <a:spcAft>
+                <a:spcPts val="200"/>
+              </a:spcAft>
               <a:defRPr sz="1000" b="0">
                 <a:solidFill>
                   <a:srgbClr val="323130"/>
@@ -17236,7 +19406,7 @@
               </a:defRPr>
             </a:pPr>
             <a:r>
-              <a:t>Fabric + Gluten community</a:t>
+              <a:t>Gluten 1.3.0 + community</a:t>
             </a:r>
           </a:p>
         </p:txBody>
@@ -17264,6 +19434,9 @@
           <a:lstStyle/>
           <a:p>
             <a:pPr algn="ctr">
+              <a:spcAft>
+                <a:spcPts val="200"/>
+              </a:spcAft>
               <a:defRPr sz="800" b="0">
                 <a:solidFill>
                   <a:srgbClr val="605E5C"/>
@@ -17299,15 +19472,16 @@
           </a:bodyPr>
           <a:lstStyle/>
           <a:p>
-            <a:pPr algn="l">
+            <a:pPr>
               <a:defRPr sz="900">
                 <a:solidFill>
                   <a:srgbClr val="605E5C"/>
                 </a:solidFill>
+                <a:latin typeface="Segoe UI"/>
               </a:defRPr>
             </a:pPr>
             <a:r>
-              <a:t>VeloxCon 2026  •  April 30  •  Meta HQ, Menlo Park</a:t>
+              <a:t>VeloxCon 2026  |  April 30  |  Meta HQ, Menlo Park</a:t>
             </a:r>
           </a:p>
         </p:txBody>
@@ -17339,6 +19513,7 @@
                 <a:solidFill>
                   <a:srgbClr val="605E5C"/>
                 </a:solidFill>
+                <a:latin typeface="Segoe UI"/>
               </a:defRPr>
             </a:pPr>
             <a:r>
@@ -17673,4 +19848,324 @@
   </a:objectDefaults>
   <a:extraClrSchemeLst/>
 </a:theme>
+</file>
+
+<file path=ppt/theme/theme2.xml><?xml version="1.0" encoding="utf-8"?>
+<a:theme xmlns:a="http://schemas.openxmlformats.org/drawingml/2006/main" name="Office Theme">
+  <a:themeElements>
+    <a:clrScheme name="Office">
+      <a:dk1>
+        <a:sysClr val="windowText" lastClr="000000"/>
+      </a:dk1>
+      <a:lt1>
+        <a:sysClr val="window" lastClr="FFFFFF"/>
+      </a:lt1>
+      <a:dk2>
+        <a:srgbClr val="1F497D"/>
+      </a:dk2>
+      <a:lt2>
+        <a:srgbClr val="EEECE1"/>
+      </a:lt2>
+      <a:accent1>
+        <a:srgbClr val="4F81BD"/>
+      </a:accent1>
+      <a:accent2>
+        <a:srgbClr val="C0504D"/>
+      </a:accent2>
+      <a:accent3>
+        <a:srgbClr val="9BBB59"/>
+      </a:accent3>
+      <a:accent4>
+        <a:srgbClr val="8064A2"/>
+      </a:accent4>
+      <a:accent5>
+        <a:srgbClr val="4BACC6"/>
+      </a:accent5>
+      <a:accent6>
+        <a:srgbClr val="F79646"/>
+      </a:accent6>
+      <a:hlink>
+        <a:srgbClr val="0000FF"/>
+      </a:hlink>
+      <a:folHlink>
+        <a:srgbClr val="800080"/>
+      </a:folHlink>
+    </a:clrScheme>
+    <a:fontScheme name="Office">
+      <a:majorFont>
+        <a:latin typeface="Calibri"/>
+        <a:ea typeface=""/>
+        <a:cs typeface=""/>
+        <a:font script="Jpan" typeface="ＭＳ Ｐゴシック"/>
+        <a:font script="Hang" typeface="맑은 고딕"/>
+        <a:font script="Hans" typeface="宋体"/>
+        <a:font script="Hant" typeface="新細明體"/>
+        <a:font script="Arab" typeface="Times New Roman"/>
+        <a:font script="Hebr" typeface="Times New Roman"/>
+        <a:font script="Thai" typeface="Angsana New"/>
+        <a:font script="Ethi" typeface="Nyala"/>
+        <a:font script="Beng" typeface="Vrinda"/>
+        <a:font script="Gujr" typeface="Shruti"/>
+        <a:font script="Khmr" typeface="MoolBoran"/>
+        <a:font script="Knda" typeface="Tunga"/>
+        <a:font script="Guru" typeface="Raavi"/>
+        <a:font script="Cans" typeface="Euphemia"/>
+        <a:font script="Cher" typeface="Plantagenet Cherokee"/>
+        <a:font script="Yiii" typeface="Microsoft Yi Baiti"/>
+        <a:font script="Tibt" typeface="Microsoft Himalaya"/>
+        <a:font script="Thaa" typeface="MV Boli"/>
+        <a:font script="Deva" typeface="Mangal"/>
+        <a:font script="Telu" typeface="Gautami"/>
+        <a:font script="Taml" typeface="Latha"/>
+        <a:font script="Syrc" typeface="Estrangelo Edessa"/>
+        <a:font script="Orya" typeface="Kalinga"/>
+        <a:font script="Mlym" typeface="Kartika"/>
+        <a:font script="Laoo" typeface="DokChampa"/>
+        <a:font script="Sinh" typeface="Iskoola Pota"/>
+        <a:font script="Mong" typeface="Mongolian Baiti"/>
+        <a:font script="Viet" typeface="Times New Roman"/>
+        <a:font script="Uigh" typeface="Microsoft Uighur"/>
+        <a:font script="Geor" typeface="Sylfaen"/>
+      </a:majorFont>
+      <a:minorFont>
+        <a:latin typeface="Calibri"/>
+        <a:ea typeface=""/>
+        <a:cs typeface=""/>
+        <a:font script="Jpan" typeface="ＭＳ Ｐゴシック"/>
+        <a:font script="Hang" typeface="맑은 고딕"/>
+        <a:font script="Hans" typeface="宋体"/>
+        <a:font script="Hant" typeface="新細明體"/>
+        <a:font script="Arab" typeface="Arial"/>
+        <a:font script="Hebr" typeface="Arial"/>
+        <a:font script="Thai" typeface="Cordia New"/>
+        <a:font script="Ethi" typeface="Nyala"/>
+        <a:font script="Beng" typeface="Vrinda"/>
+        <a:font script="Gujr" typeface="Shruti"/>
+        <a:font script="Khmr" typeface="DaunPenh"/>
+        <a:font script="Knda" typeface="Tunga"/>
+        <a:font script="Guru" typeface="Raavi"/>
+        <a:font script="Cans" typeface="Euphemia"/>
+        <a:font script="Cher" typeface="Plantagenet Cherokee"/>
+        <a:font script="Yiii" typeface="Microsoft Yi Baiti"/>
+        <a:font script="Tibt" typeface="Microsoft Himalaya"/>
+        <a:font script="Thaa" typeface="MV Boli"/>
+        <a:font script="Deva" typeface="Mangal"/>
+        <a:font script="Telu" typeface="Gautami"/>
+        <a:font script="Taml" typeface="Latha"/>
+        <a:font script="Syrc" typeface="Estrangelo Edessa"/>
+        <a:font script="Orya" typeface="Kalinga"/>
+        <a:font script="Mlym" typeface="Kartika"/>
+        <a:font script="Laoo" typeface="DokChampa"/>
+        <a:font script="Sinh" typeface="Iskoola Pota"/>
+        <a:font script="Mong" typeface="Mongolian Baiti"/>
+        <a:font script="Viet" typeface="Arial"/>
+        <a:font script="Uigh" typeface="Microsoft Uighur"/>
+        <a:font script="Geor" typeface="Sylfaen"/>
+      </a:minorFont>
+    </a:fontScheme>
+    <a:fmtScheme name="Office">
+      <a:fillStyleLst>
+        <a:solidFill>
+          <a:schemeClr val="phClr"/>
+        </a:solidFill>
+        <a:gradFill rotWithShape="1">
+          <a:gsLst>
+            <a:gs pos="0">
+              <a:schemeClr val="phClr">
+                <a:tint val="50000"/>
+                <a:satMod val="300000"/>
+              </a:schemeClr>
+            </a:gs>
+            <a:gs pos="35000">
+              <a:schemeClr val="phClr">
+                <a:tint val="37000"/>
+                <a:satMod val="300000"/>
+              </a:schemeClr>
+            </a:gs>
+            <a:gs pos="100000">
+              <a:schemeClr val="phClr">
+                <a:tint val="15000"/>
+                <a:satMod val="350000"/>
+              </a:schemeClr>
+            </a:gs>
+          </a:gsLst>
+          <a:lin ang="16200000" scaled="1"/>
+        </a:gradFill>
+        <a:gradFill rotWithShape="1">
+          <a:gsLst>
+            <a:gs pos="0">
+              <a:schemeClr val="phClr">
+                <a:tint val="100000"/>
+                <a:shade val="100000"/>
+                <a:satMod val="130000"/>
+              </a:schemeClr>
+            </a:gs>
+            <a:gs pos="100000">
+              <a:schemeClr val="phClr">
+                <a:tint val="50000"/>
+                <a:shade val="100000"/>
+                <a:satMod val="350000"/>
+              </a:schemeClr>
+            </a:gs>
+          </a:gsLst>
+          <a:lin ang="16200000" scaled="0"/>
+        </a:gradFill>
+      </a:fillStyleLst>
+      <a:lnStyleLst>
+        <a:ln w="9525" cap="flat" cmpd="sng" algn="ctr">
+          <a:solidFill>
+            <a:schemeClr val="phClr">
+              <a:shade val="95000"/>
+              <a:satMod val="105000"/>
+            </a:schemeClr>
+          </a:solidFill>
+          <a:prstDash val="solid"/>
+        </a:ln>
+        <a:ln w="25400" cap="flat" cmpd="sng" algn="ctr">
+          <a:solidFill>
+            <a:schemeClr val="phClr"/>
+          </a:solidFill>
+          <a:prstDash val="solid"/>
+        </a:ln>
+        <a:ln w="38100" cap="flat" cmpd="sng" algn="ctr">
+          <a:solidFill>
+            <a:schemeClr val="phClr"/>
+          </a:solidFill>
+          <a:prstDash val="solid"/>
+        </a:ln>
+      </a:lnStyleLst>
+      <a:effectStyleLst>
+        <a:effectStyle>
+          <a:effectLst>
+            <a:outerShdw blurRad="40000" dist="20000" dir="5400000" rotWithShape="0">
+              <a:srgbClr val="000000">
+                <a:alpha val="38000"/>
+              </a:srgbClr>
+            </a:outerShdw>
+          </a:effectLst>
+        </a:effectStyle>
+        <a:effectStyle>
+          <a:effectLst>
+            <a:outerShdw blurRad="40000" dist="23000" dir="5400000" rotWithShape="0">
+              <a:srgbClr val="000000">
+                <a:alpha val="35000"/>
+              </a:srgbClr>
+            </a:outerShdw>
+          </a:effectLst>
+        </a:effectStyle>
+        <a:effectStyle>
+          <a:effectLst>
+            <a:outerShdw blurRad="40000" dist="23000" dir="5400000" rotWithShape="0">
+              <a:srgbClr val="000000">
+                <a:alpha val="35000"/>
+              </a:srgbClr>
+            </a:outerShdw>
+          </a:effectLst>
+          <a:scene3d>
+            <a:camera prst="orthographicFront">
+              <a:rot lat="0" lon="0" rev="0"/>
+            </a:camera>
+            <a:lightRig rig="threePt" dir="t">
+              <a:rot lat="0" lon="0" rev="1200000"/>
+            </a:lightRig>
+          </a:scene3d>
+          <a:sp3d>
+            <a:bevelT w="63500" h="25400"/>
+          </a:sp3d>
+        </a:effectStyle>
+      </a:effectStyleLst>
+      <a:bgFillStyleLst>
+        <a:solidFill>
+          <a:schemeClr val="phClr"/>
+        </a:solidFill>
+        <a:gradFill rotWithShape="1">
+          <a:gsLst>
+            <a:gs pos="0">
+              <a:schemeClr val="phClr">
+                <a:tint val="40000"/>
+                <a:satMod val="350000"/>
+              </a:schemeClr>
+            </a:gs>
+            <a:gs pos="40000">
+              <a:schemeClr val="phClr">
+                <a:tint val="45000"/>
+                <a:shade val="99000"/>
+                <a:satMod val="350000"/>
+              </a:schemeClr>
+            </a:gs>
+            <a:gs pos="100000">
+              <a:schemeClr val="phClr">
+                <a:shade val="20000"/>
+                <a:satMod val="255000"/>
+              </a:schemeClr>
+            </a:gs>
+          </a:gsLst>
+          <a:path path="circle">
+            <a:fillToRect l="50000" t="-80000" r="50000" b="180000"/>
+          </a:path>
+        </a:gradFill>
+        <a:gradFill rotWithShape="1">
+          <a:gsLst>
+            <a:gs pos="0">
+              <a:schemeClr val="phClr">
+                <a:tint val="80000"/>
+                <a:satMod val="300000"/>
+              </a:schemeClr>
+            </a:gs>
+            <a:gs pos="100000">
+              <a:schemeClr val="phClr">
+                <a:shade val="30000"/>
+                <a:satMod val="200000"/>
+              </a:schemeClr>
+            </a:gs>
+          </a:gsLst>
+          <a:path path="circle">
+            <a:fillToRect l="50000" t="50000" r="50000" b="50000"/>
+          </a:path>
+        </a:gradFill>
+      </a:bgFillStyleLst>
+    </a:fmtScheme>
+  </a:themeElements>
+  <a:objectDefaults>
+    <a:spDef>
+      <a:spPr/>
+      <a:bodyPr/>
+      <a:lstStyle/>
+      <a:style>
+        <a:lnRef idx="1">
+          <a:schemeClr val="accent1"/>
+        </a:lnRef>
+        <a:fillRef idx="3">
+          <a:schemeClr val="accent1"/>
+        </a:fillRef>
+        <a:effectRef idx="2">
+          <a:schemeClr val="accent1"/>
+        </a:effectRef>
+        <a:fontRef idx="minor">
+          <a:schemeClr val="lt1"/>
+        </a:fontRef>
+      </a:style>
+    </a:spDef>
+    <a:lnDef>
+      <a:spPr/>
+      <a:bodyPr/>
+      <a:lstStyle/>
+      <a:style>
+        <a:lnRef idx="2">
+          <a:schemeClr val="accent1"/>
+        </a:lnRef>
+        <a:fillRef idx="0">
+          <a:schemeClr val="accent1"/>
+        </a:fillRef>
+        <a:effectRef idx="1">
+          <a:schemeClr val="accent1"/>
+        </a:effectRef>
+        <a:fontRef idx="minor">
+          <a:schemeClr val="tx1"/>
+        </a:fontRef>
+      </a:style>
+    </a:lnDef>
+  </a:objectDefaults>
+  <a:extraClrSchemeLst/>
+</a:theme>
 </file>